--- a/lv_readings/images/intropathtrace.pptx
+++ b/lv_readings/images/intropathtrace.pptx
@@ -8,6 +8,8 @@
     <p:sldId id="256" r:id="rId2"/>
     <p:sldId id="257" r:id="rId3"/>
     <p:sldId id="258" r:id="rId4"/>
+    <p:sldId id="259" r:id="rId5"/>
+    <p:sldId id="260" r:id="rId6"/>
   </p:sldIdLst>
   <p:sldSz cx="12192000" cy="6858000"/>
   <p:notesSz cx="6858000" cy="9144000"/>
@@ -263,7 +265,7 @@
           <a:p>
             <a:fld id="{6487BBF2-5813-4A92-ADF4-45C081C37504}" type="datetimeFigureOut">
               <a:rPr lang="en-GB" smtClean="0"/>
-              <a:t>01/09/2025</a:t>
+              <a:t>19/01/2026</a:t>
             </a:fld>
             <a:endParaRPr lang="en-GB"/>
           </a:p>
@@ -463,7 +465,7 @@
           <a:p>
             <a:fld id="{6487BBF2-5813-4A92-ADF4-45C081C37504}" type="datetimeFigureOut">
               <a:rPr lang="en-GB" smtClean="0"/>
-              <a:t>01/09/2025</a:t>
+              <a:t>19/01/2026</a:t>
             </a:fld>
             <a:endParaRPr lang="en-GB"/>
           </a:p>
@@ -673,7 +675,7 @@
           <a:p>
             <a:fld id="{6487BBF2-5813-4A92-ADF4-45C081C37504}" type="datetimeFigureOut">
               <a:rPr lang="en-GB" smtClean="0"/>
-              <a:t>01/09/2025</a:t>
+              <a:t>19/01/2026</a:t>
             </a:fld>
             <a:endParaRPr lang="en-GB"/>
           </a:p>
@@ -873,7 +875,7 @@
           <a:p>
             <a:fld id="{6487BBF2-5813-4A92-ADF4-45C081C37504}" type="datetimeFigureOut">
               <a:rPr lang="en-GB" smtClean="0"/>
-              <a:t>01/09/2025</a:t>
+              <a:t>19/01/2026</a:t>
             </a:fld>
             <a:endParaRPr lang="en-GB"/>
           </a:p>
@@ -1149,7 +1151,7 @@
           <a:p>
             <a:fld id="{6487BBF2-5813-4A92-ADF4-45C081C37504}" type="datetimeFigureOut">
               <a:rPr lang="en-GB" smtClean="0"/>
-              <a:t>01/09/2025</a:t>
+              <a:t>19/01/2026</a:t>
             </a:fld>
             <a:endParaRPr lang="en-GB"/>
           </a:p>
@@ -1417,7 +1419,7 @@
           <a:p>
             <a:fld id="{6487BBF2-5813-4A92-ADF4-45C081C37504}" type="datetimeFigureOut">
               <a:rPr lang="en-GB" smtClean="0"/>
-              <a:t>01/09/2025</a:t>
+              <a:t>19/01/2026</a:t>
             </a:fld>
             <a:endParaRPr lang="en-GB"/>
           </a:p>
@@ -1832,7 +1834,7 @@
           <a:p>
             <a:fld id="{6487BBF2-5813-4A92-ADF4-45C081C37504}" type="datetimeFigureOut">
               <a:rPr lang="en-GB" smtClean="0"/>
-              <a:t>01/09/2025</a:t>
+              <a:t>19/01/2026</a:t>
             </a:fld>
             <a:endParaRPr lang="en-GB"/>
           </a:p>
@@ -1974,7 +1976,7 @@
           <a:p>
             <a:fld id="{6487BBF2-5813-4A92-ADF4-45C081C37504}" type="datetimeFigureOut">
               <a:rPr lang="en-GB" smtClean="0"/>
-              <a:t>01/09/2025</a:t>
+              <a:t>19/01/2026</a:t>
             </a:fld>
             <a:endParaRPr lang="en-GB"/>
           </a:p>
@@ -2087,7 +2089,7 @@
           <a:p>
             <a:fld id="{6487BBF2-5813-4A92-ADF4-45C081C37504}" type="datetimeFigureOut">
               <a:rPr lang="en-GB" smtClean="0"/>
-              <a:t>01/09/2025</a:t>
+              <a:t>19/01/2026</a:t>
             </a:fld>
             <a:endParaRPr lang="en-GB"/>
           </a:p>
@@ -2400,7 +2402,7 @@
           <a:p>
             <a:fld id="{6487BBF2-5813-4A92-ADF4-45C081C37504}" type="datetimeFigureOut">
               <a:rPr lang="en-GB" smtClean="0"/>
-              <a:t>01/09/2025</a:t>
+              <a:t>19/01/2026</a:t>
             </a:fld>
             <a:endParaRPr lang="en-GB"/>
           </a:p>
@@ -2689,7 +2691,7 @@
           <a:p>
             <a:fld id="{6487BBF2-5813-4A92-ADF4-45C081C37504}" type="datetimeFigureOut">
               <a:rPr lang="en-GB" smtClean="0"/>
-              <a:t>01/09/2025</a:t>
+              <a:t>19/01/2026</a:t>
             </a:fld>
             <a:endParaRPr lang="en-GB"/>
           </a:p>
@@ -2932,7 +2934,7 @@
           <a:p>
             <a:fld id="{6487BBF2-5813-4A92-ADF4-45C081C37504}" type="datetimeFigureOut">
               <a:rPr lang="en-GB" smtClean="0"/>
-              <a:t>01/09/2025</a:t>
+              <a:t>19/01/2026</a:t>
             </a:fld>
             <a:endParaRPr lang="en-GB"/>
           </a:p>
@@ -5817,234 +5819,6 @@
       </p:grpSpPr>
       <p:sp>
         <p:nvSpPr>
-          <p:cNvPr id="64" name="Arc 63">
-            <a:extLst>
-              <a:ext uri="{FF2B5EF4-FFF2-40B4-BE49-F238E27FC236}">
-                <a16:creationId xmlns:a16="http://schemas.microsoft.com/office/drawing/2014/main" id="{1691CF3F-FAC2-4DA5-BF63-0B4D4D72F3A6}"/>
-              </a:ext>
-            </a:extLst>
-          </p:cNvPr>
-          <p:cNvSpPr/>
-          <p:nvPr/>
-        </p:nvSpPr>
-        <p:spPr>
-          <a:xfrm rot="1003916">
-            <a:off x="816248" y="3790689"/>
-            <a:ext cx="721895" cy="705852"/>
-          </a:xfrm>
-          <a:prstGeom prst="arc">
-            <a:avLst>
-              <a:gd name="adj1" fmla="val 16200000"/>
-              <a:gd name="adj2" fmla="val 13932934"/>
-            </a:avLst>
-          </a:prstGeom>
-          <a:noFill/>
-          <a:ln w="38100">
-            <a:solidFill>
-              <a:schemeClr val="tx1"/>
-            </a:solidFill>
-            <a:headEnd type="triangle" w="lg" len="lg"/>
-            <a:tailEnd type="triangle" w="lg" len="lg"/>
-          </a:ln>
-        </p:spPr>
-        <p:style>
-          <a:lnRef idx="1">
-            <a:schemeClr val="accent1"/>
-          </a:lnRef>
-          <a:fillRef idx="0">
-            <a:schemeClr val="accent1"/>
-          </a:fillRef>
-          <a:effectRef idx="0">
-            <a:schemeClr val="accent1"/>
-          </a:effectRef>
-          <a:fontRef idx="minor">
-            <a:schemeClr val="tx1"/>
-          </a:fontRef>
-        </p:style>
-        <p:txBody>
-          <a:bodyPr rtlCol="0" anchor="ctr"/>
-          <a:lstStyle/>
-          <a:p>
-            <a:pPr algn="ctr"/>
-            <a:endParaRPr lang="en-GB" sz="3200" dirty="0"/>
-          </a:p>
-        </p:txBody>
-      </p:sp>
-      <p:sp>
-        <p:nvSpPr>
-          <p:cNvPr id="65" name="Rectangle 64">
-            <a:extLst>
-              <a:ext uri="{FF2B5EF4-FFF2-40B4-BE49-F238E27FC236}">
-                <a16:creationId xmlns:a16="http://schemas.microsoft.com/office/drawing/2014/main" id="{2D44291F-1D23-48B0-8155-E5B9189D0B29}"/>
-              </a:ext>
-            </a:extLst>
-          </p:cNvPr>
-          <p:cNvSpPr/>
-          <p:nvPr/>
-        </p:nvSpPr>
-        <p:spPr>
-          <a:xfrm>
-            <a:off x="784162" y="3076074"/>
-            <a:ext cx="721895" cy="705852"/>
-          </a:xfrm>
-          <a:prstGeom prst="rect">
-            <a:avLst/>
-          </a:prstGeom>
-          <a:noFill/>
-          <a:ln>
-            <a:solidFill>
-              <a:schemeClr val="tx1"/>
-            </a:solidFill>
-          </a:ln>
-        </p:spPr>
-        <p:style>
-          <a:lnRef idx="2">
-            <a:schemeClr val="accent1">
-              <a:shade val="50000"/>
-            </a:schemeClr>
-          </a:lnRef>
-          <a:fillRef idx="1">
-            <a:schemeClr val="accent1"/>
-          </a:fillRef>
-          <a:effectRef idx="0">
-            <a:schemeClr val="accent1"/>
-          </a:effectRef>
-          <a:fontRef idx="minor">
-            <a:schemeClr val="lt1"/>
-          </a:fontRef>
-        </p:style>
-        <p:txBody>
-          <a:bodyPr rtlCol="0" anchor="ctr"/>
-          <a:lstStyle/>
-          <a:p>
-            <a:pPr algn="ctr"/>
-            <a:r>
-              <a:rPr lang="en-GB" sz="3200" dirty="0">
-                <a:solidFill>
-                  <a:schemeClr val="tx1"/>
-                </a:solidFill>
-              </a:rPr>
-              <a:t>Y1</a:t>
-            </a:r>
-          </a:p>
-        </p:txBody>
-      </p:sp>
-      <p:sp>
-        <p:nvSpPr>
-          <p:cNvPr id="66" name="Rectangle 65">
-            <a:extLst>
-              <a:ext uri="{FF2B5EF4-FFF2-40B4-BE49-F238E27FC236}">
-                <a16:creationId xmlns:a16="http://schemas.microsoft.com/office/drawing/2014/main" id="{35DE9A06-4DA6-4332-9AFB-19301BCBF9A4}"/>
-              </a:ext>
-            </a:extLst>
-          </p:cNvPr>
-          <p:cNvSpPr/>
-          <p:nvPr/>
-        </p:nvSpPr>
-        <p:spPr>
-          <a:xfrm>
-            <a:off x="2307484" y="3076074"/>
-            <a:ext cx="721895" cy="705852"/>
-          </a:xfrm>
-          <a:prstGeom prst="rect">
-            <a:avLst/>
-          </a:prstGeom>
-          <a:noFill/>
-          <a:ln>
-            <a:solidFill>
-              <a:schemeClr val="tx1"/>
-            </a:solidFill>
-          </a:ln>
-        </p:spPr>
-        <p:style>
-          <a:lnRef idx="2">
-            <a:schemeClr val="accent1">
-              <a:shade val="50000"/>
-            </a:schemeClr>
-          </a:lnRef>
-          <a:fillRef idx="1">
-            <a:schemeClr val="accent1"/>
-          </a:fillRef>
-          <a:effectRef idx="0">
-            <a:schemeClr val="accent1"/>
-          </a:effectRef>
-          <a:fontRef idx="minor">
-            <a:schemeClr val="lt1"/>
-          </a:fontRef>
-        </p:style>
-        <p:txBody>
-          <a:bodyPr rtlCol="0" anchor="ctr"/>
-          <a:lstStyle/>
-          <a:p>
-            <a:pPr algn="ctr"/>
-            <a:r>
-              <a:rPr lang="en-GB" sz="3200" dirty="0">
-                <a:solidFill>
-                  <a:schemeClr val="tx1"/>
-                </a:solidFill>
-              </a:rPr>
-              <a:t>Y2</a:t>
-            </a:r>
-          </a:p>
-        </p:txBody>
-      </p:sp>
-      <p:sp>
-        <p:nvSpPr>
-          <p:cNvPr id="67" name="Arc 66">
-            <a:extLst>
-              <a:ext uri="{FF2B5EF4-FFF2-40B4-BE49-F238E27FC236}">
-                <a16:creationId xmlns:a16="http://schemas.microsoft.com/office/drawing/2014/main" id="{E888E1F1-280C-4843-8256-4C2FE1864DB0}"/>
-              </a:ext>
-            </a:extLst>
-          </p:cNvPr>
-          <p:cNvSpPr/>
-          <p:nvPr/>
-        </p:nvSpPr>
-        <p:spPr>
-          <a:xfrm rot="1003916">
-            <a:off x="2307483" y="3799452"/>
-            <a:ext cx="721895" cy="705852"/>
-          </a:xfrm>
-          <a:prstGeom prst="arc">
-            <a:avLst>
-              <a:gd name="adj1" fmla="val 16200000"/>
-              <a:gd name="adj2" fmla="val 13932934"/>
-            </a:avLst>
-          </a:prstGeom>
-          <a:noFill/>
-          <a:ln w="38100">
-            <a:solidFill>
-              <a:schemeClr val="tx1"/>
-            </a:solidFill>
-            <a:headEnd type="triangle" w="lg" len="lg"/>
-            <a:tailEnd type="triangle" w="lg" len="lg"/>
-          </a:ln>
-        </p:spPr>
-        <p:style>
-          <a:lnRef idx="1">
-            <a:schemeClr val="accent1"/>
-          </a:lnRef>
-          <a:fillRef idx="0">
-            <a:schemeClr val="accent1"/>
-          </a:fillRef>
-          <a:effectRef idx="0">
-            <a:schemeClr val="accent1"/>
-          </a:effectRef>
-          <a:fontRef idx="minor">
-            <a:schemeClr val="tx1"/>
-          </a:fontRef>
-        </p:style>
-        <p:txBody>
-          <a:bodyPr rtlCol="0" anchor="ctr"/>
-          <a:lstStyle/>
-          <a:p>
-            <a:pPr algn="ctr"/>
-            <a:endParaRPr lang="en-GB" sz="3200"/>
-          </a:p>
-        </p:txBody>
-      </p:sp>
-      <p:sp>
-        <p:nvSpPr>
           <p:cNvPr id="75" name="TextBox 74">
             <a:extLst>
               <a:ext uri="{FF2B5EF4-FFF2-40B4-BE49-F238E27FC236}">
@@ -6078,765 +5852,1014 @@
           </a:p>
         </p:txBody>
       </p:sp>
-      <p:sp>
-        <p:nvSpPr>
-          <p:cNvPr id="85" name="Rectangle 84">
+      <p:grpSp>
+        <p:nvGrpSpPr>
+          <p:cNvPr id="2" name="Group 1">
             <a:extLst>
               <a:ext uri="{FF2B5EF4-FFF2-40B4-BE49-F238E27FC236}">
-                <a16:creationId xmlns:a16="http://schemas.microsoft.com/office/drawing/2014/main" id="{3D905296-943E-4230-BCA4-59A75EF5C5A7}"/>
+                <a16:creationId xmlns:a16="http://schemas.microsoft.com/office/drawing/2014/main" id="{A4AC6FA8-6F76-4D5A-9DD6-EAF3606D5D8F}"/>
               </a:ext>
             </a:extLst>
           </p:cNvPr>
-          <p:cNvSpPr/>
+          <p:cNvGrpSpPr/>
           <p:nvPr/>
-        </p:nvSpPr>
-        <p:spPr>
+        </p:nvGrpSpPr>
+        <p:grpSpPr>
           <a:xfrm>
-            <a:off x="3852690" y="3076074"/>
-            <a:ext cx="721895" cy="705852"/>
+            <a:off x="784162" y="1319322"/>
+            <a:ext cx="5405200" cy="4154984"/>
+            <a:chOff x="784162" y="1319322"/>
+            <a:chExt cx="5405200" cy="4154984"/>
           </a:xfrm>
-          <a:prstGeom prst="rect">
-            <a:avLst/>
-          </a:prstGeom>
-          <a:noFill/>
-          <a:ln>
-            <a:solidFill>
+        </p:grpSpPr>
+        <p:sp>
+          <p:nvSpPr>
+            <p:cNvPr id="64" name="Arc 63">
+              <a:extLst>
+                <a:ext uri="{FF2B5EF4-FFF2-40B4-BE49-F238E27FC236}">
+                  <a16:creationId xmlns:a16="http://schemas.microsoft.com/office/drawing/2014/main" id="{1691CF3F-FAC2-4DA5-BF63-0B4D4D72F3A6}"/>
+                </a:ext>
+              </a:extLst>
+            </p:cNvPr>
+            <p:cNvSpPr/>
+            <p:nvPr/>
+          </p:nvSpPr>
+          <p:spPr>
+            <a:xfrm rot="1003916">
+              <a:off x="816248" y="3790689"/>
+              <a:ext cx="721895" cy="705852"/>
+            </a:xfrm>
+            <a:prstGeom prst="arc">
+              <a:avLst>
+                <a:gd name="adj1" fmla="val 16200000"/>
+                <a:gd name="adj2" fmla="val 13932934"/>
+              </a:avLst>
+            </a:prstGeom>
+            <a:noFill/>
+            <a:ln w="38100">
+              <a:solidFill>
+                <a:schemeClr val="tx1"/>
+              </a:solidFill>
+              <a:headEnd type="triangle" w="lg" len="lg"/>
+              <a:tailEnd type="triangle" w="lg" len="lg"/>
+            </a:ln>
+          </p:spPr>
+          <p:style>
+            <a:lnRef idx="1">
+              <a:schemeClr val="accent1"/>
+            </a:lnRef>
+            <a:fillRef idx="0">
+              <a:schemeClr val="accent1"/>
+            </a:fillRef>
+            <a:effectRef idx="0">
+              <a:schemeClr val="accent1"/>
+            </a:effectRef>
+            <a:fontRef idx="minor">
               <a:schemeClr val="tx1"/>
-            </a:solidFill>
-          </a:ln>
-        </p:spPr>
-        <p:style>
-          <a:lnRef idx="2">
-            <a:schemeClr val="accent1">
-              <a:shade val="50000"/>
-            </a:schemeClr>
-          </a:lnRef>
-          <a:fillRef idx="1">
-            <a:schemeClr val="accent1"/>
-          </a:fillRef>
-          <a:effectRef idx="0">
-            <a:schemeClr val="accent1"/>
-          </a:effectRef>
-          <a:fontRef idx="minor">
-            <a:schemeClr val="lt1"/>
-          </a:fontRef>
-        </p:style>
-        <p:txBody>
-          <a:bodyPr rtlCol="0" anchor="ctr"/>
-          <a:lstStyle/>
-          <a:p>
-            <a:pPr algn="ctr"/>
-            <a:r>
-              <a:rPr lang="en-GB" sz="3200" dirty="0">
-                <a:solidFill>
-                  <a:schemeClr val="tx1"/>
-                </a:solidFill>
-              </a:rPr>
-              <a:t>Y3</a:t>
-            </a:r>
-          </a:p>
-        </p:txBody>
-      </p:sp>
-      <p:sp>
-        <p:nvSpPr>
-          <p:cNvPr id="86" name="Arc 85">
-            <a:extLst>
-              <a:ext uri="{FF2B5EF4-FFF2-40B4-BE49-F238E27FC236}">
-                <a16:creationId xmlns:a16="http://schemas.microsoft.com/office/drawing/2014/main" id="{1AD23F76-7332-4DDB-AAD5-276343377AB2}"/>
-              </a:ext>
-            </a:extLst>
-          </p:cNvPr>
-          <p:cNvSpPr/>
-          <p:nvPr/>
-        </p:nvSpPr>
-        <p:spPr>
-          <a:xfrm rot="1003916">
-            <a:off x="3852689" y="3799452"/>
-            <a:ext cx="721895" cy="705852"/>
-          </a:xfrm>
-          <a:prstGeom prst="arc">
-            <a:avLst>
-              <a:gd name="adj1" fmla="val 16200000"/>
-              <a:gd name="adj2" fmla="val 13932934"/>
-            </a:avLst>
-          </a:prstGeom>
-          <a:noFill/>
-          <a:ln w="38100">
-            <a:solidFill>
+            </a:fontRef>
+          </p:style>
+          <p:txBody>
+            <a:bodyPr rtlCol="0" anchor="ctr"/>
+            <a:lstStyle/>
+            <a:p>
+              <a:pPr algn="ctr"/>
+              <a:endParaRPr lang="en-GB" sz="3200" dirty="0"/>
+            </a:p>
+          </p:txBody>
+        </p:sp>
+        <p:sp>
+          <p:nvSpPr>
+            <p:cNvPr id="65" name="Rectangle 64">
+              <a:extLst>
+                <a:ext uri="{FF2B5EF4-FFF2-40B4-BE49-F238E27FC236}">
+                  <a16:creationId xmlns:a16="http://schemas.microsoft.com/office/drawing/2014/main" id="{2D44291F-1D23-48B0-8155-E5B9189D0B29}"/>
+                </a:ext>
+              </a:extLst>
+            </p:cNvPr>
+            <p:cNvSpPr/>
+            <p:nvPr/>
+          </p:nvSpPr>
+          <p:spPr>
+            <a:xfrm>
+              <a:off x="784162" y="3076074"/>
+              <a:ext cx="721895" cy="705852"/>
+            </a:xfrm>
+            <a:prstGeom prst="rect">
+              <a:avLst/>
+            </a:prstGeom>
+            <a:noFill/>
+            <a:ln>
+              <a:solidFill>
+                <a:schemeClr val="tx1"/>
+              </a:solidFill>
+            </a:ln>
+          </p:spPr>
+          <p:style>
+            <a:lnRef idx="2">
+              <a:schemeClr val="accent1">
+                <a:shade val="50000"/>
+              </a:schemeClr>
+            </a:lnRef>
+            <a:fillRef idx="1">
+              <a:schemeClr val="accent1"/>
+            </a:fillRef>
+            <a:effectRef idx="0">
+              <a:schemeClr val="accent1"/>
+            </a:effectRef>
+            <a:fontRef idx="minor">
+              <a:schemeClr val="lt1"/>
+            </a:fontRef>
+          </p:style>
+          <p:txBody>
+            <a:bodyPr rtlCol="0" anchor="ctr"/>
+            <a:lstStyle/>
+            <a:p>
+              <a:pPr algn="ctr"/>
+              <a:r>
+                <a:rPr lang="en-GB" sz="3200" dirty="0">
+                  <a:solidFill>
+                    <a:schemeClr val="tx1"/>
+                  </a:solidFill>
+                </a:rPr>
+                <a:t>Y1</a:t>
+              </a:r>
+            </a:p>
+          </p:txBody>
+        </p:sp>
+        <p:sp>
+          <p:nvSpPr>
+            <p:cNvPr id="66" name="Rectangle 65">
+              <a:extLst>
+                <a:ext uri="{FF2B5EF4-FFF2-40B4-BE49-F238E27FC236}">
+                  <a16:creationId xmlns:a16="http://schemas.microsoft.com/office/drawing/2014/main" id="{35DE9A06-4DA6-4332-9AFB-19301BCBF9A4}"/>
+                </a:ext>
+              </a:extLst>
+            </p:cNvPr>
+            <p:cNvSpPr/>
+            <p:nvPr/>
+          </p:nvSpPr>
+          <p:spPr>
+            <a:xfrm>
+              <a:off x="2307484" y="3076074"/>
+              <a:ext cx="721895" cy="705852"/>
+            </a:xfrm>
+            <a:prstGeom prst="rect">
+              <a:avLst/>
+            </a:prstGeom>
+            <a:noFill/>
+            <a:ln>
+              <a:solidFill>
+                <a:schemeClr val="tx1"/>
+              </a:solidFill>
+            </a:ln>
+          </p:spPr>
+          <p:style>
+            <a:lnRef idx="2">
+              <a:schemeClr val="accent1">
+                <a:shade val="50000"/>
+              </a:schemeClr>
+            </a:lnRef>
+            <a:fillRef idx="1">
+              <a:schemeClr val="accent1"/>
+            </a:fillRef>
+            <a:effectRef idx="0">
+              <a:schemeClr val="accent1"/>
+            </a:effectRef>
+            <a:fontRef idx="minor">
+              <a:schemeClr val="lt1"/>
+            </a:fontRef>
+          </p:style>
+          <p:txBody>
+            <a:bodyPr rtlCol="0" anchor="ctr"/>
+            <a:lstStyle/>
+            <a:p>
+              <a:pPr algn="ctr"/>
+              <a:r>
+                <a:rPr lang="en-GB" sz="3200" dirty="0">
+                  <a:solidFill>
+                    <a:schemeClr val="tx1"/>
+                  </a:solidFill>
+                </a:rPr>
+                <a:t>Y2</a:t>
+              </a:r>
+            </a:p>
+          </p:txBody>
+        </p:sp>
+        <p:sp>
+          <p:nvSpPr>
+            <p:cNvPr id="67" name="Arc 66">
+              <a:extLst>
+                <a:ext uri="{FF2B5EF4-FFF2-40B4-BE49-F238E27FC236}">
+                  <a16:creationId xmlns:a16="http://schemas.microsoft.com/office/drawing/2014/main" id="{E888E1F1-280C-4843-8256-4C2FE1864DB0}"/>
+                </a:ext>
+              </a:extLst>
+            </p:cNvPr>
+            <p:cNvSpPr/>
+            <p:nvPr/>
+          </p:nvSpPr>
+          <p:spPr>
+            <a:xfrm rot="1003916">
+              <a:off x="2307483" y="3799452"/>
+              <a:ext cx="721895" cy="705852"/>
+            </a:xfrm>
+            <a:prstGeom prst="arc">
+              <a:avLst>
+                <a:gd name="adj1" fmla="val 16200000"/>
+                <a:gd name="adj2" fmla="val 13932934"/>
+              </a:avLst>
+            </a:prstGeom>
+            <a:noFill/>
+            <a:ln w="38100">
+              <a:solidFill>
+                <a:schemeClr val="tx1"/>
+              </a:solidFill>
+              <a:headEnd type="triangle" w="lg" len="lg"/>
+              <a:tailEnd type="triangle" w="lg" len="lg"/>
+            </a:ln>
+          </p:spPr>
+          <p:style>
+            <a:lnRef idx="1">
+              <a:schemeClr val="accent1"/>
+            </a:lnRef>
+            <a:fillRef idx="0">
+              <a:schemeClr val="accent1"/>
+            </a:fillRef>
+            <a:effectRef idx="0">
+              <a:schemeClr val="accent1"/>
+            </a:effectRef>
+            <a:fontRef idx="minor">
               <a:schemeClr val="tx1"/>
-            </a:solidFill>
-            <a:headEnd type="triangle" w="lg" len="lg"/>
-            <a:tailEnd type="triangle" w="lg" len="lg"/>
-          </a:ln>
-        </p:spPr>
-        <p:style>
-          <a:lnRef idx="1">
-            <a:schemeClr val="accent1"/>
-          </a:lnRef>
-          <a:fillRef idx="0">
-            <a:schemeClr val="accent1"/>
-          </a:fillRef>
-          <a:effectRef idx="0">
-            <a:schemeClr val="accent1"/>
-          </a:effectRef>
-          <a:fontRef idx="minor">
-            <a:schemeClr val="tx1"/>
-          </a:fontRef>
-        </p:style>
-        <p:txBody>
-          <a:bodyPr rtlCol="0" anchor="ctr"/>
-          <a:lstStyle/>
-          <a:p>
-            <a:pPr algn="ctr"/>
-            <a:endParaRPr lang="en-GB" sz="3200"/>
-          </a:p>
-        </p:txBody>
-      </p:sp>
-      <p:sp>
-        <p:nvSpPr>
-          <p:cNvPr id="87" name="TextBox 86">
-            <a:extLst>
-              <a:ext uri="{FF2B5EF4-FFF2-40B4-BE49-F238E27FC236}">
-                <a16:creationId xmlns:a16="http://schemas.microsoft.com/office/drawing/2014/main" id="{0BFF351A-8B7F-4580-A65E-AA75035EC0E2}"/>
-              </a:ext>
-            </a:extLst>
-          </p:cNvPr>
-          <p:cNvSpPr txBox="1"/>
-          <p:nvPr/>
-        </p:nvSpPr>
-        <p:spPr>
-          <a:xfrm>
-            <a:off x="913181" y="4428424"/>
-            <a:ext cx="721895" cy="461665"/>
-          </a:xfrm>
-          <a:prstGeom prst="rect">
-            <a:avLst/>
-          </a:prstGeom>
-          <a:noFill/>
-        </p:spPr>
-        <p:txBody>
-          <a:bodyPr wrap="square" rtlCol="0">
-            <a:spAutoFit/>
-          </a:bodyPr>
-          <a:lstStyle/>
-          <a:p>
-            <a:r>
-              <a:rPr lang="en-GB" sz="2400" dirty="0"/>
-              <a:t>u</a:t>
-            </a:r>
-            <a:r>
-              <a:rPr lang="en-GB" sz="2400" baseline="-25000" dirty="0"/>
-              <a:t>y1</a:t>
-            </a:r>
-            <a:endParaRPr lang="en-GB" sz="2400" dirty="0"/>
-          </a:p>
-        </p:txBody>
-      </p:sp>
-      <p:sp>
-        <p:nvSpPr>
-          <p:cNvPr id="88" name="TextBox 87">
-            <a:extLst>
-              <a:ext uri="{FF2B5EF4-FFF2-40B4-BE49-F238E27FC236}">
-                <a16:creationId xmlns:a16="http://schemas.microsoft.com/office/drawing/2014/main" id="{78A01F7A-74A1-4988-9A0A-D82DCFCAFD2D}"/>
-              </a:ext>
-            </a:extLst>
-          </p:cNvPr>
-          <p:cNvSpPr txBox="1"/>
-          <p:nvPr/>
-        </p:nvSpPr>
-        <p:spPr>
-          <a:xfrm>
-            <a:off x="2506215" y="4420849"/>
-            <a:ext cx="721895" cy="461665"/>
-          </a:xfrm>
-          <a:prstGeom prst="rect">
-            <a:avLst/>
-          </a:prstGeom>
-          <a:noFill/>
-        </p:spPr>
-        <p:txBody>
-          <a:bodyPr wrap="square" rtlCol="0">
-            <a:spAutoFit/>
-          </a:bodyPr>
-          <a:lstStyle/>
-          <a:p>
-            <a:r>
-              <a:rPr lang="en-GB" sz="2400" dirty="0"/>
-              <a:t>u</a:t>
-            </a:r>
-            <a:r>
-              <a:rPr lang="en-GB" sz="2400" baseline="-25000" dirty="0"/>
-              <a:t>y2</a:t>
-            </a:r>
-            <a:endParaRPr lang="en-GB" sz="2400" dirty="0"/>
-          </a:p>
-        </p:txBody>
-      </p:sp>
-      <p:sp>
-        <p:nvSpPr>
-          <p:cNvPr id="89" name="TextBox 88">
-            <a:extLst>
-              <a:ext uri="{FF2B5EF4-FFF2-40B4-BE49-F238E27FC236}">
-                <a16:creationId xmlns:a16="http://schemas.microsoft.com/office/drawing/2014/main" id="{C8AFB2D8-6FA4-42CD-9F2B-FAEA8C4D714D}"/>
-              </a:ext>
-            </a:extLst>
-          </p:cNvPr>
-          <p:cNvSpPr txBox="1"/>
-          <p:nvPr/>
-        </p:nvSpPr>
-        <p:spPr>
-          <a:xfrm>
-            <a:off x="3986841" y="4416331"/>
-            <a:ext cx="721895" cy="461665"/>
-          </a:xfrm>
-          <a:prstGeom prst="rect">
-            <a:avLst/>
-          </a:prstGeom>
-          <a:noFill/>
-        </p:spPr>
-        <p:txBody>
-          <a:bodyPr wrap="square" rtlCol="0">
-            <a:spAutoFit/>
-          </a:bodyPr>
-          <a:lstStyle/>
-          <a:p>
-            <a:r>
-              <a:rPr lang="en-GB" sz="2400" dirty="0"/>
-              <a:t>u</a:t>
-            </a:r>
-            <a:r>
-              <a:rPr lang="en-GB" sz="2400" baseline="-25000" dirty="0"/>
-              <a:t>y3</a:t>
-            </a:r>
-            <a:endParaRPr lang="en-GB" sz="2400" dirty="0"/>
-          </a:p>
-        </p:txBody>
-      </p:sp>
-      <p:sp>
-        <p:nvSpPr>
-          <p:cNvPr id="103" name="Rectangle 102">
-            <a:extLst>
-              <a:ext uri="{FF2B5EF4-FFF2-40B4-BE49-F238E27FC236}">
-                <a16:creationId xmlns:a16="http://schemas.microsoft.com/office/drawing/2014/main" id="{6E96D7AE-3114-4CA7-BD7C-C81F8B1226BA}"/>
-              </a:ext>
-            </a:extLst>
-          </p:cNvPr>
-          <p:cNvSpPr/>
-          <p:nvPr/>
-        </p:nvSpPr>
-        <p:spPr>
-          <a:xfrm>
-            <a:off x="5333316" y="3076074"/>
-            <a:ext cx="721895" cy="705852"/>
-          </a:xfrm>
-          <a:prstGeom prst="rect">
-            <a:avLst/>
-          </a:prstGeom>
-          <a:noFill/>
-          <a:ln>
-            <a:solidFill>
+            </a:fontRef>
+          </p:style>
+          <p:txBody>
+            <a:bodyPr rtlCol="0" anchor="ctr"/>
+            <a:lstStyle/>
+            <a:p>
+              <a:pPr algn="ctr"/>
+              <a:endParaRPr lang="en-GB" sz="3200"/>
+            </a:p>
+          </p:txBody>
+        </p:sp>
+        <p:sp>
+          <p:nvSpPr>
+            <p:cNvPr id="85" name="Rectangle 84">
+              <a:extLst>
+                <a:ext uri="{FF2B5EF4-FFF2-40B4-BE49-F238E27FC236}">
+                  <a16:creationId xmlns:a16="http://schemas.microsoft.com/office/drawing/2014/main" id="{3D905296-943E-4230-BCA4-59A75EF5C5A7}"/>
+                </a:ext>
+              </a:extLst>
+            </p:cNvPr>
+            <p:cNvSpPr/>
+            <p:nvPr/>
+          </p:nvSpPr>
+          <p:spPr>
+            <a:xfrm>
+              <a:off x="3852690" y="3076074"/>
+              <a:ext cx="721895" cy="705852"/>
+            </a:xfrm>
+            <a:prstGeom prst="rect">
+              <a:avLst/>
+            </a:prstGeom>
+            <a:noFill/>
+            <a:ln>
+              <a:solidFill>
+                <a:schemeClr val="tx1"/>
+              </a:solidFill>
+            </a:ln>
+          </p:spPr>
+          <p:style>
+            <a:lnRef idx="2">
+              <a:schemeClr val="accent1">
+                <a:shade val="50000"/>
+              </a:schemeClr>
+            </a:lnRef>
+            <a:fillRef idx="1">
+              <a:schemeClr val="accent1"/>
+            </a:fillRef>
+            <a:effectRef idx="0">
+              <a:schemeClr val="accent1"/>
+            </a:effectRef>
+            <a:fontRef idx="minor">
+              <a:schemeClr val="lt1"/>
+            </a:fontRef>
+          </p:style>
+          <p:txBody>
+            <a:bodyPr rtlCol="0" anchor="ctr"/>
+            <a:lstStyle/>
+            <a:p>
+              <a:pPr algn="ctr"/>
+              <a:r>
+                <a:rPr lang="en-GB" sz="3200" dirty="0">
+                  <a:solidFill>
+                    <a:schemeClr val="tx1"/>
+                  </a:solidFill>
+                </a:rPr>
+                <a:t>Y3</a:t>
+              </a:r>
+            </a:p>
+          </p:txBody>
+        </p:sp>
+        <p:sp>
+          <p:nvSpPr>
+            <p:cNvPr id="86" name="Arc 85">
+              <a:extLst>
+                <a:ext uri="{FF2B5EF4-FFF2-40B4-BE49-F238E27FC236}">
+                  <a16:creationId xmlns:a16="http://schemas.microsoft.com/office/drawing/2014/main" id="{1AD23F76-7332-4DDB-AAD5-276343377AB2}"/>
+                </a:ext>
+              </a:extLst>
+            </p:cNvPr>
+            <p:cNvSpPr/>
+            <p:nvPr/>
+          </p:nvSpPr>
+          <p:spPr>
+            <a:xfrm rot="1003916">
+              <a:off x="3852689" y="3799452"/>
+              <a:ext cx="721895" cy="705852"/>
+            </a:xfrm>
+            <a:prstGeom prst="arc">
+              <a:avLst>
+                <a:gd name="adj1" fmla="val 16200000"/>
+                <a:gd name="adj2" fmla="val 13932934"/>
+              </a:avLst>
+            </a:prstGeom>
+            <a:noFill/>
+            <a:ln w="38100">
+              <a:solidFill>
+                <a:schemeClr val="tx1"/>
+              </a:solidFill>
+              <a:headEnd type="triangle" w="lg" len="lg"/>
+              <a:tailEnd type="triangle" w="lg" len="lg"/>
+            </a:ln>
+          </p:spPr>
+          <p:style>
+            <a:lnRef idx="1">
+              <a:schemeClr val="accent1"/>
+            </a:lnRef>
+            <a:fillRef idx="0">
+              <a:schemeClr val="accent1"/>
+            </a:fillRef>
+            <a:effectRef idx="0">
+              <a:schemeClr val="accent1"/>
+            </a:effectRef>
+            <a:fontRef idx="minor">
               <a:schemeClr val="tx1"/>
-            </a:solidFill>
-          </a:ln>
-        </p:spPr>
-        <p:style>
-          <a:lnRef idx="2">
-            <a:schemeClr val="accent1">
-              <a:shade val="50000"/>
-            </a:schemeClr>
-          </a:lnRef>
-          <a:fillRef idx="1">
-            <a:schemeClr val="accent1"/>
-          </a:fillRef>
-          <a:effectRef idx="0">
-            <a:schemeClr val="accent1"/>
-          </a:effectRef>
-          <a:fontRef idx="minor">
-            <a:schemeClr val="lt1"/>
-          </a:fontRef>
-        </p:style>
-        <p:txBody>
-          <a:bodyPr rtlCol="0" anchor="ctr"/>
-          <a:lstStyle/>
-          <a:p>
-            <a:pPr algn="ctr"/>
-            <a:r>
-              <a:rPr lang="en-GB" sz="3200" dirty="0">
-                <a:solidFill>
-                  <a:schemeClr val="tx1"/>
-                </a:solidFill>
-              </a:rPr>
-              <a:t>Y4</a:t>
-            </a:r>
-          </a:p>
-        </p:txBody>
-      </p:sp>
-      <p:sp>
-        <p:nvSpPr>
-          <p:cNvPr id="104" name="Arc 103">
-            <a:extLst>
-              <a:ext uri="{FF2B5EF4-FFF2-40B4-BE49-F238E27FC236}">
-                <a16:creationId xmlns:a16="http://schemas.microsoft.com/office/drawing/2014/main" id="{C88199AF-3BD6-4F0B-9084-409882704445}"/>
-              </a:ext>
-            </a:extLst>
-          </p:cNvPr>
-          <p:cNvSpPr/>
-          <p:nvPr/>
-        </p:nvSpPr>
-        <p:spPr>
-          <a:xfrm rot="1003916">
-            <a:off x="5333315" y="3799452"/>
-            <a:ext cx="721895" cy="705852"/>
-          </a:xfrm>
-          <a:prstGeom prst="arc">
-            <a:avLst>
-              <a:gd name="adj1" fmla="val 16200000"/>
-              <a:gd name="adj2" fmla="val 13932934"/>
-            </a:avLst>
-          </a:prstGeom>
-          <a:noFill/>
-          <a:ln w="38100">
-            <a:solidFill>
+            </a:fontRef>
+          </p:style>
+          <p:txBody>
+            <a:bodyPr rtlCol="0" anchor="ctr"/>
+            <a:lstStyle/>
+            <a:p>
+              <a:pPr algn="ctr"/>
+              <a:endParaRPr lang="en-GB" sz="3200"/>
+            </a:p>
+          </p:txBody>
+        </p:sp>
+        <p:sp>
+          <p:nvSpPr>
+            <p:cNvPr id="87" name="TextBox 86">
+              <a:extLst>
+                <a:ext uri="{FF2B5EF4-FFF2-40B4-BE49-F238E27FC236}">
+                  <a16:creationId xmlns:a16="http://schemas.microsoft.com/office/drawing/2014/main" id="{0BFF351A-8B7F-4580-A65E-AA75035EC0E2}"/>
+                </a:ext>
+              </a:extLst>
+            </p:cNvPr>
+            <p:cNvSpPr txBox="1"/>
+            <p:nvPr/>
+          </p:nvSpPr>
+          <p:spPr>
+            <a:xfrm>
+              <a:off x="913181" y="4428424"/>
+              <a:ext cx="721895" cy="461665"/>
+            </a:xfrm>
+            <a:prstGeom prst="rect">
+              <a:avLst/>
+            </a:prstGeom>
+            <a:noFill/>
+          </p:spPr>
+          <p:txBody>
+            <a:bodyPr wrap="square" rtlCol="0">
+              <a:spAutoFit/>
+            </a:bodyPr>
+            <a:lstStyle/>
+            <a:p>
+              <a:r>
+                <a:rPr lang="en-GB" sz="2400" dirty="0"/>
+                <a:t>u</a:t>
+              </a:r>
+              <a:r>
+                <a:rPr lang="en-GB" sz="2400" baseline="-25000" dirty="0"/>
+                <a:t>y1</a:t>
+              </a:r>
+              <a:endParaRPr lang="en-GB" sz="2400" dirty="0"/>
+            </a:p>
+          </p:txBody>
+        </p:sp>
+        <p:sp>
+          <p:nvSpPr>
+            <p:cNvPr id="88" name="TextBox 87">
+              <a:extLst>
+                <a:ext uri="{FF2B5EF4-FFF2-40B4-BE49-F238E27FC236}">
+                  <a16:creationId xmlns:a16="http://schemas.microsoft.com/office/drawing/2014/main" id="{78A01F7A-74A1-4988-9A0A-D82DCFCAFD2D}"/>
+                </a:ext>
+              </a:extLst>
+            </p:cNvPr>
+            <p:cNvSpPr txBox="1"/>
+            <p:nvPr/>
+          </p:nvSpPr>
+          <p:spPr>
+            <a:xfrm>
+              <a:off x="2506215" y="4420849"/>
+              <a:ext cx="721895" cy="461665"/>
+            </a:xfrm>
+            <a:prstGeom prst="rect">
+              <a:avLst/>
+            </a:prstGeom>
+            <a:noFill/>
+          </p:spPr>
+          <p:txBody>
+            <a:bodyPr wrap="square" rtlCol="0">
+              <a:spAutoFit/>
+            </a:bodyPr>
+            <a:lstStyle/>
+            <a:p>
+              <a:r>
+                <a:rPr lang="en-GB" sz="2400" dirty="0"/>
+                <a:t>u</a:t>
+              </a:r>
+              <a:r>
+                <a:rPr lang="en-GB" sz="2400" baseline="-25000" dirty="0"/>
+                <a:t>y2</a:t>
+              </a:r>
+              <a:endParaRPr lang="en-GB" sz="2400" dirty="0"/>
+            </a:p>
+          </p:txBody>
+        </p:sp>
+        <p:sp>
+          <p:nvSpPr>
+            <p:cNvPr id="89" name="TextBox 88">
+              <a:extLst>
+                <a:ext uri="{FF2B5EF4-FFF2-40B4-BE49-F238E27FC236}">
+                  <a16:creationId xmlns:a16="http://schemas.microsoft.com/office/drawing/2014/main" id="{C8AFB2D8-6FA4-42CD-9F2B-FAEA8C4D714D}"/>
+                </a:ext>
+              </a:extLst>
+            </p:cNvPr>
+            <p:cNvSpPr txBox="1"/>
+            <p:nvPr/>
+          </p:nvSpPr>
+          <p:spPr>
+            <a:xfrm>
+              <a:off x="3986841" y="4416331"/>
+              <a:ext cx="721895" cy="461665"/>
+            </a:xfrm>
+            <a:prstGeom prst="rect">
+              <a:avLst/>
+            </a:prstGeom>
+            <a:noFill/>
+          </p:spPr>
+          <p:txBody>
+            <a:bodyPr wrap="square" rtlCol="0">
+              <a:spAutoFit/>
+            </a:bodyPr>
+            <a:lstStyle/>
+            <a:p>
+              <a:r>
+                <a:rPr lang="en-GB" sz="2400" dirty="0"/>
+                <a:t>u</a:t>
+              </a:r>
+              <a:r>
+                <a:rPr lang="en-GB" sz="2400" baseline="-25000" dirty="0"/>
+                <a:t>y3</a:t>
+              </a:r>
+              <a:endParaRPr lang="en-GB" sz="2400" dirty="0"/>
+            </a:p>
+          </p:txBody>
+        </p:sp>
+        <p:sp>
+          <p:nvSpPr>
+            <p:cNvPr id="103" name="Rectangle 102">
+              <a:extLst>
+                <a:ext uri="{FF2B5EF4-FFF2-40B4-BE49-F238E27FC236}">
+                  <a16:creationId xmlns:a16="http://schemas.microsoft.com/office/drawing/2014/main" id="{6E96D7AE-3114-4CA7-BD7C-C81F8B1226BA}"/>
+                </a:ext>
+              </a:extLst>
+            </p:cNvPr>
+            <p:cNvSpPr/>
+            <p:nvPr/>
+          </p:nvSpPr>
+          <p:spPr>
+            <a:xfrm>
+              <a:off x="5333316" y="3076074"/>
+              <a:ext cx="721895" cy="705852"/>
+            </a:xfrm>
+            <a:prstGeom prst="rect">
+              <a:avLst/>
+            </a:prstGeom>
+            <a:noFill/>
+            <a:ln>
+              <a:solidFill>
+                <a:schemeClr val="tx1"/>
+              </a:solidFill>
+            </a:ln>
+          </p:spPr>
+          <p:style>
+            <a:lnRef idx="2">
+              <a:schemeClr val="accent1">
+                <a:shade val="50000"/>
+              </a:schemeClr>
+            </a:lnRef>
+            <a:fillRef idx="1">
+              <a:schemeClr val="accent1"/>
+            </a:fillRef>
+            <a:effectRef idx="0">
+              <a:schemeClr val="accent1"/>
+            </a:effectRef>
+            <a:fontRef idx="minor">
+              <a:schemeClr val="lt1"/>
+            </a:fontRef>
+          </p:style>
+          <p:txBody>
+            <a:bodyPr rtlCol="0" anchor="ctr"/>
+            <a:lstStyle/>
+            <a:p>
+              <a:pPr algn="ctr"/>
+              <a:r>
+                <a:rPr lang="en-GB" sz="3200" dirty="0">
+                  <a:solidFill>
+                    <a:schemeClr val="tx1"/>
+                  </a:solidFill>
+                </a:rPr>
+                <a:t>Y4</a:t>
+              </a:r>
+            </a:p>
+          </p:txBody>
+        </p:sp>
+        <p:sp>
+          <p:nvSpPr>
+            <p:cNvPr id="104" name="Arc 103">
+              <a:extLst>
+                <a:ext uri="{FF2B5EF4-FFF2-40B4-BE49-F238E27FC236}">
+                  <a16:creationId xmlns:a16="http://schemas.microsoft.com/office/drawing/2014/main" id="{C88199AF-3BD6-4F0B-9084-409882704445}"/>
+                </a:ext>
+              </a:extLst>
+            </p:cNvPr>
+            <p:cNvSpPr/>
+            <p:nvPr/>
+          </p:nvSpPr>
+          <p:spPr>
+            <a:xfrm rot="1003916">
+              <a:off x="5333315" y="3799452"/>
+              <a:ext cx="721895" cy="705852"/>
+            </a:xfrm>
+            <a:prstGeom prst="arc">
+              <a:avLst>
+                <a:gd name="adj1" fmla="val 16200000"/>
+                <a:gd name="adj2" fmla="val 13932934"/>
+              </a:avLst>
+            </a:prstGeom>
+            <a:noFill/>
+            <a:ln w="38100">
+              <a:solidFill>
+                <a:schemeClr val="tx1"/>
+              </a:solidFill>
+              <a:headEnd type="triangle" w="lg" len="lg"/>
+              <a:tailEnd type="triangle" w="lg" len="lg"/>
+            </a:ln>
+          </p:spPr>
+          <p:style>
+            <a:lnRef idx="1">
+              <a:schemeClr val="accent1"/>
+            </a:lnRef>
+            <a:fillRef idx="0">
+              <a:schemeClr val="accent1"/>
+            </a:fillRef>
+            <a:effectRef idx="0">
+              <a:schemeClr val="accent1"/>
+            </a:effectRef>
+            <a:fontRef idx="minor">
               <a:schemeClr val="tx1"/>
-            </a:solidFill>
-            <a:headEnd type="triangle" w="lg" len="lg"/>
-            <a:tailEnd type="triangle" w="lg" len="lg"/>
-          </a:ln>
-        </p:spPr>
-        <p:style>
-          <a:lnRef idx="1">
-            <a:schemeClr val="accent1"/>
-          </a:lnRef>
-          <a:fillRef idx="0">
-            <a:schemeClr val="accent1"/>
-          </a:fillRef>
-          <a:effectRef idx="0">
-            <a:schemeClr val="accent1"/>
-          </a:effectRef>
-          <a:fontRef idx="minor">
-            <a:schemeClr val="tx1"/>
-          </a:fontRef>
-        </p:style>
-        <p:txBody>
-          <a:bodyPr rtlCol="0" anchor="ctr"/>
-          <a:lstStyle/>
-          <a:p>
-            <a:pPr algn="ctr"/>
-            <a:endParaRPr lang="en-GB" sz="3200"/>
-          </a:p>
-        </p:txBody>
-      </p:sp>
-      <p:sp>
-        <p:nvSpPr>
-          <p:cNvPr id="105" name="TextBox 104">
-            <a:extLst>
-              <a:ext uri="{FF2B5EF4-FFF2-40B4-BE49-F238E27FC236}">
-                <a16:creationId xmlns:a16="http://schemas.microsoft.com/office/drawing/2014/main" id="{9FF7F5B6-FCBA-4E96-BE94-0796EC7C72DC}"/>
-              </a:ext>
-            </a:extLst>
-          </p:cNvPr>
-          <p:cNvSpPr txBox="1"/>
-          <p:nvPr/>
-        </p:nvSpPr>
-        <p:spPr>
-          <a:xfrm>
-            <a:off x="5467467" y="4416331"/>
-            <a:ext cx="721895" cy="461665"/>
-          </a:xfrm>
-          <a:prstGeom prst="rect">
-            <a:avLst/>
-          </a:prstGeom>
-          <a:noFill/>
-        </p:spPr>
-        <p:txBody>
-          <a:bodyPr wrap="square" rtlCol="0">
-            <a:spAutoFit/>
-          </a:bodyPr>
-          <a:lstStyle/>
-          <a:p>
-            <a:r>
-              <a:rPr lang="en-GB" sz="2400" dirty="0"/>
-              <a:t>u</a:t>
-            </a:r>
-            <a:r>
-              <a:rPr lang="en-GB" sz="2400" baseline="-25000" dirty="0"/>
-              <a:t>y4</a:t>
-            </a:r>
-            <a:endParaRPr lang="en-GB" sz="2400" dirty="0"/>
-          </a:p>
-        </p:txBody>
-      </p:sp>
-      <p:cxnSp>
-        <p:nvCxnSpPr>
-          <p:cNvPr id="3" name="Connector: Curved 2">
-            <a:extLst>
-              <a:ext uri="{FF2B5EF4-FFF2-40B4-BE49-F238E27FC236}">
-                <a16:creationId xmlns:a16="http://schemas.microsoft.com/office/drawing/2014/main" id="{E7973318-829A-4E04-9456-F7788A22AC5B}"/>
-              </a:ext>
-            </a:extLst>
-          </p:cNvPr>
-          <p:cNvCxnSpPr>
-            <a:cxnSpLocks/>
-            <a:stCxn id="65" idx="0"/>
-            <a:endCxn id="66" idx="0"/>
-          </p:cNvCxnSpPr>
-          <p:nvPr/>
-        </p:nvCxnSpPr>
-        <p:spPr>
-          <a:xfrm rot="5400000" flipH="1" flipV="1">
-            <a:off x="1906771" y="2314413"/>
-            <a:ext cx="12700" cy="1523322"/>
-          </a:xfrm>
-          <a:prstGeom prst="curvedConnector3">
-            <a:avLst>
-              <a:gd name="adj1" fmla="val 1800000"/>
-            </a:avLst>
-          </a:prstGeom>
-          <a:ln w="38100">
-            <a:solidFill>
+            </a:fontRef>
+          </p:style>
+          <p:txBody>
+            <a:bodyPr rtlCol="0" anchor="ctr"/>
+            <a:lstStyle/>
+            <a:p>
+              <a:pPr algn="ctr"/>
+              <a:endParaRPr lang="en-GB" sz="3200"/>
+            </a:p>
+          </p:txBody>
+        </p:sp>
+        <p:sp>
+          <p:nvSpPr>
+            <p:cNvPr id="105" name="TextBox 104">
+              <a:extLst>
+                <a:ext uri="{FF2B5EF4-FFF2-40B4-BE49-F238E27FC236}">
+                  <a16:creationId xmlns:a16="http://schemas.microsoft.com/office/drawing/2014/main" id="{9FF7F5B6-FCBA-4E96-BE94-0796EC7C72DC}"/>
+                </a:ext>
+              </a:extLst>
+            </p:cNvPr>
+            <p:cNvSpPr txBox="1"/>
+            <p:nvPr/>
+          </p:nvSpPr>
+          <p:spPr>
+            <a:xfrm>
+              <a:off x="5467467" y="4416331"/>
+              <a:ext cx="721895" cy="461665"/>
+            </a:xfrm>
+            <a:prstGeom prst="rect">
+              <a:avLst/>
+            </a:prstGeom>
+            <a:noFill/>
+          </p:spPr>
+          <p:txBody>
+            <a:bodyPr wrap="square" rtlCol="0">
+              <a:spAutoFit/>
+            </a:bodyPr>
+            <a:lstStyle/>
+            <a:p>
+              <a:r>
+                <a:rPr lang="en-GB" sz="2400" dirty="0"/>
+                <a:t>u</a:t>
+              </a:r>
+              <a:r>
+                <a:rPr lang="en-GB" sz="2400" baseline="-25000" dirty="0"/>
+                <a:t>y4</a:t>
+              </a:r>
+              <a:endParaRPr lang="en-GB" sz="2400" dirty="0"/>
+            </a:p>
+          </p:txBody>
+        </p:sp>
+        <p:cxnSp>
+          <p:nvCxnSpPr>
+            <p:cNvPr id="3" name="Connector: Curved 2">
+              <a:extLst>
+                <a:ext uri="{FF2B5EF4-FFF2-40B4-BE49-F238E27FC236}">
+                  <a16:creationId xmlns:a16="http://schemas.microsoft.com/office/drawing/2014/main" id="{E7973318-829A-4E04-9456-F7788A22AC5B}"/>
+                </a:ext>
+              </a:extLst>
+            </p:cNvPr>
+            <p:cNvCxnSpPr>
+              <a:cxnSpLocks/>
+              <a:stCxn id="65" idx="0"/>
+              <a:endCxn id="66" idx="0"/>
+            </p:cNvCxnSpPr>
+            <p:nvPr/>
+          </p:nvCxnSpPr>
+          <p:spPr>
+            <a:xfrm rot="5400000" flipH="1" flipV="1">
+              <a:off x="1906771" y="2314413"/>
+              <a:ext cx="12700" cy="1523322"/>
+            </a:xfrm>
+            <a:prstGeom prst="curvedConnector3">
+              <a:avLst>
+                <a:gd name="adj1" fmla="val 1800000"/>
+              </a:avLst>
+            </a:prstGeom>
+            <a:ln w="38100">
+              <a:solidFill>
+                <a:schemeClr val="tx1"/>
+              </a:solidFill>
+              <a:headEnd type="triangle" w="lg" len="lg"/>
+              <a:tailEnd type="triangle" w="lg" len="lg"/>
+            </a:ln>
+          </p:spPr>
+          <p:style>
+            <a:lnRef idx="1">
+              <a:schemeClr val="accent1"/>
+            </a:lnRef>
+            <a:fillRef idx="0">
+              <a:schemeClr val="accent1"/>
+            </a:fillRef>
+            <a:effectRef idx="0">
+              <a:schemeClr val="accent1"/>
+            </a:effectRef>
+            <a:fontRef idx="minor">
               <a:schemeClr val="tx1"/>
-            </a:solidFill>
-            <a:headEnd type="triangle" w="lg" len="lg"/>
-            <a:tailEnd type="triangle" w="lg" len="lg"/>
-          </a:ln>
-        </p:spPr>
-        <p:style>
-          <a:lnRef idx="1">
-            <a:schemeClr val="accent1"/>
-          </a:lnRef>
-          <a:fillRef idx="0">
-            <a:schemeClr val="accent1"/>
-          </a:fillRef>
-          <a:effectRef idx="0">
-            <a:schemeClr val="accent1"/>
-          </a:effectRef>
-          <a:fontRef idx="minor">
-            <a:schemeClr val="tx1"/>
-          </a:fontRef>
-        </p:style>
-      </p:cxnSp>
-      <p:cxnSp>
-        <p:nvCxnSpPr>
-          <p:cNvPr id="6" name="Connector: Curved 5">
-            <a:extLst>
-              <a:ext uri="{FF2B5EF4-FFF2-40B4-BE49-F238E27FC236}">
-                <a16:creationId xmlns:a16="http://schemas.microsoft.com/office/drawing/2014/main" id="{0F8DF127-6FCA-403C-B820-3BF50B3F0154}"/>
-              </a:ext>
-            </a:extLst>
-          </p:cNvPr>
-          <p:cNvCxnSpPr>
-            <a:stCxn id="65" idx="0"/>
-            <a:endCxn id="85" idx="0"/>
-          </p:cNvCxnSpPr>
-          <p:nvPr/>
-        </p:nvCxnSpPr>
-        <p:spPr>
-          <a:xfrm rot="5400000" flipH="1" flipV="1">
-            <a:off x="2679374" y="1541810"/>
-            <a:ext cx="12700" cy="3068528"/>
-          </a:xfrm>
-          <a:prstGeom prst="curvedConnector3">
-            <a:avLst>
-              <a:gd name="adj1" fmla="val 5210528"/>
-            </a:avLst>
-          </a:prstGeom>
-          <a:ln w="38100">
-            <a:solidFill>
+            </a:fontRef>
+          </p:style>
+        </p:cxnSp>
+        <p:cxnSp>
+          <p:nvCxnSpPr>
+            <p:cNvPr id="6" name="Connector: Curved 5">
+              <a:extLst>
+                <a:ext uri="{FF2B5EF4-FFF2-40B4-BE49-F238E27FC236}">
+                  <a16:creationId xmlns:a16="http://schemas.microsoft.com/office/drawing/2014/main" id="{0F8DF127-6FCA-403C-B820-3BF50B3F0154}"/>
+                </a:ext>
+              </a:extLst>
+            </p:cNvPr>
+            <p:cNvCxnSpPr>
+              <a:stCxn id="65" idx="0"/>
+              <a:endCxn id="85" idx="0"/>
+            </p:cNvCxnSpPr>
+            <p:nvPr/>
+          </p:nvCxnSpPr>
+          <p:spPr>
+            <a:xfrm rot="5400000" flipH="1" flipV="1">
+              <a:off x="2679374" y="1541810"/>
+              <a:ext cx="12700" cy="3068528"/>
+            </a:xfrm>
+            <a:prstGeom prst="curvedConnector3">
+              <a:avLst>
+                <a:gd name="adj1" fmla="val 5210528"/>
+              </a:avLst>
+            </a:prstGeom>
+            <a:ln w="38100">
+              <a:solidFill>
+                <a:schemeClr val="tx1"/>
+              </a:solidFill>
+              <a:headEnd type="triangle" w="lg" len="lg"/>
+              <a:tailEnd type="triangle" w="lg" len="lg"/>
+            </a:ln>
+          </p:spPr>
+          <p:style>
+            <a:lnRef idx="1">
+              <a:schemeClr val="accent1"/>
+            </a:lnRef>
+            <a:fillRef idx="0">
+              <a:schemeClr val="accent1"/>
+            </a:fillRef>
+            <a:effectRef idx="0">
+              <a:schemeClr val="accent1"/>
+            </a:effectRef>
+            <a:fontRef idx="minor">
               <a:schemeClr val="tx1"/>
-            </a:solidFill>
-            <a:headEnd type="triangle" w="lg" len="lg"/>
-            <a:tailEnd type="triangle" w="lg" len="lg"/>
-          </a:ln>
-        </p:spPr>
-        <p:style>
-          <a:lnRef idx="1">
-            <a:schemeClr val="accent1"/>
-          </a:lnRef>
-          <a:fillRef idx="0">
-            <a:schemeClr val="accent1"/>
-          </a:fillRef>
-          <a:effectRef idx="0">
-            <a:schemeClr val="accent1"/>
-          </a:effectRef>
-          <a:fontRef idx="minor">
-            <a:schemeClr val="tx1"/>
-          </a:fontRef>
-        </p:style>
-      </p:cxnSp>
-      <p:cxnSp>
-        <p:nvCxnSpPr>
-          <p:cNvPr id="8" name="Connector: Curved 7">
-            <a:extLst>
-              <a:ext uri="{FF2B5EF4-FFF2-40B4-BE49-F238E27FC236}">
-                <a16:creationId xmlns:a16="http://schemas.microsoft.com/office/drawing/2014/main" id="{02B57284-F137-4E7C-A245-8DD58F37957B}"/>
-              </a:ext>
-            </a:extLst>
-          </p:cNvPr>
-          <p:cNvCxnSpPr>
-            <a:stCxn id="65" idx="0"/>
-            <a:endCxn id="103" idx="0"/>
-          </p:cNvCxnSpPr>
-          <p:nvPr/>
-        </p:nvCxnSpPr>
-        <p:spPr>
-          <a:xfrm rot="5400000" flipH="1" flipV="1">
-            <a:off x="3419687" y="801497"/>
-            <a:ext cx="12700" cy="4549154"/>
-          </a:xfrm>
-          <a:prstGeom prst="curvedConnector3">
-            <a:avLst>
-              <a:gd name="adj1" fmla="val 10642102"/>
-            </a:avLst>
-          </a:prstGeom>
-          <a:ln w="38100">
-            <a:solidFill>
+            </a:fontRef>
+          </p:style>
+        </p:cxnSp>
+        <p:cxnSp>
+          <p:nvCxnSpPr>
+            <p:cNvPr id="8" name="Connector: Curved 7">
+              <a:extLst>
+                <a:ext uri="{FF2B5EF4-FFF2-40B4-BE49-F238E27FC236}">
+                  <a16:creationId xmlns:a16="http://schemas.microsoft.com/office/drawing/2014/main" id="{02B57284-F137-4E7C-A245-8DD58F37957B}"/>
+                </a:ext>
+              </a:extLst>
+            </p:cNvPr>
+            <p:cNvCxnSpPr>
+              <a:stCxn id="65" idx="0"/>
+              <a:endCxn id="103" idx="0"/>
+            </p:cNvCxnSpPr>
+            <p:nvPr/>
+          </p:nvCxnSpPr>
+          <p:spPr>
+            <a:xfrm rot="5400000" flipH="1" flipV="1">
+              <a:off x="3419687" y="801497"/>
+              <a:ext cx="12700" cy="4549154"/>
+            </a:xfrm>
+            <a:prstGeom prst="curvedConnector3">
+              <a:avLst>
+                <a:gd name="adj1" fmla="val 10642102"/>
+              </a:avLst>
+            </a:prstGeom>
+            <a:ln w="38100">
+              <a:solidFill>
+                <a:schemeClr val="tx1"/>
+              </a:solidFill>
+              <a:headEnd type="triangle" w="lg" len="lg"/>
+              <a:tailEnd type="triangle" w="lg" len="lg"/>
+            </a:ln>
+          </p:spPr>
+          <p:style>
+            <a:lnRef idx="1">
+              <a:schemeClr val="accent1"/>
+            </a:lnRef>
+            <a:fillRef idx="0">
+              <a:schemeClr val="accent1"/>
+            </a:fillRef>
+            <a:effectRef idx="0">
+              <a:schemeClr val="accent1"/>
+            </a:effectRef>
+            <a:fontRef idx="minor">
               <a:schemeClr val="tx1"/>
-            </a:solidFill>
-            <a:headEnd type="triangle" w="lg" len="lg"/>
-            <a:tailEnd type="triangle" w="lg" len="lg"/>
-          </a:ln>
-        </p:spPr>
-        <p:style>
-          <a:lnRef idx="1">
-            <a:schemeClr val="accent1"/>
-          </a:lnRef>
-          <a:fillRef idx="0">
-            <a:schemeClr val="accent1"/>
-          </a:fillRef>
-          <a:effectRef idx="0">
-            <a:schemeClr val="accent1"/>
-          </a:effectRef>
-          <a:fontRef idx="minor">
-            <a:schemeClr val="tx1"/>
-          </a:fontRef>
-        </p:style>
-      </p:cxnSp>
-      <p:cxnSp>
-        <p:nvCxnSpPr>
-          <p:cNvPr id="10" name="Connector: Curved 9">
-            <a:extLst>
-              <a:ext uri="{FF2B5EF4-FFF2-40B4-BE49-F238E27FC236}">
-                <a16:creationId xmlns:a16="http://schemas.microsoft.com/office/drawing/2014/main" id="{AEB32857-7F9A-4BAB-9D36-0F6D4FCE2057}"/>
-              </a:ext>
-            </a:extLst>
-          </p:cNvPr>
-          <p:cNvCxnSpPr>
-            <a:stCxn id="66" idx="0"/>
-            <a:endCxn id="85" idx="0"/>
-          </p:cNvCxnSpPr>
-          <p:nvPr/>
-        </p:nvCxnSpPr>
-        <p:spPr>
-          <a:xfrm rot="5400000" flipH="1" flipV="1">
-            <a:off x="3441035" y="2303471"/>
-            <a:ext cx="12700" cy="1545206"/>
-          </a:xfrm>
-          <a:prstGeom prst="curvedConnector3">
-            <a:avLst>
-              <a:gd name="adj1" fmla="val 1800000"/>
-            </a:avLst>
-          </a:prstGeom>
-          <a:ln w="38100">
-            <a:solidFill>
+            </a:fontRef>
+          </p:style>
+        </p:cxnSp>
+        <p:cxnSp>
+          <p:nvCxnSpPr>
+            <p:cNvPr id="10" name="Connector: Curved 9">
+              <a:extLst>
+                <a:ext uri="{FF2B5EF4-FFF2-40B4-BE49-F238E27FC236}">
+                  <a16:creationId xmlns:a16="http://schemas.microsoft.com/office/drawing/2014/main" id="{AEB32857-7F9A-4BAB-9D36-0F6D4FCE2057}"/>
+                </a:ext>
+              </a:extLst>
+            </p:cNvPr>
+            <p:cNvCxnSpPr>
+              <a:stCxn id="66" idx="0"/>
+              <a:endCxn id="85" idx="0"/>
+            </p:cNvCxnSpPr>
+            <p:nvPr/>
+          </p:nvCxnSpPr>
+          <p:spPr>
+            <a:xfrm rot="5400000" flipH="1" flipV="1">
+              <a:off x="3441035" y="2303471"/>
+              <a:ext cx="12700" cy="1545206"/>
+            </a:xfrm>
+            <a:prstGeom prst="curvedConnector3">
+              <a:avLst>
+                <a:gd name="adj1" fmla="val 1800000"/>
+              </a:avLst>
+            </a:prstGeom>
+            <a:ln w="38100">
+              <a:solidFill>
+                <a:schemeClr val="tx1"/>
+              </a:solidFill>
+              <a:headEnd type="triangle" w="lg" len="lg"/>
+              <a:tailEnd type="triangle" w="lg" len="lg"/>
+            </a:ln>
+          </p:spPr>
+          <p:style>
+            <a:lnRef idx="1">
+              <a:schemeClr val="accent1"/>
+            </a:lnRef>
+            <a:fillRef idx="0">
+              <a:schemeClr val="accent1"/>
+            </a:fillRef>
+            <a:effectRef idx="0">
+              <a:schemeClr val="accent1"/>
+            </a:effectRef>
+            <a:fontRef idx="minor">
               <a:schemeClr val="tx1"/>
-            </a:solidFill>
-            <a:headEnd type="triangle" w="lg" len="lg"/>
-            <a:tailEnd type="triangle" w="lg" len="lg"/>
-          </a:ln>
-        </p:spPr>
-        <p:style>
-          <a:lnRef idx="1">
-            <a:schemeClr val="accent1"/>
-          </a:lnRef>
-          <a:fillRef idx="0">
-            <a:schemeClr val="accent1"/>
-          </a:fillRef>
-          <a:effectRef idx="0">
-            <a:schemeClr val="accent1"/>
-          </a:effectRef>
-          <a:fontRef idx="minor">
-            <a:schemeClr val="tx1"/>
-          </a:fontRef>
-        </p:style>
-      </p:cxnSp>
-      <p:cxnSp>
-        <p:nvCxnSpPr>
-          <p:cNvPr id="12" name="Connector: Curved 11">
-            <a:extLst>
-              <a:ext uri="{FF2B5EF4-FFF2-40B4-BE49-F238E27FC236}">
-                <a16:creationId xmlns:a16="http://schemas.microsoft.com/office/drawing/2014/main" id="{62ECA28C-C73A-4265-B51C-A05A2D1D3952}"/>
-              </a:ext>
-            </a:extLst>
-          </p:cNvPr>
-          <p:cNvCxnSpPr>
-            <a:stCxn id="85" idx="0"/>
-            <a:endCxn id="103" idx="0"/>
-          </p:cNvCxnSpPr>
-          <p:nvPr/>
-        </p:nvCxnSpPr>
-        <p:spPr>
-          <a:xfrm rot="5400000" flipH="1" flipV="1">
-            <a:off x="4953951" y="2335761"/>
-            <a:ext cx="12700" cy="1480626"/>
-          </a:xfrm>
-          <a:prstGeom prst="curvedConnector3">
-            <a:avLst>
-              <a:gd name="adj1" fmla="val 1800000"/>
-            </a:avLst>
-          </a:prstGeom>
-          <a:ln w="38100">
-            <a:solidFill>
+            </a:fontRef>
+          </p:style>
+        </p:cxnSp>
+        <p:cxnSp>
+          <p:nvCxnSpPr>
+            <p:cNvPr id="12" name="Connector: Curved 11">
+              <a:extLst>
+                <a:ext uri="{FF2B5EF4-FFF2-40B4-BE49-F238E27FC236}">
+                  <a16:creationId xmlns:a16="http://schemas.microsoft.com/office/drawing/2014/main" id="{62ECA28C-C73A-4265-B51C-A05A2D1D3952}"/>
+                </a:ext>
+              </a:extLst>
+            </p:cNvPr>
+            <p:cNvCxnSpPr>
+              <a:stCxn id="85" idx="0"/>
+              <a:endCxn id="103" idx="0"/>
+            </p:cNvCxnSpPr>
+            <p:nvPr/>
+          </p:nvCxnSpPr>
+          <p:spPr>
+            <a:xfrm rot="5400000" flipH="1" flipV="1">
+              <a:off x="4953951" y="2335761"/>
+              <a:ext cx="12700" cy="1480626"/>
+            </a:xfrm>
+            <a:prstGeom prst="curvedConnector3">
+              <a:avLst>
+                <a:gd name="adj1" fmla="val 1800000"/>
+              </a:avLst>
+            </a:prstGeom>
+            <a:ln w="38100">
+              <a:solidFill>
+                <a:schemeClr val="tx1"/>
+              </a:solidFill>
+              <a:headEnd type="triangle" w="lg" len="lg"/>
+              <a:tailEnd type="triangle" w="lg" len="lg"/>
+            </a:ln>
+          </p:spPr>
+          <p:style>
+            <a:lnRef idx="1">
+              <a:schemeClr val="accent1"/>
+            </a:lnRef>
+            <a:fillRef idx="0">
+              <a:schemeClr val="accent1"/>
+            </a:fillRef>
+            <a:effectRef idx="0">
+              <a:schemeClr val="accent1"/>
+            </a:effectRef>
+            <a:fontRef idx="minor">
               <a:schemeClr val="tx1"/>
-            </a:solidFill>
-            <a:headEnd type="triangle" w="lg" len="lg"/>
-            <a:tailEnd type="triangle" w="lg" len="lg"/>
-          </a:ln>
-        </p:spPr>
-        <p:style>
-          <a:lnRef idx="1">
-            <a:schemeClr val="accent1"/>
-          </a:lnRef>
-          <a:fillRef idx="0">
-            <a:schemeClr val="accent1"/>
-          </a:fillRef>
-          <a:effectRef idx="0">
-            <a:schemeClr val="accent1"/>
-          </a:effectRef>
-          <a:fontRef idx="minor">
-            <a:schemeClr val="tx1"/>
-          </a:fontRef>
-        </p:style>
-      </p:cxnSp>
-      <p:cxnSp>
-        <p:nvCxnSpPr>
-          <p:cNvPr id="16" name="Connector: Curved 15">
-            <a:extLst>
-              <a:ext uri="{FF2B5EF4-FFF2-40B4-BE49-F238E27FC236}">
-                <a16:creationId xmlns:a16="http://schemas.microsoft.com/office/drawing/2014/main" id="{E0294D74-C8CE-429B-A349-B4D5CBF4886A}"/>
-              </a:ext>
-            </a:extLst>
-          </p:cNvPr>
-          <p:cNvCxnSpPr>
-            <a:stCxn id="66" idx="0"/>
-            <a:endCxn id="103" idx="0"/>
-          </p:cNvCxnSpPr>
-          <p:nvPr/>
-        </p:nvCxnSpPr>
-        <p:spPr>
-          <a:xfrm rot="5400000" flipH="1" flipV="1">
-            <a:off x="4181348" y="1563158"/>
-            <a:ext cx="12700" cy="3025832"/>
-          </a:xfrm>
-          <a:prstGeom prst="curvedConnector3">
-            <a:avLst>
-              <a:gd name="adj1" fmla="val 5210528"/>
-            </a:avLst>
-          </a:prstGeom>
-          <a:ln w="38100">
-            <a:solidFill>
+            </a:fontRef>
+          </p:style>
+        </p:cxnSp>
+        <p:cxnSp>
+          <p:nvCxnSpPr>
+            <p:cNvPr id="16" name="Connector: Curved 15">
+              <a:extLst>
+                <a:ext uri="{FF2B5EF4-FFF2-40B4-BE49-F238E27FC236}">
+                  <a16:creationId xmlns:a16="http://schemas.microsoft.com/office/drawing/2014/main" id="{E0294D74-C8CE-429B-A349-B4D5CBF4886A}"/>
+                </a:ext>
+              </a:extLst>
+            </p:cNvPr>
+            <p:cNvCxnSpPr>
+              <a:stCxn id="66" idx="0"/>
+              <a:endCxn id="103" idx="0"/>
+            </p:cNvCxnSpPr>
+            <p:nvPr/>
+          </p:nvCxnSpPr>
+          <p:spPr>
+            <a:xfrm rot="5400000" flipH="1" flipV="1">
+              <a:off x="4181348" y="1563158"/>
+              <a:ext cx="12700" cy="3025832"/>
+            </a:xfrm>
+            <a:prstGeom prst="curvedConnector3">
+              <a:avLst>
+                <a:gd name="adj1" fmla="val 5210528"/>
+              </a:avLst>
+            </a:prstGeom>
+            <a:ln w="38100">
+              <a:solidFill>
+                <a:schemeClr val="tx1"/>
+              </a:solidFill>
+              <a:headEnd type="triangle" w="lg" len="lg"/>
+              <a:tailEnd type="triangle" w="lg" len="lg"/>
+            </a:ln>
+          </p:spPr>
+          <p:style>
+            <a:lnRef idx="1">
+              <a:schemeClr val="accent1"/>
+            </a:lnRef>
+            <a:fillRef idx="0">
+              <a:schemeClr val="accent1"/>
+            </a:fillRef>
+            <a:effectRef idx="0">
+              <a:schemeClr val="accent1"/>
+            </a:effectRef>
+            <a:fontRef idx="minor">
               <a:schemeClr val="tx1"/>
-            </a:solidFill>
-            <a:headEnd type="triangle" w="lg" len="lg"/>
-            <a:tailEnd type="triangle" w="lg" len="lg"/>
-          </a:ln>
-        </p:spPr>
-        <p:style>
-          <a:lnRef idx="1">
-            <a:schemeClr val="accent1"/>
-          </a:lnRef>
-          <a:fillRef idx="0">
-            <a:schemeClr val="accent1"/>
-          </a:fillRef>
-          <a:effectRef idx="0">
-            <a:schemeClr val="accent1"/>
-          </a:effectRef>
-          <a:fontRef idx="minor">
-            <a:schemeClr val="tx1"/>
-          </a:fontRef>
-        </p:style>
-      </p:cxnSp>
-      <p:sp>
-        <p:nvSpPr>
-          <p:cNvPr id="24" name="TextBox 23">
-            <a:extLst>
-              <a:ext uri="{FF2B5EF4-FFF2-40B4-BE49-F238E27FC236}">
-                <a16:creationId xmlns:a16="http://schemas.microsoft.com/office/drawing/2014/main" id="{33880F75-8FE5-4272-B9C5-B43D4A5EB1FB}"/>
-              </a:ext>
-            </a:extLst>
-          </p:cNvPr>
-          <p:cNvSpPr txBox="1"/>
-          <p:nvPr/>
-        </p:nvSpPr>
-        <p:spPr>
-          <a:xfrm>
-            <a:off x="913181" y="1319322"/>
-            <a:ext cx="4890187" cy="4154984"/>
-          </a:xfrm>
-          <a:prstGeom prst="rect">
-            <a:avLst/>
-          </a:prstGeom>
-          <a:noFill/>
-        </p:spPr>
-        <p:txBody>
-          <a:bodyPr wrap="square" rtlCol="0">
-            <a:spAutoFit/>
-          </a:bodyPr>
-          <a:lstStyle/>
-          <a:p>
-            <a:pPr algn="ctr"/>
-            <a:r>
-              <a:rPr lang="en-GB" sz="2400" dirty="0"/>
-              <a:t>	a	</a:t>
-            </a:r>
-          </a:p>
-          <a:p>
-            <a:pPr algn="ctr"/>
-            <a:endParaRPr lang="en-GB" sz="2400" dirty="0"/>
-          </a:p>
-          <a:p>
-            <a:pPr algn="ctr"/>
-            <a:r>
-              <a:rPr lang="en-GB" sz="2400" dirty="0"/>
-              <a:t>b                      c</a:t>
-            </a:r>
-          </a:p>
-          <a:p>
-            <a:pPr algn="ctr"/>
-            <a:endParaRPr lang="en-GB" sz="2400" dirty="0"/>
-          </a:p>
-          <a:p>
-            <a:pPr algn="ctr"/>
-            <a:r>
-              <a:rPr lang="en-GB" sz="2400" dirty="0"/>
-              <a:t>d                    e                    f</a:t>
-            </a:r>
-          </a:p>
-          <a:p>
-            <a:pPr algn="ctr"/>
-            <a:endParaRPr lang="en-GB" sz="2400" dirty="0"/>
-          </a:p>
-          <a:p>
-            <a:pPr algn="ctr"/>
-            <a:endParaRPr lang="en-GB" sz="2400" dirty="0"/>
-          </a:p>
-          <a:p>
-            <a:pPr algn="ctr"/>
-            <a:endParaRPr lang="en-GB" sz="2400" dirty="0"/>
-          </a:p>
-          <a:p>
-            <a:pPr algn="ctr"/>
-            <a:endParaRPr lang="en-GB" sz="2400" dirty="0"/>
-          </a:p>
-          <a:p>
-            <a:pPr algn="ctr"/>
-            <a:endParaRPr lang="en-GB" sz="2400" dirty="0"/>
-          </a:p>
-          <a:p>
-            <a:pPr algn="ctr"/>
-            <a:endParaRPr lang="en-GB" sz="2400" dirty="0"/>
-          </a:p>
-        </p:txBody>
-      </p:sp>
+            </a:fontRef>
+          </p:style>
+        </p:cxnSp>
+        <p:sp>
+          <p:nvSpPr>
+            <p:cNvPr id="24" name="TextBox 23">
+              <a:extLst>
+                <a:ext uri="{FF2B5EF4-FFF2-40B4-BE49-F238E27FC236}">
+                  <a16:creationId xmlns:a16="http://schemas.microsoft.com/office/drawing/2014/main" id="{33880F75-8FE5-4272-B9C5-B43D4A5EB1FB}"/>
+                </a:ext>
+              </a:extLst>
+            </p:cNvPr>
+            <p:cNvSpPr txBox="1"/>
+            <p:nvPr/>
+          </p:nvSpPr>
+          <p:spPr>
+            <a:xfrm>
+              <a:off x="913181" y="1319322"/>
+              <a:ext cx="4890187" cy="4154984"/>
+            </a:xfrm>
+            <a:prstGeom prst="rect">
+              <a:avLst/>
+            </a:prstGeom>
+            <a:noFill/>
+          </p:spPr>
+          <p:txBody>
+            <a:bodyPr wrap="square" rtlCol="0">
+              <a:spAutoFit/>
+            </a:bodyPr>
+            <a:lstStyle/>
+            <a:p>
+              <a:pPr algn="ctr"/>
+              <a:r>
+                <a:rPr lang="en-GB" sz="2400" dirty="0"/>
+                <a:t>	a	</a:t>
+              </a:r>
+            </a:p>
+            <a:p>
+              <a:pPr algn="ctr"/>
+              <a:endParaRPr lang="en-GB" sz="2400" dirty="0"/>
+            </a:p>
+            <a:p>
+              <a:pPr algn="ctr"/>
+              <a:r>
+                <a:rPr lang="en-GB" sz="2400" dirty="0"/>
+                <a:t>b                      c</a:t>
+              </a:r>
+            </a:p>
+            <a:p>
+              <a:pPr algn="ctr"/>
+              <a:endParaRPr lang="en-GB" sz="2400" dirty="0"/>
+            </a:p>
+            <a:p>
+              <a:pPr algn="ctr"/>
+              <a:r>
+                <a:rPr lang="en-GB" sz="2400" dirty="0"/>
+                <a:t>d                    e                    f</a:t>
+              </a:r>
+            </a:p>
+            <a:p>
+              <a:pPr algn="ctr"/>
+              <a:endParaRPr lang="en-GB" sz="2400" dirty="0"/>
+            </a:p>
+            <a:p>
+              <a:pPr algn="ctr"/>
+              <a:endParaRPr lang="en-GB" sz="2400" dirty="0"/>
+            </a:p>
+            <a:p>
+              <a:pPr algn="ctr"/>
+              <a:endParaRPr lang="en-GB" sz="2400" dirty="0"/>
+            </a:p>
+            <a:p>
+              <a:pPr algn="ctr"/>
+              <a:endParaRPr lang="en-GB" sz="2400" dirty="0"/>
+            </a:p>
+            <a:p>
+              <a:pPr algn="ctr"/>
+              <a:endParaRPr lang="en-GB" sz="2400" dirty="0"/>
+            </a:p>
+            <a:p>
+              <a:pPr algn="ctr"/>
+              <a:endParaRPr lang="en-GB" sz="2400" dirty="0"/>
+            </a:p>
+          </p:txBody>
+        </p:sp>
+      </p:grpSp>
       <p:sp>
         <p:nvSpPr>
           <p:cNvPr id="39" name="TextBox 38">
@@ -11505,6 +11528,7074 @@
 </p:sld>
 </file>
 
+<file path=ppt/slides/slide4.xml><?xml version="1.0" encoding="utf-8"?>
+<p:sld xmlns:a="http://schemas.openxmlformats.org/drawingml/2006/main" xmlns:r="http://schemas.openxmlformats.org/officeDocument/2006/relationships" xmlns:p="http://schemas.openxmlformats.org/presentationml/2006/main">
+  <p:cSld>
+    <p:spTree>
+      <p:nvGrpSpPr>
+        <p:cNvPr id="1" name=""/>
+        <p:cNvGrpSpPr/>
+        <p:nvPr/>
+      </p:nvGrpSpPr>
+      <p:grpSpPr>
+        <a:xfrm>
+          <a:off x="0" y="0"/>
+          <a:ext cx="0" cy="0"/>
+          <a:chOff x="0" y="0"/>
+          <a:chExt cx="0" cy="0"/>
+        </a:xfrm>
+      </p:grpSpPr>
+      <p:grpSp>
+        <p:nvGrpSpPr>
+          <p:cNvPr id="2" name="Group 1">
+            <a:extLst>
+              <a:ext uri="{FF2B5EF4-FFF2-40B4-BE49-F238E27FC236}">
+                <a16:creationId xmlns:a16="http://schemas.microsoft.com/office/drawing/2014/main" id="{C7CAF0F0-18D3-4C42-A875-E574B8363E95}"/>
+              </a:ext>
+            </a:extLst>
+          </p:cNvPr>
+          <p:cNvGrpSpPr/>
+          <p:nvPr/>
+        </p:nvGrpSpPr>
+        <p:grpSpPr>
+          <a:xfrm>
+            <a:off x="1146816" y="1829830"/>
+            <a:ext cx="3677771" cy="1244694"/>
+            <a:chOff x="784162" y="3076074"/>
+            <a:chExt cx="5405200" cy="1922932"/>
+          </a:xfrm>
+        </p:grpSpPr>
+        <p:sp>
+          <p:nvSpPr>
+            <p:cNvPr id="64" name="Arc 63">
+              <a:extLst>
+                <a:ext uri="{FF2B5EF4-FFF2-40B4-BE49-F238E27FC236}">
+                  <a16:creationId xmlns:a16="http://schemas.microsoft.com/office/drawing/2014/main" id="{1691CF3F-FAC2-4DA5-BF63-0B4D4D72F3A6}"/>
+                </a:ext>
+              </a:extLst>
+            </p:cNvPr>
+            <p:cNvSpPr/>
+            <p:nvPr/>
+          </p:nvSpPr>
+          <p:spPr>
+            <a:xfrm rot="1003916">
+              <a:off x="816248" y="3790689"/>
+              <a:ext cx="721895" cy="705852"/>
+            </a:xfrm>
+            <a:prstGeom prst="arc">
+              <a:avLst>
+                <a:gd name="adj1" fmla="val 16200000"/>
+                <a:gd name="adj2" fmla="val 13932934"/>
+              </a:avLst>
+            </a:prstGeom>
+            <a:noFill/>
+            <a:ln w="19050">
+              <a:solidFill>
+                <a:schemeClr val="tx1"/>
+              </a:solidFill>
+              <a:headEnd type="triangle" w="lg" len="lg"/>
+              <a:tailEnd type="triangle" w="lg" len="lg"/>
+            </a:ln>
+          </p:spPr>
+          <p:style>
+            <a:lnRef idx="1">
+              <a:schemeClr val="accent1"/>
+            </a:lnRef>
+            <a:fillRef idx="0">
+              <a:schemeClr val="accent1"/>
+            </a:fillRef>
+            <a:effectRef idx="0">
+              <a:schemeClr val="accent1"/>
+            </a:effectRef>
+            <a:fontRef idx="minor">
+              <a:schemeClr val="tx1"/>
+            </a:fontRef>
+          </p:style>
+          <p:txBody>
+            <a:bodyPr rtlCol="0" anchor="ctr"/>
+            <a:lstStyle/>
+            <a:p>
+              <a:pPr algn="ctr"/>
+              <a:endParaRPr lang="en-GB" sz="3200" dirty="0"/>
+            </a:p>
+          </p:txBody>
+        </p:sp>
+        <p:sp>
+          <p:nvSpPr>
+            <p:cNvPr id="65" name="Rectangle 64">
+              <a:extLst>
+                <a:ext uri="{FF2B5EF4-FFF2-40B4-BE49-F238E27FC236}">
+                  <a16:creationId xmlns:a16="http://schemas.microsoft.com/office/drawing/2014/main" id="{2D44291F-1D23-48B0-8155-E5B9189D0B29}"/>
+                </a:ext>
+              </a:extLst>
+            </p:cNvPr>
+            <p:cNvSpPr/>
+            <p:nvPr/>
+          </p:nvSpPr>
+          <p:spPr>
+            <a:xfrm>
+              <a:off x="784162" y="3076074"/>
+              <a:ext cx="721895" cy="705852"/>
+            </a:xfrm>
+            <a:prstGeom prst="rect">
+              <a:avLst/>
+            </a:prstGeom>
+            <a:noFill/>
+            <a:ln w="19050">
+              <a:solidFill>
+                <a:schemeClr val="tx1"/>
+              </a:solidFill>
+            </a:ln>
+          </p:spPr>
+          <p:style>
+            <a:lnRef idx="2">
+              <a:schemeClr val="accent1">
+                <a:shade val="50000"/>
+              </a:schemeClr>
+            </a:lnRef>
+            <a:fillRef idx="1">
+              <a:schemeClr val="accent1"/>
+            </a:fillRef>
+            <a:effectRef idx="0">
+              <a:schemeClr val="accent1"/>
+            </a:effectRef>
+            <a:fontRef idx="minor">
+              <a:schemeClr val="lt1"/>
+            </a:fontRef>
+          </p:style>
+          <p:txBody>
+            <a:bodyPr rtlCol="0" anchor="ctr"/>
+            <a:lstStyle/>
+            <a:p>
+              <a:pPr algn="ctr"/>
+              <a:r>
+                <a:rPr lang="en-GB" dirty="0">
+                  <a:solidFill>
+                    <a:schemeClr val="tx1"/>
+                  </a:solidFill>
+                </a:rPr>
+                <a:t>Y1</a:t>
+              </a:r>
+            </a:p>
+          </p:txBody>
+        </p:sp>
+        <p:sp>
+          <p:nvSpPr>
+            <p:cNvPr id="66" name="Rectangle 65">
+              <a:extLst>
+                <a:ext uri="{FF2B5EF4-FFF2-40B4-BE49-F238E27FC236}">
+                  <a16:creationId xmlns:a16="http://schemas.microsoft.com/office/drawing/2014/main" id="{35DE9A06-4DA6-4332-9AFB-19301BCBF9A4}"/>
+                </a:ext>
+              </a:extLst>
+            </p:cNvPr>
+            <p:cNvSpPr/>
+            <p:nvPr/>
+          </p:nvSpPr>
+          <p:spPr>
+            <a:xfrm>
+              <a:off x="2307484" y="3076074"/>
+              <a:ext cx="721895" cy="705852"/>
+            </a:xfrm>
+            <a:prstGeom prst="rect">
+              <a:avLst/>
+            </a:prstGeom>
+            <a:noFill/>
+            <a:ln w="19050">
+              <a:solidFill>
+                <a:schemeClr val="tx1"/>
+              </a:solidFill>
+            </a:ln>
+          </p:spPr>
+          <p:style>
+            <a:lnRef idx="2">
+              <a:schemeClr val="accent1">
+                <a:shade val="50000"/>
+              </a:schemeClr>
+            </a:lnRef>
+            <a:fillRef idx="1">
+              <a:schemeClr val="accent1"/>
+            </a:fillRef>
+            <a:effectRef idx="0">
+              <a:schemeClr val="accent1"/>
+            </a:effectRef>
+            <a:fontRef idx="minor">
+              <a:schemeClr val="lt1"/>
+            </a:fontRef>
+          </p:style>
+          <p:txBody>
+            <a:bodyPr rtlCol="0" anchor="ctr"/>
+            <a:lstStyle/>
+            <a:p>
+              <a:pPr algn="ctr"/>
+              <a:r>
+                <a:rPr lang="en-GB" dirty="0">
+                  <a:solidFill>
+                    <a:schemeClr val="tx1"/>
+                  </a:solidFill>
+                </a:rPr>
+                <a:t>Y2</a:t>
+              </a:r>
+            </a:p>
+          </p:txBody>
+        </p:sp>
+        <p:sp>
+          <p:nvSpPr>
+            <p:cNvPr id="67" name="Arc 66">
+              <a:extLst>
+                <a:ext uri="{FF2B5EF4-FFF2-40B4-BE49-F238E27FC236}">
+                  <a16:creationId xmlns:a16="http://schemas.microsoft.com/office/drawing/2014/main" id="{E888E1F1-280C-4843-8256-4C2FE1864DB0}"/>
+                </a:ext>
+              </a:extLst>
+            </p:cNvPr>
+            <p:cNvSpPr/>
+            <p:nvPr/>
+          </p:nvSpPr>
+          <p:spPr>
+            <a:xfrm rot="1003916">
+              <a:off x="2307483" y="3799452"/>
+              <a:ext cx="721895" cy="705852"/>
+            </a:xfrm>
+            <a:prstGeom prst="arc">
+              <a:avLst>
+                <a:gd name="adj1" fmla="val 16200000"/>
+                <a:gd name="adj2" fmla="val 13932934"/>
+              </a:avLst>
+            </a:prstGeom>
+            <a:noFill/>
+            <a:ln w="19050">
+              <a:solidFill>
+                <a:schemeClr val="tx1"/>
+              </a:solidFill>
+              <a:headEnd type="triangle" w="lg" len="lg"/>
+              <a:tailEnd type="triangle" w="lg" len="lg"/>
+            </a:ln>
+          </p:spPr>
+          <p:style>
+            <a:lnRef idx="1">
+              <a:schemeClr val="accent1"/>
+            </a:lnRef>
+            <a:fillRef idx="0">
+              <a:schemeClr val="accent1"/>
+            </a:fillRef>
+            <a:effectRef idx="0">
+              <a:schemeClr val="accent1"/>
+            </a:effectRef>
+            <a:fontRef idx="minor">
+              <a:schemeClr val="tx1"/>
+            </a:fontRef>
+          </p:style>
+          <p:txBody>
+            <a:bodyPr rtlCol="0" anchor="ctr"/>
+            <a:lstStyle/>
+            <a:p>
+              <a:pPr algn="ctr"/>
+              <a:endParaRPr lang="en-GB" sz="3200"/>
+            </a:p>
+          </p:txBody>
+        </p:sp>
+        <p:sp>
+          <p:nvSpPr>
+            <p:cNvPr id="85" name="Rectangle 84">
+              <a:extLst>
+                <a:ext uri="{FF2B5EF4-FFF2-40B4-BE49-F238E27FC236}">
+                  <a16:creationId xmlns:a16="http://schemas.microsoft.com/office/drawing/2014/main" id="{3D905296-943E-4230-BCA4-59A75EF5C5A7}"/>
+                </a:ext>
+              </a:extLst>
+            </p:cNvPr>
+            <p:cNvSpPr/>
+            <p:nvPr/>
+          </p:nvSpPr>
+          <p:spPr>
+            <a:xfrm>
+              <a:off x="3852690" y="3076074"/>
+              <a:ext cx="721895" cy="705852"/>
+            </a:xfrm>
+            <a:prstGeom prst="rect">
+              <a:avLst/>
+            </a:prstGeom>
+            <a:noFill/>
+            <a:ln w="19050">
+              <a:solidFill>
+                <a:schemeClr val="tx1"/>
+              </a:solidFill>
+            </a:ln>
+          </p:spPr>
+          <p:style>
+            <a:lnRef idx="2">
+              <a:schemeClr val="accent1">
+                <a:shade val="50000"/>
+              </a:schemeClr>
+            </a:lnRef>
+            <a:fillRef idx="1">
+              <a:schemeClr val="accent1"/>
+            </a:fillRef>
+            <a:effectRef idx="0">
+              <a:schemeClr val="accent1"/>
+            </a:effectRef>
+            <a:fontRef idx="minor">
+              <a:schemeClr val="lt1"/>
+            </a:fontRef>
+          </p:style>
+          <p:txBody>
+            <a:bodyPr rtlCol="0" anchor="ctr"/>
+            <a:lstStyle/>
+            <a:p>
+              <a:pPr algn="ctr"/>
+              <a:r>
+                <a:rPr lang="en-GB" dirty="0">
+                  <a:solidFill>
+                    <a:schemeClr val="tx1"/>
+                  </a:solidFill>
+                </a:rPr>
+                <a:t>Y3</a:t>
+              </a:r>
+            </a:p>
+          </p:txBody>
+        </p:sp>
+        <p:sp>
+          <p:nvSpPr>
+            <p:cNvPr id="86" name="Arc 85">
+              <a:extLst>
+                <a:ext uri="{FF2B5EF4-FFF2-40B4-BE49-F238E27FC236}">
+                  <a16:creationId xmlns:a16="http://schemas.microsoft.com/office/drawing/2014/main" id="{1AD23F76-7332-4DDB-AAD5-276343377AB2}"/>
+                </a:ext>
+              </a:extLst>
+            </p:cNvPr>
+            <p:cNvSpPr/>
+            <p:nvPr/>
+          </p:nvSpPr>
+          <p:spPr>
+            <a:xfrm rot="1003916">
+              <a:off x="3852689" y="3799452"/>
+              <a:ext cx="721895" cy="705852"/>
+            </a:xfrm>
+            <a:prstGeom prst="arc">
+              <a:avLst>
+                <a:gd name="adj1" fmla="val 16200000"/>
+                <a:gd name="adj2" fmla="val 13932934"/>
+              </a:avLst>
+            </a:prstGeom>
+            <a:noFill/>
+            <a:ln w="19050">
+              <a:solidFill>
+                <a:schemeClr val="tx1"/>
+              </a:solidFill>
+              <a:headEnd type="triangle" w="lg" len="lg"/>
+              <a:tailEnd type="triangle" w="lg" len="lg"/>
+            </a:ln>
+          </p:spPr>
+          <p:style>
+            <a:lnRef idx="1">
+              <a:schemeClr val="accent1"/>
+            </a:lnRef>
+            <a:fillRef idx="0">
+              <a:schemeClr val="accent1"/>
+            </a:fillRef>
+            <a:effectRef idx="0">
+              <a:schemeClr val="accent1"/>
+            </a:effectRef>
+            <a:fontRef idx="minor">
+              <a:schemeClr val="tx1"/>
+            </a:fontRef>
+          </p:style>
+          <p:txBody>
+            <a:bodyPr rtlCol="0" anchor="ctr"/>
+            <a:lstStyle/>
+            <a:p>
+              <a:pPr algn="ctr"/>
+              <a:endParaRPr lang="en-GB" sz="3200"/>
+            </a:p>
+          </p:txBody>
+        </p:sp>
+        <p:sp>
+          <p:nvSpPr>
+            <p:cNvPr id="87" name="TextBox 86">
+              <a:extLst>
+                <a:ext uri="{FF2B5EF4-FFF2-40B4-BE49-F238E27FC236}">
+                  <a16:creationId xmlns:a16="http://schemas.microsoft.com/office/drawing/2014/main" id="{0BFF351A-8B7F-4580-A65E-AA75035EC0E2}"/>
+                </a:ext>
+              </a:extLst>
+            </p:cNvPr>
+            <p:cNvSpPr txBox="1"/>
+            <p:nvPr/>
+          </p:nvSpPr>
+          <p:spPr>
+            <a:xfrm>
+              <a:off x="913181" y="4428424"/>
+              <a:ext cx="721895" cy="570582"/>
+            </a:xfrm>
+            <a:prstGeom prst="rect">
+              <a:avLst/>
+            </a:prstGeom>
+            <a:noFill/>
+            <a:ln w="19050">
+              <a:noFill/>
+            </a:ln>
+          </p:spPr>
+          <p:txBody>
+            <a:bodyPr wrap="square" rtlCol="0">
+              <a:spAutoFit/>
+            </a:bodyPr>
+            <a:lstStyle/>
+            <a:p>
+              <a:r>
+                <a:rPr lang="en-GB" dirty="0"/>
+                <a:t>u</a:t>
+              </a:r>
+              <a:r>
+                <a:rPr lang="en-GB" baseline="-25000" dirty="0"/>
+                <a:t>y1</a:t>
+              </a:r>
+              <a:endParaRPr lang="en-GB" dirty="0"/>
+            </a:p>
+          </p:txBody>
+        </p:sp>
+        <p:sp>
+          <p:nvSpPr>
+            <p:cNvPr id="88" name="TextBox 87">
+              <a:extLst>
+                <a:ext uri="{FF2B5EF4-FFF2-40B4-BE49-F238E27FC236}">
+                  <a16:creationId xmlns:a16="http://schemas.microsoft.com/office/drawing/2014/main" id="{78A01F7A-74A1-4988-9A0A-D82DCFCAFD2D}"/>
+                </a:ext>
+              </a:extLst>
+            </p:cNvPr>
+            <p:cNvSpPr txBox="1"/>
+            <p:nvPr/>
+          </p:nvSpPr>
+          <p:spPr>
+            <a:xfrm>
+              <a:off x="2506215" y="4420849"/>
+              <a:ext cx="721895" cy="570582"/>
+            </a:xfrm>
+            <a:prstGeom prst="rect">
+              <a:avLst/>
+            </a:prstGeom>
+            <a:noFill/>
+            <a:ln w="19050">
+              <a:noFill/>
+            </a:ln>
+          </p:spPr>
+          <p:txBody>
+            <a:bodyPr wrap="square" rtlCol="0">
+              <a:spAutoFit/>
+            </a:bodyPr>
+            <a:lstStyle/>
+            <a:p>
+              <a:r>
+                <a:rPr lang="en-GB" dirty="0"/>
+                <a:t>u</a:t>
+              </a:r>
+              <a:r>
+                <a:rPr lang="en-GB" baseline="-25000" dirty="0"/>
+                <a:t>y2</a:t>
+              </a:r>
+              <a:endParaRPr lang="en-GB" dirty="0"/>
+            </a:p>
+          </p:txBody>
+        </p:sp>
+        <p:sp>
+          <p:nvSpPr>
+            <p:cNvPr id="89" name="TextBox 88">
+              <a:extLst>
+                <a:ext uri="{FF2B5EF4-FFF2-40B4-BE49-F238E27FC236}">
+                  <a16:creationId xmlns:a16="http://schemas.microsoft.com/office/drawing/2014/main" id="{C8AFB2D8-6FA4-42CD-9F2B-FAEA8C4D714D}"/>
+                </a:ext>
+              </a:extLst>
+            </p:cNvPr>
+            <p:cNvSpPr txBox="1"/>
+            <p:nvPr/>
+          </p:nvSpPr>
+          <p:spPr>
+            <a:xfrm>
+              <a:off x="3986841" y="4416330"/>
+              <a:ext cx="721895" cy="570582"/>
+            </a:xfrm>
+            <a:prstGeom prst="rect">
+              <a:avLst/>
+            </a:prstGeom>
+            <a:noFill/>
+            <a:ln w="19050">
+              <a:noFill/>
+            </a:ln>
+          </p:spPr>
+          <p:txBody>
+            <a:bodyPr wrap="square" rtlCol="0">
+              <a:spAutoFit/>
+            </a:bodyPr>
+            <a:lstStyle/>
+            <a:p>
+              <a:r>
+                <a:rPr lang="en-GB" dirty="0"/>
+                <a:t>u</a:t>
+              </a:r>
+              <a:r>
+                <a:rPr lang="en-GB" baseline="-25000" dirty="0"/>
+                <a:t>y3</a:t>
+              </a:r>
+              <a:endParaRPr lang="en-GB" dirty="0"/>
+            </a:p>
+          </p:txBody>
+        </p:sp>
+        <p:sp>
+          <p:nvSpPr>
+            <p:cNvPr id="103" name="Rectangle 102">
+              <a:extLst>
+                <a:ext uri="{FF2B5EF4-FFF2-40B4-BE49-F238E27FC236}">
+                  <a16:creationId xmlns:a16="http://schemas.microsoft.com/office/drawing/2014/main" id="{6E96D7AE-3114-4CA7-BD7C-C81F8B1226BA}"/>
+                </a:ext>
+              </a:extLst>
+            </p:cNvPr>
+            <p:cNvSpPr/>
+            <p:nvPr/>
+          </p:nvSpPr>
+          <p:spPr>
+            <a:xfrm>
+              <a:off x="5333316" y="3076074"/>
+              <a:ext cx="721895" cy="705852"/>
+            </a:xfrm>
+            <a:prstGeom prst="rect">
+              <a:avLst/>
+            </a:prstGeom>
+            <a:noFill/>
+            <a:ln w="19050">
+              <a:solidFill>
+                <a:schemeClr val="tx1"/>
+              </a:solidFill>
+            </a:ln>
+          </p:spPr>
+          <p:style>
+            <a:lnRef idx="2">
+              <a:schemeClr val="accent1">
+                <a:shade val="50000"/>
+              </a:schemeClr>
+            </a:lnRef>
+            <a:fillRef idx="1">
+              <a:schemeClr val="accent1"/>
+            </a:fillRef>
+            <a:effectRef idx="0">
+              <a:schemeClr val="accent1"/>
+            </a:effectRef>
+            <a:fontRef idx="minor">
+              <a:schemeClr val="lt1"/>
+            </a:fontRef>
+          </p:style>
+          <p:txBody>
+            <a:bodyPr rtlCol="0" anchor="ctr"/>
+            <a:lstStyle/>
+            <a:p>
+              <a:pPr algn="ctr"/>
+              <a:r>
+                <a:rPr lang="en-GB" dirty="0">
+                  <a:solidFill>
+                    <a:schemeClr val="tx1"/>
+                  </a:solidFill>
+                </a:rPr>
+                <a:t>Y4</a:t>
+              </a:r>
+            </a:p>
+          </p:txBody>
+        </p:sp>
+        <p:sp>
+          <p:nvSpPr>
+            <p:cNvPr id="104" name="Arc 103">
+              <a:extLst>
+                <a:ext uri="{FF2B5EF4-FFF2-40B4-BE49-F238E27FC236}">
+                  <a16:creationId xmlns:a16="http://schemas.microsoft.com/office/drawing/2014/main" id="{C88199AF-3BD6-4F0B-9084-409882704445}"/>
+                </a:ext>
+              </a:extLst>
+            </p:cNvPr>
+            <p:cNvSpPr/>
+            <p:nvPr/>
+          </p:nvSpPr>
+          <p:spPr>
+            <a:xfrm rot="1003916">
+              <a:off x="5333315" y="3799452"/>
+              <a:ext cx="721895" cy="705852"/>
+            </a:xfrm>
+            <a:prstGeom prst="arc">
+              <a:avLst>
+                <a:gd name="adj1" fmla="val 16200000"/>
+                <a:gd name="adj2" fmla="val 13932934"/>
+              </a:avLst>
+            </a:prstGeom>
+            <a:noFill/>
+            <a:ln w="19050">
+              <a:solidFill>
+                <a:schemeClr val="tx1"/>
+              </a:solidFill>
+              <a:headEnd type="triangle" w="lg" len="lg"/>
+              <a:tailEnd type="triangle" w="lg" len="lg"/>
+            </a:ln>
+          </p:spPr>
+          <p:style>
+            <a:lnRef idx="1">
+              <a:schemeClr val="accent1"/>
+            </a:lnRef>
+            <a:fillRef idx="0">
+              <a:schemeClr val="accent1"/>
+            </a:fillRef>
+            <a:effectRef idx="0">
+              <a:schemeClr val="accent1"/>
+            </a:effectRef>
+            <a:fontRef idx="minor">
+              <a:schemeClr val="tx1"/>
+            </a:fontRef>
+          </p:style>
+          <p:txBody>
+            <a:bodyPr rtlCol="0" anchor="ctr"/>
+            <a:lstStyle/>
+            <a:p>
+              <a:pPr algn="ctr"/>
+              <a:endParaRPr lang="en-GB" sz="3200"/>
+            </a:p>
+          </p:txBody>
+        </p:sp>
+        <p:sp>
+          <p:nvSpPr>
+            <p:cNvPr id="105" name="TextBox 104">
+              <a:extLst>
+                <a:ext uri="{FF2B5EF4-FFF2-40B4-BE49-F238E27FC236}">
+                  <a16:creationId xmlns:a16="http://schemas.microsoft.com/office/drawing/2014/main" id="{9FF7F5B6-FCBA-4E96-BE94-0796EC7C72DC}"/>
+                </a:ext>
+              </a:extLst>
+            </p:cNvPr>
+            <p:cNvSpPr txBox="1"/>
+            <p:nvPr/>
+          </p:nvSpPr>
+          <p:spPr>
+            <a:xfrm>
+              <a:off x="5467467" y="4416330"/>
+              <a:ext cx="721895" cy="570582"/>
+            </a:xfrm>
+            <a:prstGeom prst="rect">
+              <a:avLst/>
+            </a:prstGeom>
+            <a:noFill/>
+            <a:ln w="19050">
+              <a:noFill/>
+            </a:ln>
+          </p:spPr>
+          <p:txBody>
+            <a:bodyPr wrap="square" rtlCol="0">
+              <a:spAutoFit/>
+            </a:bodyPr>
+            <a:lstStyle/>
+            <a:p>
+              <a:r>
+                <a:rPr lang="en-GB" dirty="0"/>
+                <a:t>u</a:t>
+              </a:r>
+              <a:r>
+                <a:rPr lang="en-GB" baseline="-25000" dirty="0"/>
+                <a:t>y4</a:t>
+              </a:r>
+              <a:endParaRPr lang="en-GB" dirty="0"/>
+            </a:p>
+          </p:txBody>
+        </p:sp>
+      </p:grpSp>
+      <p:grpSp>
+        <p:nvGrpSpPr>
+          <p:cNvPr id="6" name="Group 5">
+            <a:extLst>
+              <a:ext uri="{FF2B5EF4-FFF2-40B4-BE49-F238E27FC236}">
+                <a16:creationId xmlns:a16="http://schemas.microsoft.com/office/drawing/2014/main" id="{98AFC3E2-4272-438C-88AC-AE4911F1AA01}"/>
+              </a:ext>
+            </a:extLst>
+          </p:cNvPr>
+          <p:cNvGrpSpPr/>
+          <p:nvPr/>
+        </p:nvGrpSpPr>
+        <p:grpSpPr>
+          <a:xfrm>
+            <a:off x="7076719" y="843677"/>
+            <a:ext cx="3605873" cy="2585323"/>
+            <a:chOff x="6249331" y="1025651"/>
+            <a:chExt cx="3605873" cy="2585323"/>
+          </a:xfrm>
+        </p:grpSpPr>
+        <p:sp>
+          <p:nvSpPr>
+            <p:cNvPr id="19" name="Arc 18">
+              <a:extLst>
+                <a:ext uri="{FF2B5EF4-FFF2-40B4-BE49-F238E27FC236}">
+                  <a16:creationId xmlns:a16="http://schemas.microsoft.com/office/drawing/2014/main" id="{C2CEB229-96BE-48F6-8A25-2BE773483CC4}"/>
+                </a:ext>
+              </a:extLst>
+            </p:cNvPr>
+            <p:cNvSpPr/>
+            <p:nvPr/>
+          </p:nvSpPr>
+          <p:spPr>
+            <a:xfrm rot="1003916">
+              <a:off x="6270736" y="2471566"/>
+              <a:ext cx="481585" cy="458196"/>
+            </a:xfrm>
+            <a:prstGeom prst="arc">
+              <a:avLst>
+                <a:gd name="adj1" fmla="val 16200000"/>
+                <a:gd name="adj2" fmla="val 13932934"/>
+              </a:avLst>
+            </a:prstGeom>
+            <a:noFill/>
+            <a:ln w="19050">
+              <a:solidFill>
+                <a:schemeClr val="tx1"/>
+              </a:solidFill>
+              <a:headEnd type="triangle" w="lg" len="lg"/>
+              <a:tailEnd type="triangle" w="lg" len="lg"/>
+            </a:ln>
+          </p:spPr>
+          <p:style>
+            <a:lnRef idx="1">
+              <a:schemeClr val="accent1"/>
+            </a:lnRef>
+            <a:fillRef idx="0">
+              <a:schemeClr val="accent1"/>
+            </a:fillRef>
+            <a:effectRef idx="0">
+              <a:schemeClr val="accent1"/>
+            </a:effectRef>
+            <a:fontRef idx="minor">
+              <a:schemeClr val="tx1"/>
+            </a:fontRef>
+          </p:style>
+          <p:txBody>
+            <a:bodyPr rtlCol="0" anchor="ctr"/>
+            <a:lstStyle/>
+            <a:p>
+              <a:pPr algn="ctr"/>
+              <a:endParaRPr lang="en-GB" sz="3200" dirty="0"/>
+            </a:p>
+          </p:txBody>
+        </p:sp>
+        <p:sp>
+          <p:nvSpPr>
+            <p:cNvPr id="20" name="Rectangle 19">
+              <a:extLst>
+                <a:ext uri="{FF2B5EF4-FFF2-40B4-BE49-F238E27FC236}">
+                  <a16:creationId xmlns:a16="http://schemas.microsoft.com/office/drawing/2014/main" id="{04F31CD2-5652-4D5A-A7CC-48785CF9A4D3}"/>
+                </a:ext>
+              </a:extLst>
+            </p:cNvPr>
+            <p:cNvSpPr/>
+            <p:nvPr/>
+          </p:nvSpPr>
+          <p:spPr>
+            <a:xfrm>
+              <a:off x="6249331" y="2007682"/>
+              <a:ext cx="481585" cy="458196"/>
+            </a:xfrm>
+            <a:prstGeom prst="rect">
+              <a:avLst/>
+            </a:prstGeom>
+            <a:noFill/>
+            <a:ln>
+              <a:solidFill>
+                <a:schemeClr val="tx1"/>
+              </a:solidFill>
+            </a:ln>
+          </p:spPr>
+          <p:style>
+            <a:lnRef idx="2">
+              <a:schemeClr val="accent1">
+                <a:shade val="50000"/>
+              </a:schemeClr>
+            </a:lnRef>
+            <a:fillRef idx="1">
+              <a:schemeClr val="accent1"/>
+            </a:fillRef>
+            <a:effectRef idx="0">
+              <a:schemeClr val="accent1"/>
+            </a:effectRef>
+            <a:fontRef idx="minor">
+              <a:schemeClr val="lt1"/>
+            </a:fontRef>
+          </p:style>
+          <p:txBody>
+            <a:bodyPr rtlCol="0" anchor="ctr"/>
+            <a:lstStyle/>
+            <a:p>
+              <a:pPr algn="ctr"/>
+              <a:r>
+                <a:rPr lang="en-GB" dirty="0">
+                  <a:solidFill>
+                    <a:schemeClr val="tx1"/>
+                  </a:solidFill>
+                </a:rPr>
+                <a:t>Y1</a:t>
+              </a:r>
+            </a:p>
+          </p:txBody>
+        </p:sp>
+        <p:sp>
+          <p:nvSpPr>
+            <p:cNvPr id="21" name="Rectangle 20">
+              <a:extLst>
+                <a:ext uri="{FF2B5EF4-FFF2-40B4-BE49-F238E27FC236}">
+                  <a16:creationId xmlns:a16="http://schemas.microsoft.com/office/drawing/2014/main" id="{4D856481-229F-4814-8C62-A72A01D05675}"/>
+                </a:ext>
+              </a:extLst>
+            </p:cNvPr>
+            <p:cNvSpPr/>
+            <p:nvPr/>
+          </p:nvSpPr>
+          <p:spPr>
+            <a:xfrm>
+              <a:off x="7265557" y="2007682"/>
+              <a:ext cx="481585" cy="458196"/>
+            </a:xfrm>
+            <a:prstGeom prst="rect">
+              <a:avLst/>
+            </a:prstGeom>
+            <a:noFill/>
+            <a:ln>
+              <a:solidFill>
+                <a:schemeClr val="tx1"/>
+              </a:solidFill>
+            </a:ln>
+          </p:spPr>
+          <p:style>
+            <a:lnRef idx="2">
+              <a:schemeClr val="accent1">
+                <a:shade val="50000"/>
+              </a:schemeClr>
+            </a:lnRef>
+            <a:fillRef idx="1">
+              <a:schemeClr val="accent1"/>
+            </a:fillRef>
+            <a:effectRef idx="0">
+              <a:schemeClr val="accent1"/>
+            </a:effectRef>
+            <a:fontRef idx="minor">
+              <a:schemeClr val="lt1"/>
+            </a:fontRef>
+          </p:style>
+          <p:txBody>
+            <a:bodyPr rtlCol="0" anchor="ctr"/>
+            <a:lstStyle/>
+            <a:p>
+              <a:pPr algn="ctr"/>
+              <a:r>
+                <a:rPr lang="en-GB" dirty="0">
+                  <a:solidFill>
+                    <a:schemeClr val="tx1"/>
+                  </a:solidFill>
+                </a:rPr>
+                <a:t>Y2</a:t>
+              </a:r>
+            </a:p>
+          </p:txBody>
+        </p:sp>
+        <p:sp>
+          <p:nvSpPr>
+            <p:cNvPr id="22" name="Arc 21">
+              <a:extLst>
+                <a:ext uri="{FF2B5EF4-FFF2-40B4-BE49-F238E27FC236}">
+                  <a16:creationId xmlns:a16="http://schemas.microsoft.com/office/drawing/2014/main" id="{60D96F5D-EB23-4795-8226-A5BBC31C6B0E}"/>
+                </a:ext>
+              </a:extLst>
+            </p:cNvPr>
+            <p:cNvSpPr/>
+            <p:nvPr/>
+          </p:nvSpPr>
+          <p:spPr>
+            <a:xfrm rot="1003916">
+              <a:off x="7265556" y="2477255"/>
+              <a:ext cx="481585" cy="458196"/>
+            </a:xfrm>
+            <a:prstGeom prst="arc">
+              <a:avLst>
+                <a:gd name="adj1" fmla="val 16200000"/>
+                <a:gd name="adj2" fmla="val 13932934"/>
+              </a:avLst>
+            </a:prstGeom>
+            <a:noFill/>
+            <a:ln w="19050">
+              <a:solidFill>
+                <a:schemeClr val="tx1"/>
+              </a:solidFill>
+              <a:headEnd type="triangle" w="lg" len="lg"/>
+              <a:tailEnd type="triangle" w="lg" len="lg"/>
+            </a:ln>
+          </p:spPr>
+          <p:style>
+            <a:lnRef idx="1">
+              <a:schemeClr val="accent1"/>
+            </a:lnRef>
+            <a:fillRef idx="0">
+              <a:schemeClr val="accent1"/>
+            </a:fillRef>
+            <a:effectRef idx="0">
+              <a:schemeClr val="accent1"/>
+            </a:effectRef>
+            <a:fontRef idx="minor">
+              <a:schemeClr val="tx1"/>
+            </a:fontRef>
+          </p:style>
+          <p:txBody>
+            <a:bodyPr rtlCol="0" anchor="ctr"/>
+            <a:lstStyle/>
+            <a:p>
+              <a:pPr algn="ctr"/>
+              <a:endParaRPr lang="en-GB" sz="3200"/>
+            </a:p>
+          </p:txBody>
+        </p:sp>
+        <p:sp>
+          <p:nvSpPr>
+            <p:cNvPr id="23" name="Rectangle 22">
+              <a:extLst>
+                <a:ext uri="{FF2B5EF4-FFF2-40B4-BE49-F238E27FC236}">
+                  <a16:creationId xmlns:a16="http://schemas.microsoft.com/office/drawing/2014/main" id="{B0E1E8F3-B1C1-4D23-B18E-FA1666692A4E}"/>
+                </a:ext>
+              </a:extLst>
+            </p:cNvPr>
+            <p:cNvSpPr/>
+            <p:nvPr/>
+          </p:nvSpPr>
+          <p:spPr>
+            <a:xfrm>
+              <a:off x="8296382" y="2007682"/>
+              <a:ext cx="481585" cy="458196"/>
+            </a:xfrm>
+            <a:prstGeom prst="rect">
+              <a:avLst/>
+            </a:prstGeom>
+            <a:noFill/>
+            <a:ln>
+              <a:solidFill>
+                <a:schemeClr val="tx1"/>
+              </a:solidFill>
+            </a:ln>
+          </p:spPr>
+          <p:style>
+            <a:lnRef idx="2">
+              <a:schemeClr val="accent1">
+                <a:shade val="50000"/>
+              </a:schemeClr>
+            </a:lnRef>
+            <a:fillRef idx="1">
+              <a:schemeClr val="accent1"/>
+            </a:fillRef>
+            <a:effectRef idx="0">
+              <a:schemeClr val="accent1"/>
+            </a:effectRef>
+            <a:fontRef idx="minor">
+              <a:schemeClr val="lt1"/>
+            </a:fontRef>
+          </p:style>
+          <p:txBody>
+            <a:bodyPr rtlCol="0" anchor="ctr"/>
+            <a:lstStyle/>
+            <a:p>
+              <a:pPr algn="ctr"/>
+              <a:r>
+                <a:rPr lang="en-GB" dirty="0">
+                  <a:solidFill>
+                    <a:schemeClr val="tx1"/>
+                  </a:solidFill>
+                </a:rPr>
+                <a:t>Y3</a:t>
+              </a:r>
+            </a:p>
+          </p:txBody>
+        </p:sp>
+        <p:sp>
+          <p:nvSpPr>
+            <p:cNvPr id="24" name="Arc 23">
+              <a:extLst>
+                <a:ext uri="{FF2B5EF4-FFF2-40B4-BE49-F238E27FC236}">
+                  <a16:creationId xmlns:a16="http://schemas.microsoft.com/office/drawing/2014/main" id="{9DC78571-EF23-4887-A497-CB5D35DBC459}"/>
+                </a:ext>
+              </a:extLst>
+            </p:cNvPr>
+            <p:cNvSpPr/>
+            <p:nvPr/>
+          </p:nvSpPr>
+          <p:spPr>
+            <a:xfrm rot="1003916">
+              <a:off x="8296382" y="2477255"/>
+              <a:ext cx="481585" cy="458196"/>
+            </a:xfrm>
+            <a:prstGeom prst="arc">
+              <a:avLst>
+                <a:gd name="adj1" fmla="val 16200000"/>
+                <a:gd name="adj2" fmla="val 13932934"/>
+              </a:avLst>
+            </a:prstGeom>
+            <a:noFill/>
+            <a:ln w="19050">
+              <a:solidFill>
+                <a:schemeClr val="tx1"/>
+              </a:solidFill>
+              <a:headEnd type="triangle" w="lg" len="lg"/>
+              <a:tailEnd type="triangle" w="lg" len="lg"/>
+            </a:ln>
+          </p:spPr>
+          <p:style>
+            <a:lnRef idx="1">
+              <a:schemeClr val="accent1"/>
+            </a:lnRef>
+            <a:fillRef idx="0">
+              <a:schemeClr val="accent1"/>
+            </a:fillRef>
+            <a:effectRef idx="0">
+              <a:schemeClr val="accent1"/>
+            </a:effectRef>
+            <a:fontRef idx="minor">
+              <a:schemeClr val="tx1"/>
+            </a:fontRef>
+          </p:style>
+          <p:txBody>
+            <a:bodyPr rtlCol="0" anchor="ctr"/>
+            <a:lstStyle/>
+            <a:p>
+              <a:pPr algn="ctr"/>
+              <a:endParaRPr lang="en-GB" sz="3200"/>
+            </a:p>
+          </p:txBody>
+        </p:sp>
+        <p:sp>
+          <p:nvSpPr>
+            <p:cNvPr id="25" name="TextBox 24">
+              <a:extLst>
+                <a:ext uri="{FF2B5EF4-FFF2-40B4-BE49-F238E27FC236}">
+                  <a16:creationId xmlns:a16="http://schemas.microsoft.com/office/drawing/2014/main" id="{7AE91794-1377-43E5-9E9A-9FC5676FB702}"/>
+                </a:ext>
+              </a:extLst>
+            </p:cNvPr>
+            <p:cNvSpPr txBox="1"/>
+            <p:nvPr/>
+          </p:nvSpPr>
+          <p:spPr>
+            <a:xfrm>
+              <a:off x="6335401" y="2885545"/>
+              <a:ext cx="481585" cy="369332"/>
+            </a:xfrm>
+            <a:prstGeom prst="rect">
+              <a:avLst/>
+            </a:prstGeom>
+            <a:noFill/>
+          </p:spPr>
+          <p:txBody>
+            <a:bodyPr wrap="square" rtlCol="0">
+              <a:spAutoFit/>
+            </a:bodyPr>
+            <a:lstStyle/>
+            <a:p>
+              <a:r>
+                <a:rPr lang="en-GB" dirty="0"/>
+                <a:t>u</a:t>
+              </a:r>
+              <a:r>
+                <a:rPr lang="en-GB" baseline="-25000" dirty="0"/>
+                <a:t>y1</a:t>
+              </a:r>
+              <a:endParaRPr lang="en-GB" dirty="0"/>
+            </a:p>
+          </p:txBody>
+        </p:sp>
+        <p:sp>
+          <p:nvSpPr>
+            <p:cNvPr id="26" name="TextBox 25">
+              <a:extLst>
+                <a:ext uri="{FF2B5EF4-FFF2-40B4-BE49-F238E27FC236}">
+                  <a16:creationId xmlns:a16="http://schemas.microsoft.com/office/drawing/2014/main" id="{E94EC67A-2BCD-48A2-8713-333D407DEFDC}"/>
+                </a:ext>
+              </a:extLst>
+            </p:cNvPr>
+            <p:cNvSpPr txBox="1"/>
+            <p:nvPr/>
+          </p:nvSpPr>
+          <p:spPr>
+            <a:xfrm>
+              <a:off x="7398133" y="2880628"/>
+              <a:ext cx="481585" cy="369332"/>
+            </a:xfrm>
+            <a:prstGeom prst="rect">
+              <a:avLst/>
+            </a:prstGeom>
+            <a:noFill/>
+          </p:spPr>
+          <p:txBody>
+            <a:bodyPr wrap="square" rtlCol="0">
+              <a:spAutoFit/>
+            </a:bodyPr>
+            <a:lstStyle/>
+            <a:p>
+              <a:r>
+                <a:rPr lang="en-GB" dirty="0"/>
+                <a:t>u</a:t>
+              </a:r>
+              <a:r>
+                <a:rPr lang="en-GB" baseline="-25000" dirty="0"/>
+                <a:t>y2</a:t>
+              </a:r>
+              <a:endParaRPr lang="en-GB" dirty="0"/>
+            </a:p>
+          </p:txBody>
+        </p:sp>
+        <p:sp>
+          <p:nvSpPr>
+            <p:cNvPr id="27" name="TextBox 26">
+              <a:extLst>
+                <a:ext uri="{FF2B5EF4-FFF2-40B4-BE49-F238E27FC236}">
+                  <a16:creationId xmlns:a16="http://schemas.microsoft.com/office/drawing/2014/main" id="{64CAAE43-F520-4810-B312-89744B1219A7}"/>
+                </a:ext>
+              </a:extLst>
+            </p:cNvPr>
+            <p:cNvSpPr txBox="1"/>
+            <p:nvPr/>
+          </p:nvSpPr>
+          <p:spPr>
+            <a:xfrm>
+              <a:off x="8385876" y="2877695"/>
+              <a:ext cx="481585" cy="369332"/>
+            </a:xfrm>
+            <a:prstGeom prst="rect">
+              <a:avLst/>
+            </a:prstGeom>
+            <a:noFill/>
+          </p:spPr>
+          <p:txBody>
+            <a:bodyPr wrap="square" rtlCol="0">
+              <a:spAutoFit/>
+            </a:bodyPr>
+            <a:lstStyle/>
+            <a:p>
+              <a:r>
+                <a:rPr lang="en-GB" dirty="0"/>
+                <a:t>u</a:t>
+              </a:r>
+              <a:r>
+                <a:rPr lang="en-GB" baseline="-25000" dirty="0"/>
+                <a:t>y3</a:t>
+              </a:r>
+              <a:endParaRPr lang="en-GB" dirty="0"/>
+            </a:p>
+          </p:txBody>
+        </p:sp>
+        <p:sp>
+          <p:nvSpPr>
+            <p:cNvPr id="28" name="Rectangle 27">
+              <a:extLst>
+                <a:ext uri="{FF2B5EF4-FFF2-40B4-BE49-F238E27FC236}">
+                  <a16:creationId xmlns:a16="http://schemas.microsoft.com/office/drawing/2014/main" id="{1E3ADDAC-9E0F-4B8E-BF2A-02F75DC53271}"/>
+                </a:ext>
+              </a:extLst>
+            </p:cNvPr>
+            <p:cNvSpPr/>
+            <p:nvPr/>
+          </p:nvSpPr>
+          <p:spPr>
+            <a:xfrm>
+              <a:off x="9284126" y="2007682"/>
+              <a:ext cx="481585" cy="458196"/>
+            </a:xfrm>
+            <a:prstGeom prst="rect">
+              <a:avLst/>
+            </a:prstGeom>
+            <a:noFill/>
+            <a:ln>
+              <a:solidFill>
+                <a:schemeClr val="tx1"/>
+              </a:solidFill>
+            </a:ln>
+          </p:spPr>
+          <p:style>
+            <a:lnRef idx="2">
+              <a:schemeClr val="accent1">
+                <a:shade val="50000"/>
+              </a:schemeClr>
+            </a:lnRef>
+            <a:fillRef idx="1">
+              <a:schemeClr val="accent1"/>
+            </a:fillRef>
+            <a:effectRef idx="0">
+              <a:schemeClr val="accent1"/>
+            </a:effectRef>
+            <a:fontRef idx="minor">
+              <a:schemeClr val="lt1"/>
+            </a:fontRef>
+          </p:style>
+          <p:txBody>
+            <a:bodyPr rtlCol="0" anchor="ctr"/>
+            <a:lstStyle/>
+            <a:p>
+              <a:pPr algn="ctr"/>
+              <a:r>
+                <a:rPr lang="en-GB" dirty="0">
+                  <a:solidFill>
+                    <a:schemeClr val="tx1"/>
+                  </a:solidFill>
+                </a:rPr>
+                <a:t>Y4</a:t>
+              </a:r>
+            </a:p>
+          </p:txBody>
+        </p:sp>
+        <p:sp>
+          <p:nvSpPr>
+            <p:cNvPr id="29" name="Arc 28">
+              <a:extLst>
+                <a:ext uri="{FF2B5EF4-FFF2-40B4-BE49-F238E27FC236}">
+                  <a16:creationId xmlns:a16="http://schemas.microsoft.com/office/drawing/2014/main" id="{0BD5C0E5-A669-4029-A74C-5E037E4CAAC3}"/>
+                </a:ext>
+              </a:extLst>
+            </p:cNvPr>
+            <p:cNvSpPr/>
+            <p:nvPr/>
+          </p:nvSpPr>
+          <p:spPr>
+            <a:xfrm rot="1003916">
+              <a:off x="9284125" y="2477255"/>
+              <a:ext cx="481585" cy="458196"/>
+            </a:xfrm>
+            <a:prstGeom prst="arc">
+              <a:avLst>
+                <a:gd name="adj1" fmla="val 16200000"/>
+                <a:gd name="adj2" fmla="val 13932934"/>
+              </a:avLst>
+            </a:prstGeom>
+            <a:noFill/>
+            <a:ln w="19050">
+              <a:solidFill>
+                <a:schemeClr val="tx1"/>
+              </a:solidFill>
+              <a:headEnd type="triangle" w="lg" len="lg"/>
+              <a:tailEnd type="triangle" w="lg" len="lg"/>
+            </a:ln>
+          </p:spPr>
+          <p:style>
+            <a:lnRef idx="1">
+              <a:schemeClr val="accent1"/>
+            </a:lnRef>
+            <a:fillRef idx="0">
+              <a:schemeClr val="accent1"/>
+            </a:fillRef>
+            <a:effectRef idx="0">
+              <a:schemeClr val="accent1"/>
+            </a:effectRef>
+            <a:fontRef idx="minor">
+              <a:schemeClr val="tx1"/>
+            </a:fontRef>
+          </p:style>
+          <p:txBody>
+            <a:bodyPr rtlCol="0" anchor="ctr"/>
+            <a:lstStyle/>
+            <a:p>
+              <a:pPr algn="ctr"/>
+              <a:endParaRPr lang="en-GB" sz="3200"/>
+            </a:p>
+          </p:txBody>
+        </p:sp>
+        <p:sp>
+          <p:nvSpPr>
+            <p:cNvPr id="30" name="TextBox 29">
+              <a:extLst>
+                <a:ext uri="{FF2B5EF4-FFF2-40B4-BE49-F238E27FC236}">
+                  <a16:creationId xmlns:a16="http://schemas.microsoft.com/office/drawing/2014/main" id="{346AFEDF-6D24-406C-B06A-52C170778FD7}"/>
+                </a:ext>
+              </a:extLst>
+            </p:cNvPr>
+            <p:cNvSpPr txBox="1"/>
+            <p:nvPr/>
+          </p:nvSpPr>
+          <p:spPr>
+            <a:xfrm>
+              <a:off x="9373619" y="2877695"/>
+              <a:ext cx="481585" cy="369332"/>
+            </a:xfrm>
+            <a:prstGeom prst="rect">
+              <a:avLst/>
+            </a:prstGeom>
+            <a:noFill/>
+          </p:spPr>
+          <p:txBody>
+            <a:bodyPr wrap="square" rtlCol="0">
+              <a:spAutoFit/>
+            </a:bodyPr>
+            <a:lstStyle/>
+            <a:p>
+              <a:r>
+                <a:rPr lang="en-GB" dirty="0"/>
+                <a:t>u</a:t>
+              </a:r>
+              <a:r>
+                <a:rPr lang="en-GB" baseline="-25000" dirty="0"/>
+                <a:t>y4</a:t>
+              </a:r>
+              <a:endParaRPr lang="en-GB" dirty="0"/>
+            </a:p>
+          </p:txBody>
+        </p:sp>
+        <p:cxnSp>
+          <p:nvCxnSpPr>
+            <p:cNvPr id="31" name="Connector: Curved 30">
+              <a:extLst>
+                <a:ext uri="{FF2B5EF4-FFF2-40B4-BE49-F238E27FC236}">
+                  <a16:creationId xmlns:a16="http://schemas.microsoft.com/office/drawing/2014/main" id="{58402533-A30C-4CC8-9656-E05CA4DB4BFE}"/>
+                </a:ext>
+              </a:extLst>
+            </p:cNvPr>
+            <p:cNvCxnSpPr>
+              <a:cxnSpLocks/>
+              <a:stCxn id="20" idx="0"/>
+              <a:endCxn id="21" idx="0"/>
+            </p:cNvCxnSpPr>
+            <p:nvPr/>
+          </p:nvCxnSpPr>
+          <p:spPr>
+            <a:xfrm rot="5400000" flipH="1" flipV="1">
+              <a:off x="6998351" y="1499569"/>
+              <a:ext cx="8244" cy="1016226"/>
+            </a:xfrm>
+            <a:prstGeom prst="curvedConnector3">
+              <a:avLst>
+                <a:gd name="adj1" fmla="val 1800000"/>
+              </a:avLst>
+            </a:prstGeom>
+            <a:ln w="19050">
+              <a:solidFill>
+                <a:schemeClr val="tx1"/>
+              </a:solidFill>
+              <a:headEnd type="triangle" w="lg" len="lg"/>
+              <a:tailEnd type="triangle" w="lg" len="lg"/>
+            </a:ln>
+          </p:spPr>
+          <p:style>
+            <a:lnRef idx="1">
+              <a:schemeClr val="accent1"/>
+            </a:lnRef>
+            <a:fillRef idx="0">
+              <a:schemeClr val="accent1"/>
+            </a:fillRef>
+            <a:effectRef idx="0">
+              <a:schemeClr val="accent1"/>
+            </a:effectRef>
+            <a:fontRef idx="minor">
+              <a:schemeClr val="tx1"/>
+            </a:fontRef>
+          </p:style>
+        </p:cxnSp>
+        <p:cxnSp>
+          <p:nvCxnSpPr>
+            <p:cNvPr id="32" name="Connector: Curved 31">
+              <a:extLst>
+                <a:ext uri="{FF2B5EF4-FFF2-40B4-BE49-F238E27FC236}">
+                  <a16:creationId xmlns:a16="http://schemas.microsoft.com/office/drawing/2014/main" id="{BD8322F3-3DA9-4DE5-A11D-50FFA06A2564}"/>
+                </a:ext>
+              </a:extLst>
+            </p:cNvPr>
+            <p:cNvCxnSpPr>
+              <a:stCxn id="20" idx="0"/>
+              <a:endCxn id="23" idx="0"/>
+            </p:cNvCxnSpPr>
+            <p:nvPr/>
+          </p:nvCxnSpPr>
+          <p:spPr>
+            <a:xfrm rot="5400000" flipH="1" flipV="1">
+              <a:off x="7513764" y="984157"/>
+              <a:ext cx="8244" cy="2047051"/>
+            </a:xfrm>
+            <a:prstGeom prst="curvedConnector3">
+              <a:avLst>
+                <a:gd name="adj1" fmla="val 5210528"/>
+              </a:avLst>
+            </a:prstGeom>
+            <a:ln w="19050">
+              <a:solidFill>
+                <a:schemeClr val="tx1"/>
+              </a:solidFill>
+              <a:headEnd type="triangle" w="lg" len="lg"/>
+              <a:tailEnd type="triangle" w="lg" len="lg"/>
+            </a:ln>
+          </p:spPr>
+          <p:style>
+            <a:lnRef idx="1">
+              <a:schemeClr val="accent1"/>
+            </a:lnRef>
+            <a:fillRef idx="0">
+              <a:schemeClr val="accent1"/>
+            </a:fillRef>
+            <a:effectRef idx="0">
+              <a:schemeClr val="accent1"/>
+            </a:effectRef>
+            <a:fontRef idx="minor">
+              <a:schemeClr val="tx1"/>
+            </a:fontRef>
+          </p:style>
+        </p:cxnSp>
+        <p:cxnSp>
+          <p:nvCxnSpPr>
+            <p:cNvPr id="33" name="Connector: Curved 32">
+              <a:extLst>
+                <a:ext uri="{FF2B5EF4-FFF2-40B4-BE49-F238E27FC236}">
+                  <a16:creationId xmlns:a16="http://schemas.microsoft.com/office/drawing/2014/main" id="{445CD7DE-D7CE-4228-91C5-C8D9F00019A1}"/>
+                </a:ext>
+              </a:extLst>
+            </p:cNvPr>
+            <p:cNvCxnSpPr>
+              <a:stCxn id="20" idx="0"/>
+              <a:endCxn id="28" idx="0"/>
+            </p:cNvCxnSpPr>
+            <p:nvPr/>
+          </p:nvCxnSpPr>
+          <p:spPr>
+            <a:xfrm rot="5400000" flipH="1" flipV="1">
+              <a:off x="8007635" y="490285"/>
+              <a:ext cx="8244" cy="3034795"/>
+            </a:xfrm>
+            <a:prstGeom prst="curvedConnector3">
+              <a:avLst>
+                <a:gd name="adj1" fmla="val 10642102"/>
+              </a:avLst>
+            </a:prstGeom>
+            <a:ln w="19050">
+              <a:solidFill>
+                <a:schemeClr val="tx1"/>
+              </a:solidFill>
+              <a:headEnd type="triangle" w="lg" len="lg"/>
+              <a:tailEnd type="triangle" w="lg" len="lg"/>
+            </a:ln>
+          </p:spPr>
+          <p:style>
+            <a:lnRef idx="1">
+              <a:schemeClr val="accent1"/>
+            </a:lnRef>
+            <a:fillRef idx="0">
+              <a:schemeClr val="accent1"/>
+            </a:fillRef>
+            <a:effectRef idx="0">
+              <a:schemeClr val="accent1"/>
+            </a:effectRef>
+            <a:fontRef idx="minor">
+              <a:schemeClr val="tx1"/>
+            </a:fontRef>
+          </p:style>
+        </p:cxnSp>
+        <p:cxnSp>
+          <p:nvCxnSpPr>
+            <p:cNvPr id="34" name="Connector: Curved 33">
+              <a:extLst>
+                <a:ext uri="{FF2B5EF4-FFF2-40B4-BE49-F238E27FC236}">
+                  <a16:creationId xmlns:a16="http://schemas.microsoft.com/office/drawing/2014/main" id="{FB36DFC6-E0F6-4427-B054-0A2A769D05CC}"/>
+                </a:ext>
+              </a:extLst>
+            </p:cNvPr>
+            <p:cNvCxnSpPr>
+              <a:stCxn id="21" idx="0"/>
+              <a:endCxn id="23" idx="0"/>
+            </p:cNvCxnSpPr>
+            <p:nvPr/>
+          </p:nvCxnSpPr>
+          <p:spPr>
+            <a:xfrm rot="5400000" flipH="1" flipV="1">
+              <a:off x="8021877" y="1492270"/>
+              <a:ext cx="8244" cy="1030825"/>
+            </a:xfrm>
+            <a:prstGeom prst="curvedConnector3">
+              <a:avLst>
+                <a:gd name="adj1" fmla="val 1800000"/>
+              </a:avLst>
+            </a:prstGeom>
+            <a:ln w="19050">
+              <a:solidFill>
+                <a:schemeClr val="tx1"/>
+              </a:solidFill>
+              <a:headEnd type="triangle" w="lg" len="lg"/>
+              <a:tailEnd type="triangle" w="lg" len="lg"/>
+            </a:ln>
+          </p:spPr>
+          <p:style>
+            <a:lnRef idx="1">
+              <a:schemeClr val="accent1"/>
+            </a:lnRef>
+            <a:fillRef idx="0">
+              <a:schemeClr val="accent1"/>
+            </a:fillRef>
+            <a:effectRef idx="0">
+              <a:schemeClr val="accent1"/>
+            </a:effectRef>
+            <a:fontRef idx="minor">
+              <a:schemeClr val="tx1"/>
+            </a:fontRef>
+          </p:style>
+        </p:cxnSp>
+        <p:cxnSp>
+          <p:nvCxnSpPr>
+            <p:cNvPr id="35" name="Connector: Curved 34">
+              <a:extLst>
+                <a:ext uri="{FF2B5EF4-FFF2-40B4-BE49-F238E27FC236}">
+                  <a16:creationId xmlns:a16="http://schemas.microsoft.com/office/drawing/2014/main" id="{38D0B890-A4F3-4718-A91A-C7A94F95A4C0}"/>
+                </a:ext>
+              </a:extLst>
+            </p:cNvPr>
+            <p:cNvCxnSpPr>
+              <a:stCxn id="23" idx="0"/>
+              <a:endCxn id="28" idx="0"/>
+            </p:cNvCxnSpPr>
+            <p:nvPr/>
+          </p:nvCxnSpPr>
+          <p:spPr>
+            <a:xfrm rot="5400000" flipH="1" flipV="1">
+              <a:off x="9031161" y="1513811"/>
+              <a:ext cx="8244" cy="987743"/>
+            </a:xfrm>
+            <a:prstGeom prst="curvedConnector3">
+              <a:avLst>
+                <a:gd name="adj1" fmla="val 1800000"/>
+              </a:avLst>
+            </a:prstGeom>
+            <a:ln w="19050">
+              <a:solidFill>
+                <a:schemeClr val="tx1"/>
+              </a:solidFill>
+              <a:headEnd type="triangle" w="lg" len="lg"/>
+              <a:tailEnd type="triangle" w="lg" len="lg"/>
+            </a:ln>
+          </p:spPr>
+          <p:style>
+            <a:lnRef idx="1">
+              <a:schemeClr val="accent1"/>
+            </a:lnRef>
+            <a:fillRef idx="0">
+              <a:schemeClr val="accent1"/>
+            </a:fillRef>
+            <a:effectRef idx="0">
+              <a:schemeClr val="accent1"/>
+            </a:effectRef>
+            <a:fontRef idx="minor">
+              <a:schemeClr val="tx1"/>
+            </a:fontRef>
+          </p:style>
+        </p:cxnSp>
+        <p:cxnSp>
+          <p:nvCxnSpPr>
+            <p:cNvPr id="36" name="Connector: Curved 35">
+              <a:extLst>
+                <a:ext uri="{FF2B5EF4-FFF2-40B4-BE49-F238E27FC236}">
+                  <a16:creationId xmlns:a16="http://schemas.microsoft.com/office/drawing/2014/main" id="{A84BA7F0-BA4A-46E1-9905-624F364A8FF4}"/>
+                </a:ext>
+              </a:extLst>
+            </p:cNvPr>
+            <p:cNvCxnSpPr>
+              <a:stCxn id="21" idx="0"/>
+              <a:endCxn id="28" idx="0"/>
+            </p:cNvCxnSpPr>
+            <p:nvPr/>
+          </p:nvCxnSpPr>
+          <p:spPr>
+            <a:xfrm rot="5400000" flipH="1" flipV="1">
+              <a:off x="8515748" y="998398"/>
+              <a:ext cx="8244" cy="2018568"/>
+            </a:xfrm>
+            <a:prstGeom prst="curvedConnector3">
+              <a:avLst>
+                <a:gd name="adj1" fmla="val 5210528"/>
+              </a:avLst>
+            </a:prstGeom>
+            <a:ln w="19050">
+              <a:solidFill>
+                <a:schemeClr val="tx1"/>
+              </a:solidFill>
+              <a:headEnd type="triangle" w="lg" len="lg"/>
+              <a:tailEnd type="triangle" w="lg" len="lg"/>
+            </a:ln>
+          </p:spPr>
+          <p:style>
+            <a:lnRef idx="1">
+              <a:schemeClr val="accent1"/>
+            </a:lnRef>
+            <a:fillRef idx="0">
+              <a:schemeClr val="accent1"/>
+            </a:fillRef>
+            <a:effectRef idx="0">
+              <a:schemeClr val="accent1"/>
+            </a:effectRef>
+            <a:fontRef idx="minor">
+              <a:schemeClr val="tx1"/>
+            </a:fontRef>
+          </p:style>
+        </p:cxnSp>
+        <p:sp>
+          <p:nvSpPr>
+            <p:cNvPr id="37" name="TextBox 36">
+              <a:extLst>
+                <a:ext uri="{FF2B5EF4-FFF2-40B4-BE49-F238E27FC236}">
+                  <a16:creationId xmlns:a16="http://schemas.microsoft.com/office/drawing/2014/main" id="{C37BF966-385C-430B-BE4F-501D4D02EAEC}"/>
+                </a:ext>
+              </a:extLst>
+            </p:cNvPr>
+            <p:cNvSpPr txBox="1"/>
+            <p:nvPr/>
+          </p:nvSpPr>
+          <p:spPr>
+            <a:xfrm>
+              <a:off x="6816986" y="1025651"/>
+              <a:ext cx="2433408" cy="2585323"/>
+            </a:xfrm>
+            <a:prstGeom prst="rect">
+              <a:avLst/>
+            </a:prstGeom>
+            <a:noFill/>
+          </p:spPr>
+          <p:txBody>
+            <a:bodyPr wrap="square" rtlCol="0">
+              <a:spAutoFit/>
+            </a:bodyPr>
+            <a:lstStyle/>
+            <a:p>
+              <a:pPr algn="ctr"/>
+              <a:r>
+                <a:rPr lang="en-GB" dirty="0"/>
+                <a:t>	a	</a:t>
+              </a:r>
+            </a:p>
+            <a:p>
+              <a:pPr algn="ctr"/>
+              <a:r>
+                <a:rPr lang="en-GB" dirty="0"/>
+                <a:t>b                      c</a:t>
+              </a:r>
+            </a:p>
+            <a:p>
+              <a:pPr algn="ctr"/>
+              <a:r>
+                <a:rPr lang="en-GB" dirty="0"/>
+                <a:t>d                e                 f</a:t>
+              </a:r>
+            </a:p>
+            <a:p>
+              <a:pPr algn="ctr"/>
+              <a:endParaRPr lang="en-GB" dirty="0"/>
+            </a:p>
+            <a:p>
+              <a:pPr algn="ctr"/>
+              <a:endParaRPr lang="en-GB" dirty="0"/>
+            </a:p>
+            <a:p>
+              <a:pPr algn="ctr"/>
+              <a:endParaRPr lang="en-GB" dirty="0"/>
+            </a:p>
+            <a:p>
+              <a:pPr algn="ctr"/>
+              <a:endParaRPr lang="en-GB" dirty="0"/>
+            </a:p>
+            <a:p>
+              <a:pPr algn="ctr"/>
+              <a:endParaRPr lang="en-GB" dirty="0"/>
+            </a:p>
+            <a:p>
+              <a:pPr algn="ctr"/>
+              <a:endParaRPr lang="en-GB" dirty="0"/>
+            </a:p>
+          </p:txBody>
+        </p:sp>
+      </p:grpSp>
+      <p:sp>
+        <p:nvSpPr>
+          <p:cNvPr id="43" name="TextBox 42">
+            <a:extLst>
+              <a:ext uri="{FF2B5EF4-FFF2-40B4-BE49-F238E27FC236}">
+                <a16:creationId xmlns:a16="http://schemas.microsoft.com/office/drawing/2014/main" id="{F81B9166-2C33-4037-90D1-C3401F921BB0}"/>
+              </a:ext>
+            </a:extLst>
+          </p:cNvPr>
+          <p:cNvSpPr txBox="1"/>
+          <p:nvPr/>
+        </p:nvSpPr>
+        <p:spPr>
+          <a:xfrm>
+            <a:off x="270105" y="346454"/>
+            <a:ext cx="4096838" cy="954107"/>
+          </a:xfrm>
+          <a:prstGeom prst="rect">
+            <a:avLst/>
+          </a:prstGeom>
+          <a:noFill/>
+        </p:spPr>
+        <p:txBody>
+          <a:bodyPr wrap="square" rtlCol="0">
+            <a:spAutoFit/>
+          </a:bodyPr>
+          <a:lstStyle/>
+          <a:p>
+            <a:r>
+              <a:rPr lang="en-GB" sz="2800" dirty="0"/>
+              <a:t>Model 1 	 				</a:t>
+            </a:r>
+          </a:p>
+        </p:txBody>
+      </p:sp>
+      <p:sp>
+        <p:nvSpPr>
+          <p:cNvPr id="44" name="TextBox 43">
+            <a:extLst>
+              <a:ext uri="{FF2B5EF4-FFF2-40B4-BE49-F238E27FC236}">
+                <a16:creationId xmlns:a16="http://schemas.microsoft.com/office/drawing/2014/main" id="{7C33B35E-F319-4A0A-9A84-EEE48591FE37}"/>
+              </a:ext>
+            </a:extLst>
+          </p:cNvPr>
+          <p:cNvSpPr txBox="1"/>
+          <p:nvPr/>
+        </p:nvSpPr>
+        <p:spPr>
+          <a:xfrm>
+            <a:off x="6257876" y="331964"/>
+            <a:ext cx="4096838" cy="954107"/>
+          </a:xfrm>
+          <a:prstGeom prst="rect">
+            <a:avLst/>
+          </a:prstGeom>
+          <a:noFill/>
+        </p:spPr>
+        <p:txBody>
+          <a:bodyPr wrap="square" rtlCol="0">
+            <a:spAutoFit/>
+          </a:bodyPr>
+          <a:lstStyle/>
+          <a:p>
+            <a:r>
+              <a:rPr lang="en-GB" sz="2800" dirty="0"/>
+              <a:t>Model 2 	 				</a:t>
+            </a:r>
+          </a:p>
+        </p:txBody>
+      </p:sp>
+    </p:spTree>
+    <p:extLst>
+      <p:ext uri="{BB962C8B-B14F-4D97-AF65-F5344CB8AC3E}">
+        <p14:creationId xmlns:p14="http://schemas.microsoft.com/office/powerpoint/2010/main" val="1613068813"/>
+      </p:ext>
+    </p:extLst>
+  </p:cSld>
+  <p:clrMapOvr>
+    <a:masterClrMapping/>
+  </p:clrMapOvr>
+</p:sld>
+</file>
+
+<file path=ppt/slides/slide5.xml><?xml version="1.0" encoding="utf-8"?>
+<p:sld xmlns:a="http://schemas.openxmlformats.org/drawingml/2006/main" xmlns:r="http://schemas.openxmlformats.org/officeDocument/2006/relationships" xmlns:p="http://schemas.openxmlformats.org/presentationml/2006/main">
+  <p:cSld>
+    <p:spTree>
+      <p:nvGrpSpPr>
+        <p:cNvPr id="1" name=""/>
+        <p:cNvGrpSpPr/>
+        <p:nvPr/>
+      </p:nvGrpSpPr>
+      <p:grpSpPr>
+        <a:xfrm>
+          <a:off x="0" y="0"/>
+          <a:ext cx="0" cy="0"/>
+          <a:chOff x="0" y="0"/>
+          <a:chExt cx="0" cy="0"/>
+        </a:xfrm>
+      </p:grpSpPr>
+      <p:grpSp>
+        <p:nvGrpSpPr>
+          <p:cNvPr id="2" name="Group 1">
+            <a:extLst>
+              <a:ext uri="{FF2B5EF4-FFF2-40B4-BE49-F238E27FC236}">
+                <a16:creationId xmlns:a16="http://schemas.microsoft.com/office/drawing/2014/main" id="{C7CAF0F0-18D3-4C42-A875-E574B8363E95}"/>
+              </a:ext>
+            </a:extLst>
+          </p:cNvPr>
+          <p:cNvGrpSpPr/>
+          <p:nvPr/>
+        </p:nvGrpSpPr>
+        <p:grpSpPr>
+          <a:xfrm>
+            <a:off x="1146816" y="1829830"/>
+            <a:ext cx="3677771" cy="1244694"/>
+            <a:chOff x="784162" y="3076074"/>
+            <a:chExt cx="5405200" cy="1922932"/>
+          </a:xfrm>
+        </p:grpSpPr>
+        <p:sp>
+          <p:nvSpPr>
+            <p:cNvPr id="64" name="Arc 63">
+              <a:extLst>
+                <a:ext uri="{FF2B5EF4-FFF2-40B4-BE49-F238E27FC236}">
+                  <a16:creationId xmlns:a16="http://schemas.microsoft.com/office/drawing/2014/main" id="{1691CF3F-FAC2-4DA5-BF63-0B4D4D72F3A6}"/>
+                </a:ext>
+              </a:extLst>
+            </p:cNvPr>
+            <p:cNvSpPr/>
+            <p:nvPr/>
+          </p:nvSpPr>
+          <p:spPr>
+            <a:xfrm rot="1003916">
+              <a:off x="816248" y="3790689"/>
+              <a:ext cx="721895" cy="705852"/>
+            </a:xfrm>
+            <a:prstGeom prst="arc">
+              <a:avLst>
+                <a:gd name="adj1" fmla="val 16200000"/>
+                <a:gd name="adj2" fmla="val 13932934"/>
+              </a:avLst>
+            </a:prstGeom>
+            <a:noFill/>
+            <a:ln w="19050">
+              <a:solidFill>
+                <a:schemeClr val="tx1"/>
+              </a:solidFill>
+              <a:headEnd type="triangle" w="lg" len="lg"/>
+              <a:tailEnd type="triangle" w="lg" len="lg"/>
+            </a:ln>
+          </p:spPr>
+          <p:style>
+            <a:lnRef idx="1">
+              <a:schemeClr val="accent1"/>
+            </a:lnRef>
+            <a:fillRef idx="0">
+              <a:schemeClr val="accent1"/>
+            </a:fillRef>
+            <a:effectRef idx="0">
+              <a:schemeClr val="accent1"/>
+            </a:effectRef>
+            <a:fontRef idx="minor">
+              <a:schemeClr val="tx1"/>
+            </a:fontRef>
+          </p:style>
+          <p:txBody>
+            <a:bodyPr rtlCol="0" anchor="ctr"/>
+            <a:lstStyle/>
+            <a:p>
+              <a:pPr algn="ctr"/>
+              <a:endParaRPr lang="en-GB" sz="3200" dirty="0"/>
+            </a:p>
+          </p:txBody>
+        </p:sp>
+        <p:sp>
+          <p:nvSpPr>
+            <p:cNvPr id="65" name="Rectangle 64">
+              <a:extLst>
+                <a:ext uri="{FF2B5EF4-FFF2-40B4-BE49-F238E27FC236}">
+                  <a16:creationId xmlns:a16="http://schemas.microsoft.com/office/drawing/2014/main" id="{2D44291F-1D23-48B0-8155-E5B9189D0B29}"/>
+                </a:ext>
+              </a:extLst>
+            </p:cNvPr>
+            <p:cNvSpPr/>
+            <p:nvPr/>
+          </p:nvSpPr>
+          <p:spPr>
+            <a:xfrm>
+              <a:off x="784162" y="3076074"/>
+              <a:ext cx="721895" cy="705852"/>
+            </a:xfrm>
+            <a:prstGeom prst="rect">
+              <a:avLst/>
+            </a:prstGeom>
+            <a:noFill/>
+            <a:ln w="19050">
+              <a:solidFill>
+                <a:schemeClr val="tx1"/>
+              </a:solidFill>
+            </a:ln>
+          </p:spPr>
+          <p:style>
+            <a:lnRef idx="2">
+              <a:schemeClr val="accent1">
+                <a:shade val="50000"/>
+              </a:schemeClr>
+            </a:lnRef>
+            <a:fillRef idx="1">
+              <a:schemeClr val="accent1"/>
+            </a:fillRef>
+            <a:effectRef idx="0">
+              <a:schemeClr val="accent1"/>
+            </a:effectRef>
+            <a:fontRef idx="minor">
+              <a:schemeClr val="lt1"/>
+            </a:fontRef>
+          </p:style>
+          <p:txBody>
+            <a:bodyPr rtlCol="0" anchor="ctr"/>
+            <a:lstStyle/>
+            <a:p>
+              <a:pPr algn="ctr"/>
+              <a:r>
+                <a:rPr lang="en-GB" dirty="0">
+                  <a:solidFill>
+                    <a:schemeClr val="tx1"/>
+                  </a:solidFill>
+                </a:rPr>
+                <a:t>Y1</a:t>
+              </a:r>
+            </a:p>
+          </p:txBody>
+        </p:sp>
+        <p:sp>
+          <p:nvSpPr>
+            <p:cNvPr id="66" name="Rectangle 65">
+              <a:extLst>
+                <a:ext uri="{FF2B5EF4-FFF2-40B4-BE49-F238E27FC236}">
+                  <a16:creationId xmlns:a16="http://schemas.microsoft.com/office/drawing/2014/main" id="{35DE9A06-4DA6-4332-9AFB-19301BCBF9A4}"/>
+                </a:ext>
+              </a:extLst>
+            </p:cNvPr>
+            <p:cNvSpPr/>
+            <p:nvPr/>
+          </p:nvSpPr>
+          <p:spPr>
+            <a:xfrm>
+              <a:off x="2307484" y="3076074"/>
+              <a:ext cx="721895" cy="705852"/>
+            </a:xfrm>
+            <a:prstGeom prst="rect">
+              <a:avLst/>
+            </a:prstGeom>
+            <a:noFill/>
+            <a:ln w="19050">
+              <a:solidFill>
+                <a:schemeClr val="tx1"/>
+              </a:solidFill>
+            </a:ln>
+          </p:spPr>
+          <p:style>
+            <a:lnRef idx="2">
+              <a:schemeClr val="accent1">
+                <a:shade val="50000"/>
+              </a:schemeClr>
+            </a:lnRef>
+            <a:fillRef idx="1">
+              <a:schemeClr val="accent1"/>
+            </a:fillRef>
+            <a:effectRef idx="0">
+              <a:schemeClr val="accent1"/>
+            </a:effectRef>
+            <a:fontRef idx="minor">
+              <a:schemeClr val="lt1"/>
+            </a:fontRef>
+          </p:style>
+          <p:txBody>
+            <a:bodyPr rtlCol="0" anchor="ctr"/>
+            <a:lstStyle/>
+            <a:p>
+              <a:pPr algn="ctr"/>
+              <a:r>
+                <a:rPr lang="en-GB" dirty="0">
+                  <a:solidFill>
+                    <a:schemeClr val="tx1"/>
+                  </a:solidFill>
+                </a:rPr>
+                <a:t>Y2</a:t>
+              </a:r>
+            </a:p>
+          </p:txBody>
+        </p:sp>
+        <p:sp>
+          <p:nvSpPr>
+            <p:cNvPr id="67" name="Arc 66">
+              <a:extLst>
+                <a:ext uri="{FF2B5EF4-FFF2-40B4-BE49-F238E27FC236}">
+                  <a16:creationId xmlns:a16="http://schemas.microsoft.com/office/drawing/2014/main" id="{E888E1F1-280C-4843-8256-4C2FE1864DB0}"/>
+                </a:ext>
+              </a:extLst>
+            </p:cNvPr>
+            <p:cNvSpPr/>
+            <p:nvPr/>
+          </p:nvSpPr>
+          <p:spPr>
+            <a:xfrm rot="1003916">
+              <a:off x="2307483" y="3799452"/>
+              <a:ext cx="721895" cy="705852"/>
+            </a:xfrm>
+            <a:prstGeom prst="arc">
+              <a:avLst>
+                <a:gd name="adj1" fmla="val 16200000"/>
+                <a:gd name="adj2" fmla="val 13932934"/>
+              </a:avLst>
+            </a:prstGeom>
+            <a:noFill/>
+            <a:ln w="19050">
+              <a:solidFill>
+                <a:schemeClr val="tx1"/>
+              </a:solidFill>
+              <a:headEnd type="triangle" w="lg" len="lg"/>
+              <a:tailEnd type="triangle" w="lg" len="lg"/>
+            </a:ln>
+          </p:spPr>
+          <p:style>
+            <a:lnRef idx="1">
+              <a:schemeClr val="accent1"/>
+            </a:lnRef>
+            <a:fillRef idx="0">
+              <a:schemeClr val="accent1"/>
+            </a:fillRef>
+            <a:effectRef idx="0">
+              <a:schemeClr val="accent1"/>
+            </a:effectRef>
+            <a:fontRef idx="minor">
+              <a:schemeClr val="tx1"/>
+            </a:fontRef>
+          </p:style>
+          <p:txBody>
+            <a:bodyPr rtlCol="0" anchor="ctr"/>
+            <a:lstStyle/>
+            <a:p>
+              <a:pPr algn="ctr"/>
+              <a:endParaRPr lang="en-GB" sz="3200"/>
+            </a:p>
+          </p:txBody>
+        </p:sp>
+        <p:sp>
+          <p:nvSpPr>
+            <p:cNvPr id="85" name="Rectangle 84">
+              <a:extLst>
+                <a:ext uri="{FF2B5EF4-FFF2-40B4-BE49-F238E27FC236}">
+                  <a16:creationId xmlns:a16="http://schemas.microsoft.com/office/drawing/2014/main" id="{3D905296-943E-4230-BCA4-59A75EF5C5A7}"/>
+                </a:ext>
+              </a:extLst>
+            </p:cNvPr>
+            <p:cNvSpPr/>
+            <p:nvPr/>
+          </p:nvSpPr>
+          <p:spPr>
+            <a:xfrm>
+              <a:off x="3852690" y="3076074"/>
+              <a:ext cx="721895" cy="705852"/>
+            </a:xfrm>
+            <a:prstGeom prst="rect">
+              <a:avLst/>
+            </a:prstGeom>
+            <a:noFill/>
+            <a:ln w="19050">
+              <a:solidFill>
+                <a:schemeClr val="tx1"/>
+              </a:solidFill>
+            </a:ln>
+          </p:spPr>
+          <p:style>
+            <a:lnRef idx="2">
+              <a:schemeClr val="accent1">
+                <a:shade val="50000"/>
+              </a:schemeClr>
+            </a:lnRef>
+            <a:fillRef idx="1">
+              <a:schemeClr val="accent1"/>
+            </a:fillRef>
+            <a:effectRef idx="0">
+              <a:schemeClr val="accent1"/>
+            </a:effectRef>
+            <a:fontRef idx="minor">
+              <a:schemeClr val="lt1"/>
+            </a:fontRef>
+          </p:style>
+          <p:txBody>
+            <a:bodyPr rtlCol="0" anchor="ctr"/>
+            <a:lstStyle/>
+            <a:p>
+              <a:pPr algn="ctr"/>
+              <a:r>
+                <a:rPr lang="en-GB" dirty="0">
+                  <a:solidFill>
+                    <a:schemeClr val="tx1"/>
+                  </a:solidFill>
+                </a:rPr>
+                <a:t>Y3</a:t>
+              </a:r>
+            </a:p>
+          </p:txBody>
+        </p:sp>
+        <p:sp>
+          <p:nvSpPr>
+            <p:cNvPr id="86" name="Arc 85">
+              <a:extLst>
+                <a:ext uri="{FF2B5EF4-FFF2-40B4-BE49-F238E27FC236}">
+                  <a16:creationId xmlns:a16="http://schemas.microsoft.com/office/drawing/2014/main" id="{1AD23F76-7332-4DDB-AAD5-276343377AB2}"/>
+                </a:ext>
+              </a:extLst>
+            </p:cNvPr>
+            <p:cNvSpPr/>
+            <p:nvPr/>
+          </p:nvSpPr>
+          <p:spPr>
+            <a:xfrm rot="1003916">
+              <a:off x="3852689" y="3799452"/>
+              <a:ext cx="721895" cy="705852"/>
+            </a:xfrm>
+            <a:prstGeom prst="arc">
+              <a:avLst>
+                <a:gd name="adj1" fmla="val 16200000"/>
+                <a:gd name="adj2" fmla="val 13932934"/>
+              </a:avLst>
+            </a:prstGeom>
+            <a:noFill/>
+            <a:ln w="19050">
+              <a:solidFill>
+                <a:schemeClr val="tx1"/>
+              </a:solidFill>
+              <a:headEnd type="triangle" w="lg" len="lg"/>
+              <a:tailEnd type="triangle" w="lg" len="lg"/>
+            </a:ln>
+          </p:spPr>
+          <p:style>
+            <a:lnRef idx="1">
+              <a:schemeClr val="accent1"/>
+            </a:lnRef>
+            <a:fillRef idx="0">
+              <a:schemeClr val="accent1"/>
+            </a:fillRef>
+            <a:effectRef idx="0">
+              <a:schemeClr val="accent1"/>
+            </a:effectRef>
+            <a:fontRef idx="minor">
+              <a:schemeClr val="tx1"/>
+            </a:fontRef>
+          </p:style>
+          <p:txBody>
+            <a:bodyPr rtlCol="0" anchor="ctr"/>
+            <a:lstStyle/>
+            <a:p>
+              <a:pPr algn="ctr"/>
+              <a:endParaRPr lang="en-GB" sz="3200"/>
+            </a:p>
+          </p:txBody>
+        </p:sp>
+        <p:sp>
+          <p:nvSpPr>
+            <p:cNvPr id="87" name="TextBox 86">
+              <a:extLst>
+                <a:ext uri="{FF2B5EF4-FFF2-40B4-BE49-F238E27FC236}">
+                  <a16:creationId xmlns:a16="http://schemas.microsoft.com/office/drawing/2014/main" id="{0BFF351A-8B7F-4580-A65E-AA75035EC0E2}"/>
+                </a:ext>
+              </a:extLst>
+            </p:cNvPr>
+            <p:cNvSpPr txBox="1"/>
+            <p:nvPr/>
+          </p:nvSpPr>
+          <p:spPr>
+            <a:xfrm>
+              <a:off x="913181" y="4428424"/>
+              <a:ext cx="721895" cy="570582"/>
+            </a:xfrm>
+            <a:prstGeom prst="rect">
+              <a:avLst/>
+            </a:prstGeom>
+            <a:noFill/>
+            <a:ln w="19050">
+              <a:noFill/>
+            </a:ln>
+          </p:spPr>
+          <p:txBody>
+            <a:bodyPr wrap="square" rtlCol="0">
+              <a:spAutoFit/>
+            </a:bodyPr>
+            <a:lstStyle/>
+            <a:p>
+              <a:r>
+                <a:rPr lang="en-GB" dirty="0"/>
+                <a:t>u</a:t>
+              </a:r>
+              <a:r>
+                <a:rPr lang="en-GB" baseline="-25000" dirty="0"/>
+                <a:t>y1</a:t>
+              </a:r>
+              <a:endParaRPr lang="en-GB" dirty="0"/>
+            </a:p>
+          </p:txBody>
+        </p:sp>
+        <p:sp>
+          <p:nvSpPr>
+            <p:cNvPr id="88" name="TextBox 87">
+              <a:extLst>
+                <a:ext uri="{FF2B5EF4-FFF2-40B4-BE49-F238E27FC236}">
+                  <a16:creationId xmlns:a16="http://schemas.microsoft.com/office/drawing/2014/main" id="{78A01F7A-74A1-4988-9A0A-D82DCFCAFD2D}"/>
+                </a:ext>
+              </a:extLst>
+            </p:cNvPr>
+            <p:cNvSpPr txBox="1"/>
+            <p:nvPr/>
+          </p:nvSpPr>
+          <p:spPr>
+            <a:xfrm>
+              <a:off x="2506215" y="4420849"/>
+              <a:ext cx="721895" cy="570582"/>
+            </a:xfrm>
+            <a:prstGeom prst="rect">
+              <a:avLst/>
+            </a:prstGeom>
+            <a:noFill/>
+            <a:ln w="19050">
+              <a:noFill/>
+            </a:ln>
+          </p:spPr>
+          <p:txBody>
+            <a:bodyPr wrap="square" rtlCol="0">
+              <a:spAutoFit/>
+            </a:bodyPr>
+            <a:lstStyle/>
+            <a:p>
+              <a:r>
+                <a:rPr lang="en-GB" dirty="0"/>
+                <a:t>u</a:t>
+              </a:r>
+              <a:r>
+                <a:rPr lang="en-GB" baseline="-25000" dirty="0"/>
+                <a:t>y2</a:t>
+              </a:r>
+              <a:endParaRPr lang="en-GB" dirty="0"/>
+            </a:p>
+          </p:txBody>
+        </p:sp>
+        <p:sp>
+          <p:nvSpPr>
+            <p:cNvPr id="89" name="TextBox 88">
+              <a:extLst>
+                <a:ext uri="{FF2B5EF4-FFF2-40B4-BE49-F238E27FC236}">
+                  <a16:creationId xmlns:a16="http://schemas.microsoft.com/office/drawing/2014/main" id="{C8AFB2D8-6FA4-42CD-9F2B-FAEA8C4D714D}"/>
+                </a:ext>
+              </a:extLst>
+            </p:cNvPr>
+            <p:cNvSpPr txBox="1"/>
+            <p:nvPr/>
+          </p:nvSpPr>
+          <p:spPr>
+            <a:xfrm>
+              <a:off x="3986841" y="4416330"/>
+              <a:ext cx="721895" cy="570582"/>
+            </a:xfrm>
+            <a:prstGeom prst="rect">
+              <a:avLst/>
+            </a:prstGeom>
+            <a:noFill/>
+            <a:ln w="19050">
+              <a:noFill/>
+            </a:ln>
+          </p:spPr>
+          <p:txBody>
+            <a:bodyPr wrap="square" rtlCol="0">
+              <a:spAutoFit/>
+            </a:bodyPr>
+            <a:lstStyle/>
+            <a:p>
+              <a:r>
+                <a:rPr lang="en-GB" dirty="0"/>
+                <a:t>u</a:t>
+              </a:r>
+              <a:r>
+                <a:rPr lang="en-GB" baseline="-25000" dirty="0"/>
+                <a:t>y3</a:t>
+              </a:r>
+              <a:endParaRPr lang="en-GB" dirty="0"/>
+            </a:p>
+          </p:txBody>
+        </p:sp>
+        <p:sp>
+          <p:nvSpPr>
+            <p:cNvPr id="103" name="Rectangle 102">
+              <a:extLst>
+                <a:ext uri="{FF2B5EF4-FFF2-40B4-BE49-F238E27FC236}">
+                  <a16:creationId xmlns:a16="http://schemas.microsoft.com/office/drawing/2014/main" id="{6E96D7AE-3114-4CA7-BD7C-C81F8B1226BA}"/>
+                </a:ext>
+              </a:extLst>
+            </p:cNvPr>
+            <p:cNvSpPr/>
+            <p:nvPr/>
+          </p:nvSpPr>
+          <p:spPr>
+            <a:xfrm>
+              <a:off x="5333316" y="3076074"/>
+              <a:ext cx="721895" cy="705852"/>
+            </a:xfrm>
+            <a:prstGeom prst="rect">
+              <a:avLst/>
+            </a:prstGeom>
+            <a:noFill/>
+            <a:ln w="19050">
+              <a:solidFill>
+                <a:schemeClr val="tx1"/>
+              </a:solidFill>
+            </a:ln>
+          </p:spPr>
+          <p:style>
+            <a:lnRef idx="2">
+              <a:schemeClr val="accent1">
+                <a:shade val="50000"/>
+              </a:schemeClr>
+            </a:lnRef>
+            <a:fillRef idx="1">
+              <a:schemeClr val="accent1"/>
+            </a:fillRef>
+            <a:effectRef idx="0">
+              <a:schemeClr val="accent1"/>
+            </a:effectRef>
+            <a:fontRef idx="minor">
+              <a:schemeClr val="lt1"/>
+            </a:fontRef>
+          </p:style>
+          <p:txBody>
+            <a:bodyPr rtlCol="0" anchor="ctr"/>
+            <a:lstStyle/>
+            <a:p>
+              <a:pPr algn="ctr"/>
+              <a:r>
+                <a:rPr lang="en-GB" dirty="0">
+                  <a:solidFill>
+                    <a:schemeClr val="tx1"/>
+                  </a:solidFill>
+                </a:rPr>
+                <a:t>Y4</a:t>
+              </a:r>
+            </a:p>
+          </p:txBody>
+        </p:sp>
+        <p:sp>
+          <p:nvSpPr>
+            <p:cNvPr id="104" name="Arc 103">
+              <a:extLst>
+                <a:ext uri="{FF2B5EF4-FFF2-40B4-BE49-F238E27FC236}">
+                  <a16:creationId xmlns:a16="http://schemas.microsoft.com/office/drawing/2014/main" id="{C88199AF-3BD6-4F0B-9084-409882704445}"/>
+                </a:ext>
+              </a:extLst>
+            </p:cNvPr>
+            <p:cNvSpPr/>
+            <p:nvPr/>
+          </p:nvSpPr>
+          <p:spPr>
+            <a:xfrm rot="1003916">
+              <a:off x="5333315" y="3799452"/>
+              <a:ext cx="721895" cy="705852"/>
+            </a:xfrm>
+            <a:prstGeom prst="arc">
+              <a:avLst>
+                <a:gd name="adj1" fmla="val 16200000"/>
+                <a:gd name="adj2" fmla="val 13932934"/>
+              </a:avLst>
+            </a:prstGeom>
+            <a:noFill/>
+            <a:ln w="19050">
+              <a:solidFill>
+                <a:schemeClr val="tx1"/>
+              </a:solidFill>
+              <a:headEnd type="triangle" w="lg" len="lg"/>
+              <a:tailEnd type="triangle" w="lg" len="lg"/>
+            </a:ln>
+          </p:spPr>
+          <p:style>
+            <a:lnRef idx="1">
+              <a:schemeClr val="accent1"/>
+            </a:lnRef>
+            <a:fillRef idx="0">
+              <a:schemeClr val="accent1"/>
+            </a:fillRef>
+            <a:effectRef idx="0">
+              <a:schemeClr val="accent1"/>
+            </a:effectRef>
+            <a:fontRef idx="minor">
+              <a:schemeClr val="tx1"/>
+            </a:fontRef>
+          </p:style>
+          <p:txBody>
+            <a:bodyPr rtlCol="0" anchor="ctr"/>
+            <a:lstStyle/>
+            <a:p>
+              <a:pPr algn="ctr"/>
+              <a:endParaRPr lang="en-GB" sz="3200"/>
+            </a:p>
+          </p:txBody>
+        </p:sp>
+        <p:sp>
+          <p:nvSpPr>
+            <p:cNvPr id="105" name="TextBox 104">
+              <a:extLst>
+                <a:ext uri="{FF2B5EF4-FFF2-40B4-BE49-F238E27FC236}">
+                  <a16:creationId xmlns:a16="http://schemas.microsoft.com/office/drawing/2014/main" id="{9FF7F5B6-FCBA-4E96-BE94-0796EC7C72DC}"/>
+                </a:ext>
+              </a:extLst>
+            </p:cNvPr>
+            <p:cNvSpPr txBox="1"/>
+            <p:nvPr/>
+          </p:nvSpPr>
+          <p:spPr>
+            <a:xfrm>
+              <a:off x="5467467" y="4416330"/>
+              <a:ext cx="721895" cy="570582"/>
+            </a:xfrm>
+            <a:prstGeom prst="rect">
+              <a:avLst/>
+            </a:prstGeom>
+            <a:noFill/>
+            <a:ln w="19050">
+              <a:noFill/>
+            </a:ln>
+          </p:spPr>
+          <p:txBody>
+            <a:bodyPr wrap="square" rtlCol="0">
+              <a:spAutoFit/>
+            </a:bodyPr>
+            <a:lstStyle/>
+            <a:p>
+              <a:r>
+                <a:rPr lang="en-GB" dirty="0"/>
+                <a:t>u</a:t>
+              </a:r>
+              <a:r>
+                <a:rPr lang="en-GB" baseline="-25000" dirty="0"/>
+                <a:t>y4</a:t>
+              </a:r>
+              <a:endParaRPr lang="en-GB" dirty="0"/>
+            </a:p>
+          </p:txBody>
+        </p:sp>
+      </p:grpSp>
+      <p:grpSp>
+        <p:nvGrpSpPr>
+          <p:cNvPr id="6" name="Group 5">
+            <a:extLst>
+              <a:ext uri="{FF2B5EF4-FFF2-40B4-BE49-F238E27FC236}">
+                <a16:creationId xmlns:a16="http://schemas.microsoft.com/office/drawing/2014/main" id="{98AFC3E2-4272-438C-88AC-AE4911F1AA01}"/>
+              </a:ext>
+            </a:extLst>
+          </p:cNvPr>
+          <p:cNvGrpSpPr/>
+          <p:nvPr/>
+        </p:nvGrpSpPr>
+        <p:grpSpPr>
+          <a:xfrm>
+            <a:off x="7076719" y="843677"/>
+            <a:ext cx="3605873" cy="2585323"/>
+            <a:chOff x="6249331" y="1025651"/>
+            <a:chExt cx="3605873" cy="2585323"/>
+          </a:xfrm>
+        </p:grpSpPr>
+        <p:sp>
+          <p:nvSpPr>
+            <p:cNvPr id="19" name="Arc 18">
+              <a:extLst>
+                <a:ext uri="{FF2B5EF4-FFF2-40B4-BE49-F238E27FC236}">
+                  <a16:creationId xmlns:a16="http://schemas.microsoft.com/office/drawing/2014/main" id="{C2CEB229-96BE-48F6-8A25-2BE773483CC4}"/>
+                </a:ext>
+              </a:extLst>
+            </p:cNvPr>
+            <p:cNvSpPr/>
+            <p:nvPr/>
+          </p:nvSpPr>
+          <p:spPr>
+            <a:xfrm rot="1003916">
+              <a:off x="6270736" y="2471566"/>
+              <a:ext cx="481585" cy="458196"/>
+            </a:xfrm>
+            <a:prstGeom prst="arc">
+              <a:avLst>
+                <a:gd name="adj1" fmla="val 16200000"/>
+                <a:gd name="adj2" fmla="val 13932934"/>
+              </a:avLst>
+            </a:prstGeom>
+            <a:noFill/>
+            <a:ln w="19050">
+              <a:solidFill>
+                <a:schemeClr val="tx1"/>
+              </a:solidFill>
+              <a:headEnd type="triangle" w="lg" len="lg"/>
+              <a:tailEnd type="triangle" w="lg" len="lg"/>
+            </a:ln>
+          </p:spPr>
+          <p:style>
+            <a:lnRef idx="1">
+              <a:schemeClr val="accent1"/>
+            </a:lnRef>
+            <a:fillRef idx="0">
+              <a:schemeClr val="accent1"/>
+            </a:fillRef>
+            <a:effectRef idx="0">
+              <a:schemeClr val="accent1"/>
+            </a:effectRef>
+            <a:fontRef idx="minor">
+              <a:schemeClr val="tx1"/>
+            </a:fontRef>
+          </p:style>
+          <p:txBody>
+            <a:bodyPr rtlCol="0" anchor="ctr"/>
+            <a:lstStyle/>
+            <a:p>
+              <a:pPr algn="ctr"/>
+              <a:endParaRPr lang="en-GB" sz="3200" dirty="0"/>
+            </a:p>
+          </p:txBody>
+        </p:sp>
+        <p:sp>
+          <p:nvSpPr>
+            <p:cNvPr id="20" name="Rectangle 19">
+              <a:extLst>
+                <a:ext uri="{FF2B5EF4-FFF2-40B4-BE49-F238E27FC236}">
+                  <a16:creationId xmlns:a16="http://schemas.microsoft.com/office/drawing/2014/main" id="{04F31CD2-5652-4D5A-A7CC-48785CF9A4D3}"/>
+                </a:ext>
+              </a:extLst>
+            </p:cNvPr>
+            <p:cNvSpPr/>
+            <p:nvPr/>
+          </p:nvSpPr>
+          <p:spPr>
+            <a:xfrm>
+              <a:off x="6249331" y="2007682"/>
+              <a:ext cx="481585" cy="458196"/>
+            </a:xfrm>
+            <a:prstGeom prst="rect">
+              <a:avLst/>
+            </a:prstGeom>
+            <a:noFill/>
+            <a:ln>
+              <a:solidFill>
+                <a:schemeClr val="tx1"/>
+              </a:solidFill>
+            </a:ln>
+          </p:spPr>
+          <p:style>
+            <a:lnRef idx="2">
+              <a:schemeClr val="accent1">
+                <a:shade val="50000"/>
+              </a:schemeClr>
+            </a:lnRef>
+            <a:fillRef idx="1">
+              <a:schemeClr val="accent1"/>
+            </a:fillRef>
+            <a:effectRef idx="0">
+              <a:schemeClr val="accent1"/>
+            </a:effectRef>
+            <a:fontRef idx="minor">
+              <a:schemeClr val="lt1"/>
+            </a:fontRef>
+          </p:style>
+          <p:txBody>
+            <a:bodyPr rtlCol="0" anchor="ctr"/>
+            <a:lstStyle/>
+            <a:p>
+              <a:pPr algn="ctr"/>
+              <a:r>
+                <a:rPr lang="en-GB" dirty="0">
+                  <a:solidFill>
+                    <a:schemeClr val="tx1"/>
+                  </a:solidFill>
+                </a:rPr>
+                <a:t>Y1</a:t>
+              </a:r>
+            </a:p>
+          </p:txBody>
+        </p:sp>
+        <p:sp>
+          <p:nvSpPr>
+            <p:cNvPr id="21" name="Rectangle 20">
+              <a:extLst>
+                <a:ext uri="{FF2B5EF4-FFF2-40B4-BE49-F238E27FC236}">
+                  <a16:creationId xmlns:a16="http://schemas.microsoft.com/office/drawing/2014/main" id="{4D856481-229F-4814-8C62-A72A01D05675}"/>
+                </a:ext>
+              </a:extLst>
+            </p:cNvPr>
+            <p:cNvSpPr/>
+            <p:nvPr/>
+          </p:nvSpPr>
+          <p:spPr>
+            <a:xfrm>
+              <a:off x="7265557" y="2007682"/>
+              <a:ext cx="481585" cy="458196"/>
+            </a:xfrm>
+            <a:prstGeom prst="rect">
+              <a:avLst/>
+            </a:prstGeom>
+            <a:noFill/>
+            <a:ln>
+              <a:solidFill>
+                <a:schemeClr val="tx1"/>
+              </a:solidFill>
+            </a:ln>
+          </p:spPr>
+          <p:style>
+            <a:lnRef idx="2">
+              <a:schemeClr val="accent1">
+                <a:shade val="50000"/>
+              </a:schemeClr>
+            </a:lnRef>
+            <a:fillRef idx="1">
+              <a:schemeClr val="accent1"/>
+            </a:fillRef>
+            <a:effectRef idx="0">
+              <a:schemeClr val="accent1"/>
+            </a:effectRef>
+            <a:fontRef idx="minor">
+              <a:schemeClr val="lt1"/>
+            </a:fontRef>
+          </p:style>
+          <p:txBody>
+            <a:bodyPr rtlCol="0" anchor="ctr"/>
+            <a:lstStyle/>
+            <a:p>
+              <a:pPr algn="ctr"/>
+              <a:r>
+                <a:rPr lang="en-GB" dirty="0">
+                  <a:solidFill>
+                    <a:schemeClr val="tx1"/>
+                  </a:solidFill>
+                </a:rPr>
+                <a:t>Y2</a:t>
+              </a:r>
+            </a:p>
+          </p:txBody>
+        </p:sp>
+        <p:sp>
+          <p:nvSpPr>
+            <p:cNvPr id="22" name="Arc 21">
+              <a:extLst>
+                <a:ext uri="{FF2B5EF4-FFF2-40B4-BE49-F238E27FC236}">
+                  <a16:creationId xmlns:a16="http://schemas.microsoft.com/office/drawing/2014/main" id="{60D96F5D-EB23-4795-8226-A5BBC31C6B0E}"/>
+                </a:ext>
+              </a:extLst>
+            </p:cNvPr>
+            <p:cNvSpPr/>
+            <p:nvPr/>
+          </p:nvSpPr>
+          <p:spPr>
+            <a:xfrm rot="1003916">
+              <a:off x="7265556" y="2477255"/>
+              <a:ext cx="481585" cy="458196"/>
+            </a:xfrm>
+            <a:prstGeom prst="arc">
+              <a:avLst>
+                <a:gd name="adj1" fmla="val 16200000"/>
+                <a:gd name="adj2" fmla="val 13932934"/>
+              </a:avLst>
+            </a:prstGeom>
+            <a:noFill/>
+            <a:ln w="19050">
+              <a:solidFill>
+                <a:schemeClr val="tx1"/>
+              </a:solidFill>
+              <a:headEnd type="triangle" w="lg" len="lg"/>
+              <a:tailEnd type="triangle" w="lg" len="lg"/>
+            </a:ln>
+          </p:spPr>
+          <p:style>
+            <a:lnRef idx="1">
+              <a:schemeClr val="accent1"/>
+            </a:lnRef>
+            <a:fillRef idx="0">
+              <a:schemeClr val="accent1"/>
+            </a:fillRef>
+            <a:effectRef idx="0">
+              <a:schemeClr val="accent1"/>
+            </a:effectRef>
+            <a:fontRef idx="minor">
+              <a:schemeClr val="tx1"/>
+            </a:fontRef>
+          </p:style>
+          <p:txBody>
+            <a:bodyPr rtlCol="0" anchor="ctr"/>
+            <a:lstStyle/>
+            <a:p>
+              <a:pPr algn="ctr"/>
+              <a:endParaRPr lang="en-GB" sz="3200"/>
+            </a:p>
+          </p:txBody>
+        </p:sp>
+        <p:sp>
+          <p:nvSpPr>
+            <p:cNvPr id="23" name="Rectangle 22">
+              <a:extLst>
+                <a:ext uri="{FF2B5EF4-FFF2-40B4-BE49-F238E27FC236}">
+                  <a16:creationId xmlns:a16="http://schemas.microsoft.com/office/drawing/2014/main" id="{B0E1E8F3-B1C1-4D23-B18E-FA1666692A4E}"/>
+                </a:ext>
+              </a:extLst>
+            </p:cNvPr>
+            <p:cNvSpPr/>
+            <p:nvPr/>
+          </p:nvSpPr>
+          <p:spPr>
+            <a:xfrm>
+              <a:off x="8296382" y="2007682"/>
+              <a:ext cx="481585" cy="458196"/>
+            </a:xfrm>
+            <a:prstGeom prst="rect">
+              <a:avLst/>
+            </a:prstGeom>
+            <a:noFill/>
+            <a:ln>
+              <a:solidFill>
+                <a:schemeClr val="tx1"/>
+              </a:solidFill>
+            </a:ln>
+          </p:spPr>
+          <p:style>
+            <a:lnRef idx="2">
+              <a:schemeClr val="accent1">
+                <a:shade val="50000"/>
+              </a:schemeClr>
+            </a:lnRef>
+            <a:fillRef idx="1">
+              <a:schemeClr val="accent1"/>
+            </a:fillRef>
+            <a:effectRef idx="0">
+              <a:schemeClr val="accent1"/>
+            </a:effectRef>
+            <a:fontRef idx="minor">
+              <a:schemeClr val="lt1"/>
+            </a:fontRef>
+          </p:style>
+          <p:txBody>
+            <a:bodyPr rtlCol="0" anchor="ctr"/>
+            <a:lstStyle/>
+            <a:p>
+              <a:pPr algn="ctr"/>
+              <a:r>
+                <a:rPr lang="en-GB" dirty="0">
+                  <a:solidFill>
+                    <a:schemeClr val="tx1"/>
+                  </a:solidFill>
+                </a:rPr>
+                <a:t>Y3</a:t>
+              </a:r>
+            </a:p>
+          </p:txBody>
+        </p:sp>
+        <p:sp>
+          <p:nvSpPr>
+            <p:cNvPr id="24" name="Arc 23">
+              <a:extLst>
+                <a:ext uri="{FF2B5EF4-FFF2-40B4-BE49-F238E27FC236}">
+                  <a16:creationId xmlns:a16="http://schemas.microsoft.com/office/drawing/2014/main" id="{9DC78571-EF23-4887-A497-CB5D35DBC459}"/>
+                </a:ext>
+              </a:extLst>
+            </p:cNvPr>
+            <p:cNvSpPr/>
+            <p:nvPr/>
+          </p:nvSpPr>
+          <p:spPr>
+            <a:xfrm rot="1003916">
+              <a:off x="8296382" y="2477255"/>
+              <a:ext cx="481585" cy="458196"/>
+            </a:xfrm>
+            <a:prstGeom prst="arc">
+              <a:avLst>
+                <a:gd name="adj1" fmla="val 16200000"/>
+                <a:gd name="adj2" fmla="val 13932934"/>
+              </a:avLst>
+            </a:prstGeom>
+            <a:noFill/>
+            <a:ln w="19050">
+              <a:solidFill>
+                <a:schemeClr val="tx1"/>
+              </a:solidFill>
+              <a:headEnd type="triangle" w="lg" len="lg"/>
+              <a:tailEnd type="triangle" w="lg" len="lg"/>
+            </a:ln>
+          </p:spPr>
+          <p:style>
+            <a:lnRef idx="1">
+              <a:schemeClr val="accent1"/>
+            </a:lnRef>
+            <a:fillRef idx="0">
+              <a:schemeClr val="accent1"/>
+            </a:fillRef>
+            <a:effectRef idx="0">
+              <a:schemeClr val="accent1"/>
+            </a:effectRef>
+            <a:fontRef idx="minor">
+              <a:schemeClr val="tx1"/>
+            </a:fontRef>
+          </p:style>
+          <p:txBody>
+            <a:bodyPr rtlCol="0" anchor="ctr"/>
+            <a:lstStyle/>
+            <a:p>
+              <a:pPr algn="ctr"/>
+              <a:endParaRPr lang="en-GB" sz="3200"/>
+            </a:p>
+          </p:txBody>
+        </p:sp>
+        <p:sp>
+          <p:nvSpPr>
+            <p:cNvPr id="25" name="TextBox 24">
+              <a:extLst>
+                <a:ext uri="{FF2B5EF4-FFF2-40B4-BE49-F238E27FC236}">
+                  <a16:creationId xmlns:a16="http://schemas.microsoft.com/office/drawing/2014/main" id="{7AE91794-1377-43E5-9E9A-9FC5676FB702}"/>
+                </a:ext>
+              </a:extLst>
+            </p:cNvPr>
+            <p:cNvSpPr txBox="1"/>
+            <p:nvPr/>
+          </p:nvSpPr>
+          <p:spPr>
+            <a:xfrm>
+              <a:off x="6335401" y="2885545"/>
+              <a:ext cx="481585" cy="369332"/>
+            </a:xfrm>
+            <a:prstGeom prst="rect">
+              <a:avLst/>
+            </a:prstGeom>
+            <a:noFill/>
+          </p:spPr>
+          <p:txBody>
+            <a:bodyPr wrap="square" rtlCol="0">
+              <a:spAutoFit/>
+            </a:bodyPr>
+            <a:lstStyle/>
+            <a:p>
+              <a:r>
+                <a:rPr lang="en-GB" dirty="0"/>
+                <a:t>u</a:t>
+              </a:r>
+              <a:r>
+                <a:rPr lang="en-GB" baseline="-25000" dirty="0"/>
+                <a:t>y1</a:t>
+              </a:r>
+              <a:endParaRPr lang="en-GB" dirty="0"/>
+            </a:p>
+          </p:txBody>
+        </p:sp>
+        <p:sp>
+          <p:nvSpPr>
+            <p:cNvPr id="26" name="TextBox 25">
+              <a:extLst>
+                <a:ext uri="{FF2B5EF4-FFF2-40B4-BE49-F238E27FC236}">
+                  <a16:creationId xmlns:a16="http://schemas.microsoft.com/office/drawing/2014/main" id="{E94EC67A-2BCD-48A2-8713-333D407DEFDC}"/>
+                </a:ext>
+              </a:extLst>
+            </p:cNvPr>
+            <p:cNvSpPr txBox="1"/>
+            <p:nvPr/>
+          </p:nvSpPr>
+          <p:spPr>
+            <a:xfrm>
+              <a:off x="7398133" y="2880628"/>
+              <a:ext cx="481585" cy="369332"/>
+            </a:xfrm>
+            <a:prstGeom prst="rect">
+              <a:avLst/>
+            </a:prstGeom>
+            <a:noFill/>
+          </p:spPr>
+          <p:txBody>
+            <a:bodyPr wrap="square" rtlCol="0">
+              <a:spAutoFit/>
+            </a:bodyPr>
+            <a:lstStyle/>
+            <a:p>
+              <a:r>
+                <a:rPr lang="en-GB" dirty="0"/>
+                <a:t>u</a:t>
+              </a:r>
+              <a:r>
+                <a:rPr lang="en-GB" baseline="-25000" dirty="0"/>
+                <a:t>y2</a:t>
+              </a:r>
+              <a:endParaRPr lang="en-GB" dirty="0"/>
+            </a:p>
+          </p:txBody>
+        </p:sp>
+        <p:sp>
+          <p:nvSpPr>
+            <p:cNvPr id="27" name="TextBox 26">
+              <a:extLst>
+                <a:ext uri="{FF2B5EF4-FFF2-40B4-BE49-F238E27FC236}">
+                  <a16:creationId xmlns:a16="http://schemas.microsoft.com/office/drawing/2014/main" id="{64CAAE43-F520-4810-B312-89744B1219A7}"/>
+                </a:ext>
+              </a:extLst>
+            </p:cNvPr>
+            <p:cNvSpPr txBox="1"/>
+            <p:nvPr/>
+          </p:nvSpPr>
+          <p:spPr>
+            <a:xfrm>
+              <a:off x="8385876" y="2877695"/>
+              <a:ext cx="481585" cy="369332"/>
+            </a:xfrm>
+            <a:prstGeom prst="rect">
+              <a:avLst/>
+            </a:prstGeom>
+            <a:noFill/>
+          </p:spPr>
+          <p:txBody>
+            <a:bodyPr wrap="square" rtlCol="0">
+              <a:spAutoFit/>
+            </a:bodyPr>
+            <a:lstStyle/>
+            <a:p>
+              <a:r>
+                <a:rPr lang="en-GB" dirty="0"/>
+                <a:t>u</a:t>
+              </a:r>
+              <a:r>
+                <a:rPr lang="en-GB" baseline="-25000" dirty="0"/>
+                <a:t>y3</a:t>
+              </a:r>
+              <a:endParaRPr lang="en-GB" dirty="0"/>
+            </a:p>
+          </p:txBody>
+        </p:sp>
+        <p:sp>
+          <p:nvSpPr>
+            <p:cNvPr id="28" name="Rectangle 27">
+              <a:extLst>
+                <a:ext uri="{FF2B5EF4-FFF2-40B4-BE49-F238E27FC236}">
+                  <a16:creationId xmlns:a16="http://schemas.microsoft.com/office/drawing/2014/main" id="{1E3ADDAC-9E0F-4B8E-BF2A-02F75DC53271}"/>
+                </a:ext>
+              </a:extLst>
+            </p:cNvPr>
+            <p:cNvSpPr/>
+            <p:nvPr/>
+          </p:nvSpPr>
+          <p:spPr>
+            <a:xfrm>
+              <a:off x="9284126" y="2007682"/>
+              <a:ext cx="481585" cy="458196"/>
+            </a:xfrm>
+            <a:prstGeom prst="rect">
+              <a:avLst/>
+            </a:prstGeom>
+            <a:noFill/>
+            <a:ln>
+              <a:solidFill>
+                <a:schemeClr val="tx1"/>
+              </a:solidFill>
+            </a:ln>
+          </p:spPr>
+          <p:style>
+            <a:lnRef idx="2">
+              <a:schemeClr val="accent1">
+                <a:shade val="50000"/>
+              </a:schemeClr>
+            </a:lnRef>
+            <a:fillRef idx="1">
+              <a:schemeClr val="accent1"/>
+            </a:fillRef>
+            <a:effectRef idx="0">
+              <a:schemeClr val="accent1"/>
+            </a:effectRef>
+            <a:fontRef idx="minor">
+              <a:schemeClr val="lt1"/>
+            </a:fontRef>
+          </p:style>
+          <p:txBody>
+            <a:bodyPr rtlCol="0" anchor="ctr"/>
+            <a:lstStyle/>
+            <a:p>
+              <a:pPr algn="ctr"/>
+              <a:r>
+                <a:rPr lang="en-GB" dirty="0">
+                  <a:solidFill>
+                    <a:schemeClr val="tx1"/>
+                  </a:solidFill>
+                </a:rPr>
+                <a:t>Y4</a:t>
+              </a:r>
+            </a:p>
+          </p:txBody>
+        </p:sp>
+        <p:sp>
+          <p:nvSpPr>
+            <p:cNvPr id="29" name="Arc 28">
+              <a:extLst>
+                <a:ext uri="{FF2B5EF4-FFF2-40B4-BE49-F238E27FC236}">
+                  <a16:creationId xmlns:a16="http://schemas.microsoft.com/office/drawing/2014/main" id="{0BD5C0E5-A669-4029-A74C-5E037E4CAAC3}"/>
+                </a:ext>
+              </a:extLst>
+            </p:cNvPr>
+            <p:cNvSpPr/>
+            <p:nvPr/>
+          </p:nvSpPr>
+          <p:spPr>
+            <a:xfrm rot="1003916">
+              <a:off x="9284125" y="2477255"/>
+              <a:ext cx="481585" cy="458196"/>
+            </a:xfrm>
+            <a:prstGeom prst="arc">
+              <a:avLst>
+                <a:gd name="adj1" fmla="val 16200000"/>
+                <a:gd name="adj2" fmla="val 13932934"/>
+              </a:avLst>
+            </a:prstGeom>
+            <a:noFill/>
+            <a:ln w="19050">
+              <a:solidFill>
+                <a:schemeClr val="tx1"/>
+              </a:solidFill>
+              <a:headEnd type="triangle" w="lg" len="lg"/>
+              <a:tailEnd type="triangle" w="lg" len="lg"/>
+            </a:ln>
+          </p:spPr>
+          <p:style>
+            <a:lnRef idx="1">
+              <a:schemeClr val="accent1"/>
+            </a:lnRef>
+            <a:fillRef idx="0">
+              <a:schemeClr val="accent1"/>
+            </a:fillRef>
+            <a:effectRef idx="0">
+              <a:schemeClr val="accent1"/>
+            </a:effectRef>
+            <a:fontRef idx="minor">
+              <a:schemeClr val="tx1"/>
+            </a:fontRef>
+          </p:style>
+          <p:txBody>
+            <a:bodyPr rtlCol="0" anchor="ctr"/>
+            <a:lstStyle/>
+            <a:p>
+              <a:pPr algn="ctr"/>
+              <a:endParaRPr lang="en-GB" sz="3200"/>
+            </a:p>
+          </p:txBody>
+        </p:sp>
+        <p:sp>
+          <p:nvSpPr>
+            <p:cNvPr id="30" name="TextBox 29">
+              <a:extLst>
+                <a:ext uri="{FF2B5EF4-FFF2-40B4-BE49-F238E27FC236}">
+                  <a16:creationId xmlns:a16="http://schemas.microsoft.com/office/drawing/2014/main" id="{346AFEDF-6D24-406C-B06A-52C170778FD7}"/>
+                </a:ext>
+              </a:extLst>
+            </p:cNvPr>
+            <p:cNvSpPr txBox="1"/>
+            <p:nvPr/>
+          </p:nvSpPr>
+          <p:spPr>
+            <a:xfrm>
+              <a:off x="9373619" y="2877695"/>
+              <a:ext cx="481585" cy="369332"/>
+            </a:xfrm>
+            <a:prstGeom prst="rect">
+              <a:avLst/>
+            </a:prstGeom>
+            <a:noFill/>
+          </p:spPr>
+          <p:txBody>
+            <a:bodyPr wrap="square" rtlCol="0">
+              <a:spAutoFit/>
+            </a:bodyPr>
+            <a:lstStyle/>
+            <a:p>
+              <a:r>
+                <a:rPr lang="en-GB" dirty="0"/>
+                <a:t>u</a:t>
+              </a:r>
+              <a:r>
+                <a:rPr lang="en-GB" baseline="-25000" dirty="0"/>
+                <a:t>y4</a:t>
+              </a:r>
+              <a:endParaRPr lang="en-GB" dirty="0"/>
+            </a:p>
+          </p:txBody>
+        </p:sp>
+        <p:cxnSp>
+          <p:nvCxnSpPr>
+            <p:cNvPr id="31" name="Connector: Curved 30">
+              <a:extLst>
+                <a:ext uri="{FF2B5EF4-FFF2-40B4-BE49-F238E27FC236}">
+                  <a16:creationId xmlns:a16="http://schemas.microsoft.com/office/drawing/2014/main" id="{58402533-A30C-4CC8-9656-E05CA4DB4BFE}"/>
+                </a:ext>
+              </a:extLst>
+            </p:cNvPr>
+            <p:cNvCxnSpPr>
+              <a:cxnSpLocks/>
+              <a:stCxn id="20" idx="0"/>
+              <a:endCxn id="21" idx="0"/>
+            </p:cNvCxnSpPr>
+            <p:nvPr/>
+          </p:nvCxnSpPr>
+          <p:spPr>
+            <a:xfrm rot="5400000" flipH="1" flipV="1">
+              <a:off x="6998351" y="1499569"/>
+              <a:ext cx="8244" cy="1016226"/>
+            </a:xfrm>
+            <a:prstGeom prst="curvedConnector3">
+              <a:avLst>
+                <a:gd name="adj1" fmla="val 1800000"/>
+              </a:avLst>
+            </a:prstGeom>
+            <a:ln w="19050">
+              <a:solidFill>
+                <a:schemeClr val="tx1"/>
+              </a:solidFill>
+              <a:headEnd type="triangle" w="lg" len="lg"/>
+              <a:tailEnd type="triangle" w="lg" len="lg"/>
+            </a:ln>
+          </p:spPr>
+          <p:style>
+            <a:lnRef idx="1">
+              <a:schemeClr val="accent1"/>
+            </a:lnRef>
+            <a:fillRef idx="0">
+              <a:schemeClr val="accent1"/>
+            </a:fillRef>
+            <a:effectRef idx="0">
+              <a:schemeClr val="accent1"/>
+            </a:effectRef>
+            <a:fontRef idx="minor">
+              <a:schemeClr val="tx1"/>
+            </a:fontRef>
+          </p:style>
+        </p:cxnSp>
+        <p:cxnSp>
+          <p:nvCxnSpPr>
+            <p:cNvPr id="32" name="Connector: Curved 31">
+              <a:extLst>
+                <a:ext uri="{FF2B5EF4-FFF2-40B4-BE49-F238E27FC236}">
+                  <a16:creationId xmlns:a16="http://schemas.microsoft.com/office/drawing/2014/main" id="{BD8322F3-3DA9-4DE5-A11D-50FFA06A2564}"/>
+                </a:ext>
+              </a:extLst>
+            </p:cNvPr>
+            <p:cNvCxnSpPr>
+              <a:stCxn id="20" idx="0"/>
+              <a:endCxn id="23" idx="0"/>
+            </p:cNvCxnSpPr>
+            <p:nvPr/>
+          </p:nvCxnSpPr>
+          <p:spPr>
+            <a:xfrm rot="5400000" flipH="1" flipV="1">
+              <a:off x="7513764" y="984157"/>
+              <a:ext cx="8244" cy="2047051"/>
+            </a:xfrm>
+            <a:prstGeom prst="curvedConnector3">
+              <a:avLst>
+                <a:gd name="adj1" fmla="val 5210528"/>
+              </a:avLst>
+            </a:prstGeom>
+            <a:ln w="19050">
+              <a:solidFill>
+                <a:schemeClr val="tx1"/>
+              </a:solidFill>
+              <a:headEnd type="triangle" w="lg" len="lg"/>
+              <a:tailEnd type="triangle" w="lg" len="lg"/>
+            </a:ln>
+          </p:spPr>
+          <p:style>
+            <a:lnRef idx="1">
+              <a:schemeClr val="accent1"/>
+            </a:lnRef>
+            <a:fillRef idx="0">
+              <a:schemeClr val="accent1"/>
+            </a:fillRef>
+            <a:effectRef idx="0">
+              <a:schemeClr val="accent1"/>
+            </a:effectRef>
+            <a:fontRef idx="minor">
+              <a:schemeClr val="tx1"/>
+            </a:fontRef>
+          </p:style>
+        </p:cxnSp>
+        <p:cxnSp>
+          <p:nvCxnSpPr>
+            <p:cNvPr id="33" name="Connector: Curved 32">
+              <a:extLst>
+                <a:ext uri="{FF2B5EF4-FFF2-40B4-BE49-F238E27FC236}">
+                  <a16:creationId xmlns:a16="http://schemas.microsoft.com/office/drawing/2014/main" id="{445CD7DE-D7CE-4228-91C5-C8D9F00019A1}"/>
+                </a:ext>
+              </a:extLst>
+            </p:cNvPr>
+            <p:cNvCxnSpPr>
+              <a:stCxn id="20" idx="0"/>
+              <a:endCxn id="28" idx="0"/>
+            </p:cNvCxnSpPr>
+            <p:nvPr/>
+          </p:nvCxnSpPr>
+          <p:spPr>
+            <a:xfrm rot="5400000" flipH="1" flipV="1">
+              <a:off x="8007635" y="490285"/>
+              <a:ext cx="8244" cy="3034795"/>
+            </a:xfrm>
+            <a:prstGeom prst="curvedConnector3">
+              <a:avLst>
+                <a:gd name="adj1" fmla="val 10642102"/>
+              </a:avLst>
+            </a:prstGeom>
+            <a:ln w="19050">
+              <a:solidFill>
+                <a:schemeClr val="tx1"/>
+              </a:solidFill>
+              <a:headEnd type="triangle" w="lg" len="lg"/>
+              <a:tailEnd type="triangle" w="lg" len="lg"/>
+            </a:ln>
+          </p:spPr>
+          <p:style>
+            <a:lnRef idx="1">
+              <a:schemeClr val="accent1"/>
+            </a:lnRef>
+            <a:fillRef idx="0">
+              <a:schemeClr val="accent1"/>
+            </a:fillRef>
+            <a:effectRef idx="0">
+              <a:schemeClr val="accent1"/>
+            </a:effectRef>
+            <a:fontRef idx="minor">
+              <a:schemeClr val="tx1"/>
+            </a:fontRef>
+          </p:style>
+        </p:cxnSp>
+        <p:cxnSp>
+          <p:nvCxnSpPr>
+            <p:cNvPr id="34" name="Connector: Curved 33">
+              <a:extLst>
+                <a:ext uri="{FF2B5EF4-FFF2-40B4-BE49-F238E27FC236}">
+                  <a16:creationId xmlns:a16="http://schemas.microsoft.com/office/drawing/2014/main" id="{FB36DFC6-E0F6-4427-B054-0A2A769D05CC}"/>
+                </a:ext>
+              </a:extLst>
+            </p:cNvPr>
+            <p:cNvCxnSpPr>
+              <a:stCxn id="21" idx="0"/>
+              <a:endCxn id="23" idx="0"/>
+            </p:cNvCxnSpPr>
+            <p:nvPr/>
+          </p:nvCxnSpPr>
+          <p:spPr>
+            <a:xfrm rot="5400000" flipH="1" flipV="1">
+              <a:off x="8021877" y="1492270"/>
+              <a:ext cx="8244" cy="1030825"/>
+            </a:xfrm>
+            <a:prstGeom prst="curvedConnector3">
+              <a:avLst>
+                <a:gd name="adj1" fmla="val 1800000"/>
+              </a:avLst>
+            </a:prstGeom>
+            <a:ln w="19050">
+              <a:solidFill>
+                <a:schemeClr val="tx1"/>
+              </a:solidFill>
+              <a:headEnd type="triangle" w="lg" len="lg"/>
+              <a:tailEnd type="triangle" w="lg" len="lg"/>
+            </a:ln>
+          </p:spPr>
+          <p:style>
+            <a:lnRef idx="1">
+              <a:schemeClr val="accent1"/>
+            </a:lnRef>
+            <a:fillRef idx="0">
+              <a:schemeClr val="accent1"/>
+            </a:fillRef>
+            <a:effectRef idx="0">
+              <a:schemeClr val="accent1"/>
+            </a:effectRef>
+            <a:fontRef idx="minor">
+              <a:schemeClr val="tx1"/>
+            </a:fontRef>
+          </p:style>
+        </p:cxnSp>
+        <p:cxnSp>
+          <p:nvCxnSpPr>
+            <p:cNvPr id="35" name="Connector: Curved 34">
+              <a:extLst>
+                <a:ext uri="{FF2B5EF4-FFF2-40B4-BE49-F238E27FC236}">
+                  <a16:creationId xmlns:a16="http://schemas.microsoft.com/office/drawing/2014/main" id="{38D0B890-A4F3-4718-A91A-C7A94F95A4C0}"/>
+                </a:ext>
+              </a:extLst>
+            </p:cNvPr>
+            <p:cNvCxnSpPr>
+              <a:stCxn id="23" idx="0"/>
+              <a:endCxn id="28" idx="0"/>
+            </p:cNvCxnSpPr>
+            <p:nvPr/>
+          </p:nvCxnSpPr>
+          <p:spPr>
+            <a:xfrm rot="5400000" flipH="1" flipV="1">
+              <a:off x="9031161" y="1513811"/>
+              <a:ext cx="8244" cy="987743"/>
+            </a:xfrm>
+            <a:prstGeom prst="curvedConnector3">
+              <a:avLst>
+                <a:gd name="adj1" fmla="val 1800000"/>
+              </a:avLst>
+            </a:prstGeom>
+            <a:ln w="19050">
+              <a:solidFill>
+                <a:schemeClr val="tx1"/>
+              </a:solidFill>
+              <a:headEnd type="triangle" w="lg" len="lg"/>
+              <a:tailEnd type="triangle" w="lg" len="lg"/>
+            </a:ln>
+          </p:spPr>
+          <p:style>
+            <a:lnRef idx="1">
+              <a:schemeClr val="accent1"/>
+            </a:lnRef>
+            <a:fillRef idx="0">
+              <a:schemeClr val="accent1"/>
+            </a:fillRef>
+            <a:effectRef idx="0">
+              <a:schemeClr val="accent1"/>
+            </a:effectRef>
+            <a:fontRef idx="minor">
+              <a:schemeClr val="tx1"/>
+            </a:fontRef>
+          </p:style>
+        </p:cxnSp>
+        <p:cxnSp>
+          <p:nvCxnSpPr>
+            <p:cNvPr id="36" name="Connector: Curved 35">
+              <a:extLst>
+                <a:ext uri="{FF2B5EF4-FFF2-40B4-BE49-F238E27FC236}">
+                  <a16:creationId xmlns:a16="http://schemas.microsoft.com/office/drawing/2014/main" id="{A84BA7F0-BA4A-46E1-9905-624F364A8FF4}"/>
+                </a:ext>
+              </a:extLst>
+            </p:cNvPr>
+            <p:cNvCxnSpPr>
+              <a:stCxn id="21" idx="0"/>
+              <a:endCxn id="28" idx="0"/>
+            </p:cNvCxnSpPr>
+            <p:nvPr/>
+          </p:nvCxnSpPr>
+          <p:spPr>
+            <a:xfrm rot="5400000" flipH="1" flipV="1">
+              <a:off x="8515748" y="998398"/>
+              <a:ext cx="8244" cy="2018568"/>
+            </a:xfrm>
+            <a:prstGeom prst="curvedConnector3">
+              <a:avLst>
+                <a:gd name="adj1" fmla="val 5210528"/>
+              </a:avLst>
+            </a:prstGeom>
+            <a:ln w="19050">
+              <a:solidFill>
+                <a:schemeClr val="tx1"/>
+              </a:solidFill>
+              <a:headEnd type="triangle" w="lg" len="lg"/>
+              <a:tailEnd type="triangle" w="lg" len="lg"/>
+            </a:ln>
+          </p:spPr>
+          <p:style>
+            <a:lnRef idx="1">
+              <a:schemeClr val="accent1"/>
+            </a:lnRef>
+            <a:fillRef idx="0">
+              <a:schemeClr val="accent1"/>
+            </a:fillRef>
+            <a:effectRef idx="0">
+              <a:schemeClr val="accent1"/>
+            </a:effectRef>
+            <a:fontRef idx="minor">
+              <a:schemeClr val="tx1"/>
+            </a:fontRef>
+          </p:style>
+        </p:cxnSp>
+        <p:sp>
+          <p:nvSpPr>
+            <p:cNvPr id="37" name="TextBox 36">
+              <a:extLst>
+                <a:ext uri="{FF2B5EF4-FFF2-40B4-BE49-F238E27FC236}">
+                  <a16:creationId xmlns:a16="http://schemas.microsoft.com/office/drawing/2014/main" id="{C37BF966-385C-430B-BE4F-501D4D02EAEC}"/>
+                </a:ext>
+              </a:extLst>
+            </p:cNvPr>
+            <p:cNvSpPr txBox="1"/>
+            <p:nvPr/>
+          </p:nvSpPr>
+          <p:spPr>
+            <a:xfrm>
+              <a:off x="6816986" y="1025651"/>
+              <a:ext cx="2433408" cy="2585323"/>
+            </a:xfrm>
+            <a:prstGeom prst="rect">
+              <a:avLst/>
+            </a:prstGeom>
+            <a:noFill/>
+          </p:spPr>
+          <p:txBody>
+            <a:bodyPr wrap="square" rtlCol="0">
+              <a:spAutoFit/>
+            </a:bodyPr>
+            <a:lstStyle/>
+            <a:p>
+              <a:pPr algn="ctr"/>
+              <a:r>
+                <a:rPr lang="en-GB" dirty="0"/>
+                <a:t>	a	</a:t>
+              </a:r>
+            </a:p>
+            <a:p>
+              <a:pPr algn="ctr"/>
+              <a:r>
+                <a:rPr lang="en-GB" dirty="0"/>
+                <a:t>b                      c</a:t>
+              </a:r>
+            </a:p>
+            <a:p>
+              <a:pPr algn="ctr"/>
+              <a:r>
+                <a:rPr lang="en-GB" dirty="0"/>
+                <a:t>d                e                 f</a:t>
+              </a:r>
+            </a:p>
+            <a:p>
+              <a:pPr algn="ctr"/>
+              <a:endParaRPr lang="en-GB" dirty="0"/>
+            </a:p>
+            <a:p>
+              <a:pPr algn="ctr"/>
+              <a:endParaRPr lang="en-GB" dirty="0"/>
+            </a:p>
+            <a:p>
+              <a:pPr algn="ctr"/>
+              <a:endParaRPr lang="en-GB" dirty="0"/>
+            </a:p>
+            <a:p>
+              <a:pPr algn="ctr"/>
+              <a:endParaRPr lang="en-GB" dirty="0"/>
+            </a:p>
+            <a:p>
+              <a:pPr algn="ctr"/>
+              <a:endParaRPr lang="en-GB" dirty="0"/>
+            </a:p>
+            <a:p>
+              <a:pPr algn="ctr"/>
+              <a:endParaRPr lang="en-GB" dirty="0"/>
+            </a:p>
+          </p:txBody>
+        </p:sp>
+      </p:grpSp>
+      <p:sp>
+        <p:nvSpPr>
+          <p:cNvPr id="43" name="TextBox 42">
+            <a:extLst>
+              <a:ext uri="{FF2B5EF4-FFF2-40B4-BE49-F238E27FC236}">
+                <a16:creationId xmlns:a16="http://schemas.microsoft.com/office/drawing/2014/main" id="{F81B9166-2C33-4037-90D1-C3401F921BB0}"/>
+              </a:ext>
+            </a:extLst>
+          </p:cNvPr>
+          <p:cNvSpPr txBox="1"/>
+          <p:nvPr/>
+        </p:nvSpPr>
+        <p:spPr>
+          <a:xfrm>
+            <a:off x="270105" y="346454"/>
+            <a:ext cx="4096838" cy="954107"/>
+          </a:xfrm>
+          <a:prstGeom prst="rect">
+            <a:avLst/>
+          </a:prstGeom>
+          <a:noFill/>
+        </p:spPr>
+        <p:txBody>
+          <a:bodyPr wrap="square" rtlCol="0">
+            <a:spAutoFit/>
+          </a:bodyPr>
+          <a:lstStyle/>
+          <a:p>
+            <a:r>
+              <a:rPr lang="en-GB" sz="2800" dirty="0"/>
+              <a:t>Model 1 	 				</a:t>
+            </a:r>
+          </a:p>
+        </p:txBody>
+      </p:sp>
+      <p:sp>
+        <p:nvSpPr>
+          <p:cNvPr id="44" name="TextBox 43">
+            <a:extLst>
+              <a:ext uri="{FF2B5EF4-FFF2-40B4-BE49-F238E27FC236}">
+                <a16:creationId xmlns:a16="http://schemas.microsoft.com/office/drawing/2014/main" id="{7C33B35E-F319-4A0A-9A84-EEE48591FE37}"/>
+              </a:ext>
+            </a:extLst>
+          </p:cNvPr>
+          <p:cNvSpPr txBox="1"/>
+          <p:nvPr/>
+        </p:nvSpPr>
+        <p:spPr>
+          <a:xfrm>
+            <a:off x="6257876" y="331964"/>
+            <a:ext cx="4096838" cy="954107"/>
+          </a:xfrm>
+          <a:prstGeom prst="rect">
+            <a:avLst/>
+          </a:prstGeom>
+          <a:noFill/>
+        </p:spPr>
+        <p:txBody>
+          <a:bodyPr wrap="square" rtlCol="0">
+            <a:spAutoFit/>
+          </a:bodyPr>
+          <a:lstStyle/>
+          <a:p>
+            <a:r>
+              <a:rPr lang="en-GB" sz="2800" dirty="0"/>
+              <a:t>Model 2 	 				</a:t>
+            </a:r>
+          </a:p>
+        </p:txBody>
+      </p:sp>
+      <p:graphicFrame>
+        <p:nvGraphicFramePr>
+          <p:cNvPr id="38" name="Table 106">
+            <a:extLst>
+              <a:ext uri="{FF2B5EF4-FFF2-40B4-BE49-F238E27FC236}">
+                <a16:creationId xmlns:a16="http://schemas.microsoft.com/office/drawing/2014/main" id="{DD60890A-0D59-4F4A-B095-ADA748EED923}"/>
+              </a:ext>
+            </a:extLst>
+          </p:cNvPr>
+          <p:cNvGraphicFramePr>
+            <a:graphicFrameLocks noGrp="1"/>
+          </p:cNvGraphicFramePr>
+          <p:nvPr>
+            <p:extLst>
+              <p:ext uri="{D42A27DB-BD31-4B8C-83A1-F6EECF244321}">
+                <p14:modId xmlns:p14="http://schemas.microsoft.com/office/powerpoint/2010/main" val="3780807656"/>
+              </p:ext>
+            </p:extLst>
+          </p:nvPr>
+        </p:nvGraphicFramePr>
+        <p:xfrm>
+          <a:off x="1418077" y="3961277"/>
+          <a:ext cx="3220125" cy="2261725"/>
+        </p:xfrm>
+        <a:graphic>
+          <a:graphicData uri="http://schemas.openxmlformats.org/drawingml/2006/table">
+            <a:tbl>
+              <a:tblPr firstRow="1" bandRow="1">
+                <a:tableStyleId>{5C22544A-7EE6-4342-B048-85BDC9FD1C3A}</a:tableStyleId>
+              </a:tblPr>
+              <a:tblGrid>
+                <a:gridCol w="644025">
+                  <a:extLst>
+                    <a:ext uri="{9D8B030D-6E8A-4147-A177-3AD203B41FA5}">
+                      <a16:colId xmlns:a16="http://schemas.microsoft.com/office/drawing/2014/main" val="1010010654"/>
+                    </a:ext>
+                  </a:extLst>
+                </a:gridCol>
+                <a:gridCol w="644025">
+                  <a:extLst>
+                    <a:ext uri="{9D8B030D-6E8A-4147-A177-3AD203B41FA5}">
+                      <a16:colId xmlns:a16="http://schemas.microsoft.com/office/drawing/2014/main" val="2729503702"/>
+                    </a:ext>
+                  </a:extLst>
+                </a:gridCol>
+                <a:gridCol w="644025">
+                  <a:extLst>
+                    <a:ext uri="{9D8B030D-6E8A-4147-A177-3AD203B41FA5}">
+                      <a16:colId xmlns:a16="http://schemas.microsoft.com/office/drawing/2014/main" val="2302851017"/>
+                    </a:ext>
+                  </a:extLst>
+                </a:gridCol>
+                <a:gridCol w="644025">
+                  <a:extLst>
+                    <a:ext uri="{9D8B030D-6E8A-4147-A177-3AD203B41FA5}">
+                      <a16:colId xmlns:a16="http://schemas.microsoft.com/office/drawing/2014/main" val="3433354927"/>
+                    </a:ext>
+                  </a:extLst>
+                </a:gridCol>
+                <a:gridCol w="644025">
+                  <a:extLst>
+                    <a:ext uri="{9D8B030D-6E8A-4147-A177-3AD203B41FA5}">
+                      <a16:colId xmlns:a16="http://schemas.microsoft.com/office/drawing/2014/main" val="2334715431"/>
+                    </a:ext>
+                  </a:extLst>
+                </a:gridCol>
+              </a:tblGrid>
+              <a:tr h="452345">
+                <a:tc>
+                  <a:txBody>
+                    <a:bodyPr/>
+                    <a:lstStyle/>
+                    <a:p>
+                      <a:pPr algn="ctr"/>
+                      <a:endParaRPr lang="en-GB" sz="1800" b="1" dirty="0">
+                        <a:solidFill>
+                          <a:schemeClr val="tx1"/>
+                        </a:solidFill>
+                      </a:endParaRPr>
+                    </a:p>
+                  </a:txBody>
+                  <a:tcPr anchor="ctr">
+                    <a:lnL w="12700" cap="flat" cmpd="sng" algn="ctr">
+                      <a:solidFill>
+                        <a:schemeClr val="tx1"/>
+                      </a:solidFill>
+                      <a:prstDash val="solid"/>
+                      <a:round/>
+                      <a:headEnd type="none" w="med" len="med"/>
+                      <a:tailEnd type="none" w="med" len="med"/>
+                    </a:lnL>
+                    <a:lnR w="12700" cap="flat" cmpd="sng" algn="ctr">
+                      <a:solidFill>
+                        <a:schemeClr val="tx1"/>
+                      </a:solidFill>
+                      <a:prstDash val="solid"/>
+                      <a:round/>
+                      <a:headEnd type="none" w="med" len="med"/>
+                      <a:tailEnd type="none" w="med" len="med"/>
+                    </a:lnR>
+                    <a:lnT w="12700" cap="flat" cmpd="sng" algn="ctr">
+                      <a:solidFill>
+                        <a:schemeClr val="tx1"/>
+                      </a:solidFill>
+                      <a:prstDash val="solid"/>
+                      <a:round/>
+                      <a:headEnd type="none" w="med" len="med"/>
+                      <a:tailEnd type="none" w="med" len="med"/>
+                    </a:lnT>
+                    <a:lnB w="12700" cap="flat" cmpd="sng" algn="ctr">
+                      <a:solidFill>
+                        <a:schemeClr val="tx1"/>
+                      </a:solidFill>
+                      <a:prstDash val="solid"/>
+                      <a:round/>
+                      <a:headEnd type="none" w="med" len="med"/>
+                      <a:tailEnd type="none" w="med" len="med"/>
+                    </a:lnB>
+                    <a:lnTlToBr w="12700" cmpd="sng">
+                      <a:noFill/>
+                      <a:prstDash val="solid"/>
+                    </a:lnTlToBr>
+                    <a:lnBlToTr w="12700" cmpd="sng">
+                      <a:noFill/>
+                      <a:prstDash val="solid"/>
+                    </a:lnBlToTr>
+                    <a:solidFill>
+                      <a:schemeClr val="accent6">
+                        <a:lumMod val="40000"/>
+                        <a:lumOff val="60000"/>
+                      </a:schemeClr>
+                    </a:solidFill>
+                  </a:tcPr>
+                </a:tc>
+                <a:tc>
+                  <a:txBody>
+                    <a:bodyPr/>
+                    <a:lstStyle/>
+                    <a:p>
+                      <a:pPr algn="ctr"/>
+                      <a:r>
+                        <a:rPr lang="en-GB" sz="1800" b="1" dirty="0">
+                          <a:solidFill>
+                            <a:schemeClr val="tx1"/>
+                          </a:solidFill>
+                        </a:rPr>
+                        <a:t>Y1</a:t>
+                      </a:r>
+                    </a:p>
+                  </a:txBody>
+                  <a:tcPr anchor="ctr">
+                    <a:lnL w="12700" cap="flat" cmpd="sng" algn="ctr">
+                      <a:solidFill>
+                        <a:schemeClr val="tx1"/>
+                      </a:solidFill>
+                      <a:prstDash val="solid"/>
+                      <a:round/>
+                      <a:headEnd type="none" w="med" len="med"/>
+                      <a:tailEnd type="none" w="med" len="med"/>
+                    </a:lnL>
+                    <a:lnR w="12700" cap="flat" cmpd="sng" algn="ctr">
+                      <a:solidFill>
+                        <a:schemeClr val="tx1"/>
+                      </a:solidFill>
+                      <a:prstDash val="solid"/>
+                      <a:round/>
+                      <a:headEnd type="none" w="med" len="med"/>
+                      <a:tailEnd type="none" w="med" len="med"/>
+                    </a:lnR>
+                    <a:lnT w="12700" cap="flat" cmpd="sng" algn="ctr">
+                      <a:solidFill>
+                        <a:schemeClr val="tx1"/>
+                      </a:solidFill>
+                      <a:prstDash val="solid"/>
+                      <a:round/>
+                      <a:headEnd type="none" w="med" len="med"/>
+                      <a:tailEnd type="none" w="med" len="med"/>
+                    </a:lnT>
+                    <a:lnB w="12700" cap="flat" cmpd="sng" algn="ctr">
+                      <a:solidFill>
+                        <a:schemeClr val="tx1"/>
+                      </a:solidFill>
+                      <a:prstDash val="solid"/>
+                      <a:round/>
+                      <a:headEnd type="none" w="med" len="med"/>
+                      <a:tailEnd type="none" w="med" len="med"/>
+                    </a:lnB>
+                    <a:lnTlToBr w="12700" cmpd="sng">
+                      <a:noFill/>
+                      <a:prstDash val="solid"/>
+                    </a:lnTlToBr>
+                    <a:lnBlToTr w="12700" cmpd="sng">
+                      <a:noFill/>
+                      <a:prstDash val="solid"/>
+                    </a:lnBlToTr>
+                    <a:solidFill>
+                      <a:schemeClr val="accent6">
+                        <a:lumMod val="40000"/>
+                        <a:lumOff val="60000"/>
+                      </a:schemeClr>
+                    </a:solidFill>
+                  </a:tcPr>
+                </a:tc>
+                <a:tc>
+                  <a:txBody>
+                    <a:bodyPr/>
+                    <a:lstStyle/>
+                    <a:p>
+                      <a:pPr algn="ctr"/>
+                      <a:r>
+                        <a:rPr lang="en-GB" sz="1800" b="1" dirty="0">
+                          <a:solidFill>
+                            <a:schemeClr val="tx1"/>
+                          </a:solidFill>
+                        </a:rPr>
+                        <a:t>Y2</a:t>
+                      </a:r>
+                    </a:p>
+                  </a:txBody>
+                  <a:tcPr anchor="ctr">
+                    <a:lnL w="12700" cap="flat" cmpd="sng" algn="ctr">
+                      <a:solidFill>
+                        <a:schemeClr val="tx1"/>
+                      </a:solidFill>
+                      <a:prstDash val="solid"/>
+                      <a:round/>
+                      <a:headEnd type="none" w="med" len="med"/>
+                      <a:tailEnd type="none" w="med" len="med"/>
+                    </a:lnL>
+                    <a:lnR w="12700" cap="flat" cmpd="sng" algn="ctr">
+                      <a:solidFill>
+                        <a:schemeClr val="tx1"/>
+                      </a:solidFill>
+                      <a:prstDash val="solid"/>
+                      <a:round/>
+                      <a:headEnd type="none" w="med" len="med"/>
+                      <a:tailEnd type="none" w="med" len="med"/>
+                    </a:lnR>
+                    <a:lnT w="12700" cap="flat" cmpd="sng" algn="ctr">
+                      <a:solidFill>
+                        <a:schemeClr val="tx1"/>
+                      </a:solidFill>
+                      <a:prstDash val="solid"/>
+                      <a:round/>
+                      <a:headEnd type="none" w="med" len="med"/>
+                      <a:tailEnd type="none" w="med" len="med"/>
+                    </a:lnT>
+                    <a:lnB w="12700" cap="flat" cmpd="sng" algn="ctr">
+                      <a:solidFill>
+                        <a:schemeClr val="tx1"/>
+                      </a:solidFill>
+                      <a:prstDash val="solid"/>
+                      <a:round/>
+                      <a:headEnd type="none" w="med" len="med"/>
+                      <a:tailEnd type="none" w="med" len="med"/>
+                    </a:lnB>
+                    <a:lnTlToBr w="12700" cmpd="sng">
+                      <a:noFill/>
+                      <a:prstDash val="solid"/>
+                    </a:lnTlToBr>
+                    <a:lnBlToTr w="12700" cmpd="sng">
+                      <a:noFill/>
+                      <a:prstDash val="solid"/>
+                    </a:lnBlToTr>
+                    <a:solidFill>
+                      <a:schemeClr val="accent6">
+                        <a:lumMod val="40000"/>
+                        <a:lumOff val="60000"/>
+                      </a:schemeClr>
+                    </a:solidFill>
+                  </a:tcPr>
+                </a:tc>
+                <a:tc>
+                  <a:txBody>
+                    <a:bodyPr/>
+                    <a:lstStyle/>
+                    <a:p>
+                      <a:pPr algn="ctr"/>
+                      <a:r>
+                        <a:rPr lang="en-GB" sz="1800" b="1" dirty="0">
+                          <a:solidFill>
+                            <a:schemeClr val="tx1"/>
+                          </a:solidFill>
+                        </a:rPr>
+                        <a:t>Y3</a:t>
+                      </a:r>
+                    </a:p>
+                  </a:txBody>
+                  <a:tcPr anchor="ctr">
+                    <a:lnL w="12700" cap="flat" cmpd="sng" algn="ctr">
+                      <a:solidFill>
+                        <a:schemeClr val="tx1"/>
+                      </a:solidFill>
+                      <a:prstDash val="solid"/>
+                      <a:round/>
+                      <a:headEnd type="none" w="med" len="med"/>
+                      <a:tailEnd type="none" w="med" len="med"/>
+                    </a:lnL>
+                    <a:lnR w="12700" cap="flat" cmpd="sng" algn="ctr">
+                      <a:solidFill>
+                        <a:schemeClr val="tx1"/>
+                      </a:solidFill>
+                      <a:prstDash val="solid"/>
+                      <a:round/>
+                      <a:headEnd type="none" w="med" len="med"/>
+                      <a:tailEnd type="none" w="med" len="med"/>
+                    </a:lnR>
+                    <a:lnT w="12700" cap="flat" cmpd="sng" algn="ctr">
+                      <a:solidFill>
+                        <a:schemeClr val="tx1"/>
+                      </a:solidFill>
+                      <a:prstDash val="solid"/>
+                      <a:round/>
+                      <a:headEnd type="none" w="med" len="med"/>
+                      <a:tailEnd type="none" w="med" len="med"/>
+                    </a:lnT>
+                    <a:lnB w="12700" cap="flat" cmpd="sng" algn="ctr">
+                      <a:solidFill>
+                        <a:schemeClr val="tx1"/>
+                      </a:solidFill>
+                      <a:prstDash val="solid"/>
+                      <a:round/>
+                      <a:headEnd type="none" w="med" len="med"/>
+                      <a:tailEnd type="none" w="med" len="med"/>
+                    </a:lnB>
+                    <a:lnTlToBr w="12700" cmpd="sng">
+                      <a:noFill/>
+                      <a:prstDash val="solid"/>
+                    </a:lnTlToBr>
+                    <a:lnBlToTr w="12700" cmpd="sng">
+                      <a:noFill/>
+                      <a:prstDash val="solid"/>
+                    </a:lnBlToTr>
+                    <a:solidFill>
+                      <a:schemeClr val="accent6">
+                        <a:lumMod val="40000"/>
+                        <a:lumOff val="60000"/>
+                      </a:schemeClr>
+                    </a:solidFill>
+                  </a:tcPr>
+                </a:tc>
+                <a:tc>
+                  <a:txBody>
+                    <a:bodyPr/>
+                    <a:lstStyle/>
+                    <a:p>
+                      <a:pPr algn="ctr"/>
+                      <a:r>
+                        <a:rPr lang="en-GB" sz="1800" b="1" dirty="0">
+                          <a:solidFill>
+                            <a:schemeClr val="tx1"/>
+                          </a:solidFill>
+                        </a:rPr>
+                        <a:t>Y4</a:t>
+                      </a:r>
+                    </a:p>
+                  </a:txBody>
+                  <a:tcPr anchor="ctr">
+                    <a:lnL w="12700" cap="flat" cmpd="sng" algn="ctr">
+                      <a:solidFill>
+                        <a:schemeClr val="tx1"/>
+                      </a:solidFill>
+                      <a:prstDash val="solid"/>
+                      <a:round/>
+                      <a:headEnd type="none" w="med" len="med"/>
+                      <a:tailEnd type="none" w="med" len="med"/>
+                    </a:lnL>
+                    <a:lnR w="12700" cap="flat" cmpd="sng" algn="ctr">
+                      <a:solidFill>
+                        <a:schemeClr val="tx1"/>
+                      </a:solidFill>
+                      <a:prstDash val="solid"/>
+                      <a:round/>
+                      <a:headEnd type="none" w="med" len="med"/>
+                      <a:tailEnd type="none" w="med" len="med"/>
+                    </a:lnR>
+                    <a:lnT w="12700" cap="flat" cmpd="sng" algn="ctr">
+                      <a:solidFill>
+                        <a:schemeClr val="tx1"/>
+                      </a:solidFill>
+                      <a:prstDash val="solid"/>
+                      <a:round/>
+                      <a:headEnd type="none" w="med" len="med"/>
+                      <a:tailEnd type="none" w="med" len="med"/>
+                    </a:lnT>
+                    <a:lnB w="12700" cap="flat" cmpd="sng" algn="ctr">
+                      <a:solidFill>
+                        <a:schemeClr val="tx1"/>
+                      </a:solidFill>
+                      <a:prstDash val="solid"/>
+                      <a:round/>
+                      <a:headEnd type="none" w="med" len="med"/>
+                      <a:tailEnd type="none" w="med" len="med"/>
+                    </a:lnB>
+                    <a:lnTlToBr w="12700" cmpd="sng">
+                      <a:noFill/>
+                      <a:prstDash val="solid"/>
+                    </a:lnTlToBr>
+                    <a:lnBlToTr w="12700" cmpd="sng">
+                      <a:noFill/>
+                      <a:prstDash val="solid"/>
+                    </a:lnBlToTr>
+                    <a:solidFill>
+                      <a:schemeClr val="accent6">
+                        <a:lumMod val="40000"/>
+                        <a:lumOff val="60000"/>
+                      </a:schemeClr>
+                    </a:solidFill>
+                  </a:tcPr>
+                </a:tc>
+                <a:extLst>
+                  <a:ext uri="{0D108BD9-81ED-4DB2-BD59-A6C34878D82A}">
+                    <a16:rowId xmlns:a16="http://schemas.microsoft.com/office/drawing/2014/main" val="2937080134"/>
+                  </a:ext>
+                </a:extLst>
+              </a:tr>
+              <a:tr h="452345">
+                <a:tc>
+                  <a:txBody>
+                    <a:bodyPr/>
+                    <a:lstStyle/>
+                    <a:p>
+                      <a:pPr algn="ctr"/>
+                      <a:r>
+                        <a:rPr lang="en-GB" sz="1800" b="1" dirty="0">
+                          <a:solidFill>
+                            <a:schemeClr val="tx1"/>
+                          </a:solidFill>
+                        </a:rPr>
+                        <a:t>Y1</a:t>
+                      </a:r>
+                    </a:p>
+                  </a:txBody>
+                  <a:tcPr anchor="ctr">
+                    <a:lnL w="12700" cap="flat" cmpd="sng" algn="ctr">
+                      <a:solidFill>
+                        <a:schemeClr val="tx1"/>
+                      </a:solidFill>
+                      <a:prstDash val="solid"/>
+                      <a:round/>
+                      <a:headEnd type="none" w="med" len="med"/>
+                      <a:tailEnd type="none" w="med" len="med"/>
+                    </a:lnL>
+                    <a:lnR w="12700" cap="flat" cmpd="sng" algn="ctr">
+                      <a:solidFill>
+                        <a:schemeClr val="tx1"/>
+                      </a:solidFill>
+                      <a:prstDash val="solid"/>
+                      <a:round/>
+                      <a:headEnd type="none" w="med" len="med"/>
+                      <a:tailEnd type="none" w="med" len="med"/>
+                    </a:lnR>
+                    <a:lnT w="12700" cap="flat" cmpd="sng" algn="ctr">
+                      <a:solidFill>
+                        <a:schemeClr val="tx1"/>
+                      </a:solidFill>
+                      <a:prstDash val="solid"/>
+                      <a:round/>
+                      <a:headEnd type="none" w="med" len="med"/>
+                      <a:tailEnd type="none" w="med" len="med"/>
+                    </a:lnT>
+                    <a:lnB w="12700" cap="flat" cmpd="sng" algn="ctr">
+                      <a:solidFill>
+                        <a:schemeClr val="tx1"/>
+                      </a:solidFill>
+                      <a:prstDash val="solid"/>
+                      <a:round/>
+                      <a:headEnd type="none" w="med" len="med"/>
+                      <a:tailEnd type="none" w="med" len="med"/>
+                    </a:lnB>
+                    <a:lnTlToBr w="12700" cmpd="sng">
+                      <a:noFill/>
+                      <a:prstDash val="solid"/>
+                    </a:lnTlToBr>
+                    <a:lnBlToTr w="12700" cmpd="sng">
+                      <a:noFill/>
+                      <a:prstDash val="solid"/>
+                    </a:lnBlToTr>
+                    <a:solidFill>
+                      <a:schemeClr val="accent6">
+                        <a:lumMod val="40000"/>
+                        <a:lumOff val="60000"/>
+                      </a:schemeClr>
+                    </a:solidFill>
+                  </a:tcPr>
+                </a:tc>
+                <a:tc>
+                  <a:txBody>
+                    <a:bodyPr/>
+                    <a:lstStyle/>
+                    <a:p>
+                      <a:pPr algn="ctr"/>
+                      <a:r>
+                        <a:rPr lang="en-GB" sz="1800" b="0" dirty="0">
+                          <a:solidFill>
+                            <a:schemeClr val="tx1"/>
+                          </a:solidFill>
+                        </a:rPr>
+                        <a:t>u</a:t>
+                      </a:r>
+                      <a:r>
+                        <a:rPr lang="en-GB" sz="1800" b="0" baseline="-25000" dirty="0">
+                          <a:solidFill>
+                            <a:schemeClr val="tx1"/>
+                          </a:solidFill>
+                        </a:rPr>
+                        <a:t>y1</a:t>
+                      </a:r>
+                      <a:endParaRPr lang="en-GB" sz="1800" b="0" dirty="0">
+                        <a:solidFill>
+                          <a:schemeClr val="tx1"/>
+                        </a:solidFill>
+                      </a:endParaRPr>
+                    </a:p>
+                  </a:txBody>
+                  <a:tcPr anchor="ctr">
+                    <a:lnL w="12700" cap="flat" cmpd="sng" algn="ctr">
+                      <a:solidFill>
+                        <a:schemeClr val="tx1"/>
+                      </a:solidFill>
+                      <a:prstDash val="solid"/>
+                      <a:round/>
+                      <a:headEnd type="none" w="med" len="med"/>
+                      <a:tailEnd type="none" w="med" len="med"/>
+                    </a:lnL>
+                    <a:lnR w="12700" cap="flat" cmpd="sng" algn="ctr">
+                      <a:noFill/>
+                      <a:prstDash val="solid"/>
+                      <a:round/>
+                      <a:headEnd type="none" w="med" len="med"/>
+                      <a:tailEnd type="none" w="med" len="med"/>
+                    </a:lnR>
+                    <a:lnT w="12700" cap="flat" cmpd="sng" algn="ctr">
+                      <a:solidFill>
+                        <a:schemeClr val="tx1"/>
+                      </a:solidFill>
+                      <a:prstDash val="solid"/>
+                      <a:round/>
+                      <a:headEnd type="none" w="med" len="med"/>
+                      <a:tailEnd type="none" w="med" len="med"/>
+                    </a:lnT>
+                    <a:lnB w="12700" cap="flat" cmpd="sng" algn="ctr">
+                      <a:noFill/>
+                      <a:prstDash val="solid"/>
+                      <a:round/>
+                      <a:headEnd type="none" w="med" len="med"/>
+                      <a:tailEnd type="none" w="med" len="med"/>
+                    </a:lnB>
+                    <a:lnTlToBr w="12700" cmpd="sng">
+                      <a:noFill/>
+                      <a:prstDash val="solid"/>
+                    </a:lnTlToBr>
+                    <a:lnBlToTr w="12700" cmpd="sng">
+                      <a:noFill/>
+                      <a:prstDash val="solid"/>
+                    </a:lnBlToTr>
+                    <a:solidFill>
+                      <a:schemeClr val="accent6">
+                        <a:lumMod val="40000"/>
+                        <a:lumOff val="60000"/>
+                      </a:schemeClr>
+                    </a:solidFill>
+                  </a:tcPr>
+                </a:tc>
+                <a:tc>
+                  <a:txBody>
+                    <a:bodyPr/>
+                    <a:lstStyle/>
+                    <a:p>
+                      <a:pPr algn="ctr"/>
+                      <a:endParaRPr lang="en-GB" sz="1800" b="0" dirty="0">
+                        <a:solidFill>
+                          <a:schemeClr val="tx1"/>
+                        </a:solidFill>
+                      </a:endParaRPr>
+                    </a:p>
+                  </a:txBody>
+                  <a:tcPr anchor="ctr">
+                    <a:lnL w="12700" cap="flat" cmpd="sng" algn="ctr">
+                      <a:noFill/>
+                      <a:prstDash val="solid"/>
+                      <a:round/>
+                      <a:headEnd type="none" w="med" len="med"/>
+                      <a:tailEnd type="none" w="med" len="med"/>
+                    </a:lnL>
+                    <a:lnR w="12700" cap="flat" cmpd="sng" algn="ctr">
+                      <a:noFill/>
+                      <a:prstDash val="solid"/>
+                      <a:round/>
+                      <a:headEnd type="none" w="med" len="med"/>
+                      <a:tailEnd type="none" w="med" len="med"/>
+                    </a:lnR>
+                    <a:lnT w="12700" cap="flat" cmpd="sng" algn="ctr">
+                      <a:solidFill>
+                        <a:schemeClr val="tx1"/>
+                      </a:solidFill>
+                      <a:prstDash val="solid"/>
+                      <a:round/>
+                      <a:headEnd type="none" w="med" len="med"/>
+                      <a:tailEnd type="none" w="med" len="med"/>
+                    </a:lnT>
+                    <a:lnB w="12700" cap="flat" cmpd="sng" algn="ctr">
+                      <a:noFill/>
+                      <a:prstDash val="solid"/>
+                      <a:round/>
+                      <a:headEnd type="none" w="med" len="med"/>
+                      <a:tailEnd type="none" w="med" len="med"/>
+                    </a:lnB>
+                    <a:lnTlToBr w="12700" cmpd="sng">
+                      <a:noFill/>
+                      <a:prstDash val="solid"/>
+                    </a:lnTlToBr>
+                    <a:lnBlToTr w="12700" cmpd="sng">
+                      <a:noFill/>
+                      <a:prstDash val="solid"/>
+                    </a:lnBlToTr>
+                    <a:solidFill>
+                      <a:schemeClr val="accent6">
+                        <a:lumMod val="40000"/>
+                        <a:lumOff val="60000"/>
+                      </a:schemeClr>
+                    </a:solidFill>
+                  </a:tcPr>
+                </a:tc>
+                <a:tc>
+                  <a:txBody>
+                    <a:bodyPr/>
+                    <a:lstStyle/>
+                    <a:p>
+                      <a:pPr algn="ctr"/>
+                      <a:endParaRPr lang="en-GB" sz="1800" b="0" dirty="0">
+                        <a:solidFill>
+                          <a:schemeClr val="tx1"/>
+                        </a:solidFill>
+                      </a:endParaRPr>
+                    </a:p>
+                  </a:txBody>
+                  <a:tcPr anchor="ctr">
+                    <a:lnL w="12700" cap="flat" cmpd="sng" algn="ctr">
+                      <a:noFill/>
+                      <a:prstDash val="solid"/>
+                      <a:round/>
+                      <a:headEnd type="none" w="med" len="med"/>
+                      <a:tailEnd type="none" w="med" len="med"/>
+                    </a:lnL>
+                    <a:lnR w="12700" cap="flat" cmpd="sng" algn="ctr">
+                      <a:noFill/>
+                      <a:prstDash val="solid"/>
+                      <a:round/>
+                      <a:headEnd type="none" w="med" len="med"/>
+                      <a:tailEnd type="none" w="med" len="med"/>
+                    </a:lnR>
+                    <a:lnT w="12700" cap="flat" cmpd="sng" algn="ctr">
+                      <a:solidFill>
+                        <a:schemeClr val="tx1"/>
+                      </a:solidFill>
+                      <a:prstDash val="solid"/>
+                      <a:round/>
+                      <a:headEnd type="none" w="med" len="med"/>
+                      <a:tailEnd type="none" w="med" len="med"/>
+                    </a:lnT>
+                    <a:lnB w="12700" cap="flat" cmpd="sng" algn="ctr">
+                      <a:noFill/>
+                      <a:prstDash val="solid"/>
+                      <a:round/>
+                      <a:headEnd type="none" w="med" len="med"/>
+                      <a:tailEnd type="none" w="med" len="med"/>
+                    </a:lnB>
+                    <a:lnTlToBr w="12700" cmpd="sng">
+                      <a:noFill/>
+                      <a:prstDash val="solid"/>
+                    </a:lnTlToBr>
+                    <a:lnBlToTr w="12700" cmpd="sng">
+                      <a:noFill/>
+                      <a:prstDash val="solid"/>
+                    </a:lnBlToTr>
+                    <a:solidFill>
+                      <a:schemeClr val="accent6">
+                        <a:lumMod val="40000"/>
+                        <a:lumOff val="60000"/>
+                      </a:schemeClr>
+                    </a:solidFill>
+                  </a:tcPr>
+                </a:tc>
+                <a:tc>
+                  <a:txBody>
+                    <a:bodyPr/>
+                    <a:lstStyle/>
+                    <a:p>
+                      <a:pPr algn="ctr"/>
+                      <a:endParaRPr lang="en-GB" sz="1800" b="0" dirty="0">
+                        <a:solidFill>
+                          <a:schemeClr val="tx1"/>
+                        </a:solidFill>
+                      </a:endParaRPr>
+                    </a:p>
+                  </a:txBody>
+                  <a:tcPr anchor="ctr">
+                    <a:lnL w="12700" cap="flat" cmpd="sng" algn="ctr">
+                      <a:noFill/>
+                      <a:prstDash val="solid"/>
+                      <a:round/>
+                      <a:headEnd type="none" w="med" len="med"/>
+                      <a:tailEnd type="none" w="med" len="med"/>
+                    </a:lnL>
+                    <a:lnR w="12700" cap="flat" cmpd="sng" algn="ctr">
+                      <a:noFill/>
+                      <a:prstDash val="solid"/>
+                      <a:round/>
+                      <a:headEnd type="none" w="med" len="med"/>
+                      <a:tailEnd type="none" w="med" len="med"/>
+                    </a:lnR>
+                    <a:lnT w="12700" cap="flat" cmpd="sng" algn="ctr">
+                      <a:solidFill>
+                        <a:schemeClr val="tx1"/>
+                      </a:solidFill>
+                      <a:prstDash val="solid"/>
+                      <a:round/>
+                      <a:headEnd type="none" w="med" len="med"/>
+                      <a:tailEnd type="none" w="med" len="med"/>
+                    </a:lnT>
+                    <a:lnB w="12700" cap="flat" cmpd="sng" algn="ctr">
+                      <a:noFill/>
+                      <a:prstDash val="solid"/>
+                      <a:round/>
+                      <a:headEnd type="none" w="med" len="med"/>
+                      <a:tailEnd type="none" w="med" len="med"/>
+                    </a:lnB>
+                    <a:lnTlToBr w="12700" cmpd="sng">
+                      <a:noFill/>
+                      <a:prstDash val="solid"/>
+                    </a:lnTlToBr>
+                    <a:lnBlToTr w="12700" cmpd="sng">
+                      <a:noFill/>
+                      <a:prstDash val="solid"/>
+                    </a:lnBlToTr>
+                    <a:solidFill>
+                      <a:schemeClr val="accent6">
+                        <a:lumMod val="40000"/>
+                        <a:lumOff val="60000"/>
+                      </a:schemeClr>
+                    </a:solidFill>
+                  </a:tcPr>
+                </a:tc>
+                <a:extLst>
+                  <a:ext uri="{0D108BD9-81ED-4DB2-BD59-A6C34878D82A}">
+                    <a16:rowId xmlns:a16="http://schemas.microsoft.com/office/drawing/2014/main" val="2230996407"/>
+                  </a:ext>
+                </a:extLst>
+              </a:tr>
+              <a:tr h="452345">
+                <a:tc>
+                  <a:txBody>
+                    <a:bodyPr/>
+                    <a:lstStyle/>
+                    <a:p>
+                      <a:pPr algn="ctr"/>
+                      <a:r>
+                        <a:rPr lang="en-GB" sz="1800" b="1" dirty="0">
+                          <a:solidFill>
+                            <a:schemeClr val="tx1"/>
+                          </a:solidFill>
+                        </a:rPr>
+                        <a:t>Y2</a:t>
+                      </a:r>
+                    </a:p>
+                  </a:txBody>
+                  <a:tcPr anchor="ctr">
+                    <a:lnL w="12700" cap="flat" cmpd="sng" algn="ctr">
+                      <a:solidFill>
+                        <a:schemeClr val="tx1"/>
+                      </a:solidFill>
+                      <a:prstDash val="solid"/>
+                      <a:round/>
+                      <a:headEnd type="none" w="med" len="med"/>
+                      <a:tailEnd type="none" w="med" len="med"/>
+                    </a:lnL>
+                    <a:lnR w="12700" cap="flat" cmpd="sng" algn="ctr">
+                      <a:solidFill>
+                        <a:schemeClr val="tx1"/>
+                      </a:solidFill>
+                      <a:prstDash val="solid"/>
+                      <a:round/>
+                      <a:headEnd type="none" w="med" len="med"/>
+                      <a:tailEnd type="none" w="med" len="med"/>
+                    </a:lnR>
+                    <a:lnT w="12700" cap="flat" cmpd="sng" algn="ctr">
+                      <a:solidFill>
+                        <a:schemeClr val="tx1"/>
+                      </a:solidFill>
+                      <a:prstDash val="solid"/>
+                      <a:round/>
+                      <a:headEnd type="none" w="med" len="med"/>
+                      <a:tailEnd type="none" w="med" len="med"/>
+                    </a:lnT>
+                    <a:lnB w="12700" cap="flat" cmpd="sng" algn="ctr">
+                      <a:solidFill>
+                        <a:schemeClr val="tx1"/>
+                      </a:solidFill>
+                      <a:prstDash val="solid"/>
+                      <a:round/>
+                      <a:headEnd type="none" w="med" len="med"/>
+                      <a:tailEnd type="none" w="med" len="med"/>
+                    </a:lnB>
+                    <a:lnTlToBr w="12700" cmpd="sng">
+                      <a:noFill/>
+                      <a:prstDash val="solid"/>
+                    </a:lnTlToBr>
+                    <a:lnBlToTr w="12700" cmpd="sng">
+                      <a:noFill/>
+                      <a:prstDash val="solid"/>
+                    </a:lnBlToTr>
+                    <a:solidFill>
+                      <a:schemeClr val="accent6">
+                        <a:lumMod val="40000"/>
+                        <a:lumOff val="60000"/>
+                      </a:schemeClr>
+                    </a:solidFill>
+                  </a:tcPr>
+                </a:tc>
+                <a:tc>
+                  <a:txBody>
+                    <a:bodyPr/>
+                    <a:lstStyle/>
+                    <a:p>
+                      <a:pPr algn="ctr"/>
+                      <a:r>
+                        <a:rPr lang="en-GB" sz="1800" b="0" dirty="0">
+                          <a:solidFill>
+                            <a:schemeClr val="tx1"/>
+                          </a:solidFill>
+                        </a:rPr>
+                        <a:t>0</a:t>
+                      </a:r>
+                    </a:p>
+                  </a:txBody>
+                  <a:tcPr anchor="ctr">
+                    <a:lnL w="12700" cap="flat" cmpd="sng" algn="ctr">
+                      <a:solidFill>
+                        <a:schemeClr val="tx1"/>
+                      </a:solidFill>
+                      <a:prstDash val="solid"/>
+                      <a:round/>
+                      <a:headEnd type="none" w="med" len="med"/>
+                      <a:tailEnd type="none" w="med" len="med"/>
+                    </a:lnL>
+                    <a:lnR w="12700" cap="flat" cmpd="sng" algn="ctr">
+                      <a:noFill/>
+                      <a:prstDash val="solid"/>
+                      <a:round/>
+                      <a:headEnd type="none" w="med" len="med"/>
+                      <a:tailEnd type="none" w="med" len="med"/>
+                    </a:lnR>
+                    <a:lnT w="12700" cap="flat" cmpd="sng" algn="ctr">
+                      <a:noFill/>
+                      <a:prstDash val="solid"/>
+                      <a:round/>
+                      <a:headEnd type="none" w="med" len="med"/>
+                      <a:tailEnd type="none" w="med" len="med"/>
+                    </a:lnT>
+                    <a:lnB w="12700" cap="flat" cmpd="sng" algn="ctr">
+                      <a:noFill/>
+                      <a:prstDash val="solid"/>
+                      <a:round/>
+                      <a:headEnd type="none" w="med" len="med"/>
+                      <a:tailEnd type="none" w="med" len="med"/>
+                    </a:lnB>
+                    <a:lnTlToBr w="12700" cmpd="sng">
+                      <a:noFill/>
+                      <a:prstDash val="solid"/>
+                    </a:lnTlToBr>
+                    <a:lnBlToTr w="12700" cmpd="sng">
+                      <a:noFill/>
+                      <a:prstDash val="solid"/>
+                    </a:lnBlToTr>
+                    <a:solidFill>
+                      <a:schemeClr val="accent6">
+                        <a:lumMod val="40000"/>
+                        <a:lumOff val="60000"/>
+                      </a:schemeClr>
+                    </a:solidFill>
+                  </a:tcPr>
+                </a:tc>
+                <a:tc>
+                  <a:txBody>
+                    <a:bodyPr/>
+                    <a:lstStyle/>
+                    <a:p>
+                      <a:pPr algn="ctr"/>
+                      <a:r>
+                        <a:rPr lang="en-GB" sz="1800" b="0" dirty="0">
+                          <a:solidFill>
+                            <a:schemeClr val="tx1"/>
+                          </a:solidFill>
+                        </a:rPr>
+                        <a:t>u</a:t>
+                      </a:r>
+                      <a:r>
+                        <a:rPr lang="en-GB" sz="1800" b="0" baseline="-25000" dirty="0">
+                          <a:solidFill>
+                            <a:schemeClr val="tx1"/>
+                          </a:solidFill>
+                        </a:rPr>
+                        <a:t>y2</a:t>
+                      </a:r>
+                      <a:endParaRPr lang="en-GB" sz="1800" b="0" dirty="0">
+                        <a:solidFill>
+                          <a:schemeClr val="tx1"/>
+                        </a:solidFill>
+                      </a:endParaRPr>
+                    </a:p>
+                  </a:txBody>
+                  <a:tcPr anchor="ctr">
+                    <a:lnL w="12700" cap="flat" cmpd="sng" algn="ctr">
+                      <a:noFill/>
+                      <a:prstDash val="solid"/>
+                      <a:round/>
+                      <a:headEnd type="none" w="med" len="med"/>
+                      <a:tailEnd type="none" w="med" len="med"/>
+                    </a:lnL>
+                    <a:lnR w="12700" cap="flat" cmpd="sng" algn="ctr">
+                      <a:noFill/>
+                      <a:prstDash val="solid"/>
+                      <a:round/>
+                      <a:headEnd type="none" w="med" len="med"/>
+                      <a:tailEnd type="none" w="med" len="med"/>
+                    </a:lnR>
+                    <a:lnT w="12700" cap="flat" cmpd="sng" algn="ctr">
+                      <a:noFill/>
+                      <a:prstDash val="solid"/>
+                      <a:round/>
+                      <a:headEnd type="none" w="med" len="med"/>
+                      <a:tailEnd type="none" w="med" len="med"/>
+                    </a:lnT>
+                    <a:lnB w="12700" cap="flat" cmpd="sng" algn="ctr">
+                      <a:noFill/>
+                      <a:prstDash val="solid"/>
+                      <a:round/>
+                      <a:headEnd type="none" w="med" len="med"/>
+                      <a:tailEnd type="none" w="med" len="med"/>
+                    </a:lnB>
+                    <a:lnTlToBr w="12700" cmpd="sng">
+                      <a:noFill/>
+                      <a:prstDash val="solid"/>
+                    </a:lnTlToBr>
+                    <a:lnBlToTr w="12700" cmpd="sng">
+                      <a:noFill/>
+                      <a:prstDash val="solid"/>
+                    </a:lnBlToTr>
+                    <a:solidFill>
+                      <a:schemeClr val="accent6">
+                        <a:lumMod val="40000"/>
+                        <a:lumOff val="60000"/>
+                      </a:schemeClr>
+                    </a:solidFill>
+                  </a:tcPr>
+                </a:tc>
+                <a:tc>
+                  <a:txBody>
+                    <a:bodyPr/>
+                    <a:lstStyle/>
+                    <a:p>
+                      <a:pPr algn="ctr"/>
+                      <a:endParaRPr lang="en-GB" sz="1800" b="0" dirty="0">
+                        <a:solidFill>
+                          <a:schemeClr val="tx1"/>
+                        </a:solidFill>
+                      </a:endParaRPr>
+                    </a:p>
+                  </a:txBody>
+                  <a:tcPr anchor="ctr">
+                    <a:lnL w="12700" cap="flat" cmpd="sng" algn="ctr">
+                      <a:noFill/>
+                      <a:prstDash val="solid"/>
+                      <a:round/>
+                      <a:headEnd type="none" w="med" len="med"/>
+                      <a:tailEnd type="none" w="med" len="med"/>
+                    </a:lnL>
+                    <a:lnR w="12700" cap="flat" cmpd="sng" algn="ctr">
+                      <a:noFill/>
+                      <a:prstDash val="solid"/>
+                      <a:round/>
+                      <a:headEnd type="none" w="med" len="med"/>
+                      <a:tailEnd type="none" w="med" len="med"/>
+                    </a:lnR>
+                    <a:lnT w="12700" cap="flat" cmpd="sng" algn="ctr">
+                      <a:noFill/>
+                      <a:prstDash val="solid"/>
+                      <a:round/>
+                      <a:headEnd type="none" w="med" len="med"/>
+                      <a:tailEnd type="none" w="med" len="med"/>
+                    </a:lnT>
+                    <a:lnB w="12700" cap="flat" cmpd="sng" algn="ctr">
+                      <a:noFill/>
+                      <a:prstDash val="solid"/>
+                      <a:round/>
+                      <a:headEnd type="none" w="med" len="med"/>
+                      <a:tailEnd type="none" w="med" len="med"/>
+                    </a:lnB>
+                    <a:lnTlToBr w="12700" cmpd="sng">
+                      <a:noFill/>
+                      <a:prstDash val="solid"/>
+                    </a:lnTlToBr>
+                    <a:lnBlToTr w="12700" cmpd="sng">
+                      <a:noFill/>
+                      <a:prstDash val="solid"/>
+                    </a:lnBlToTr>
+                    <a:solidFill>
+                      <a:schemeClr val="accent6">
+                        <a:lumMod val="40000"/>
+                        <a:lumOff val="60000"/>
+                      </a:schemeClr>
+                    </a:solidFill>
+                  </a:tcPr>
+                </a:tc>
+                <a:tc>
+                  <a:txBody>
+                    <a:bodyPr/>
+                    <a:lstStyle/>
+                    <a:p>
+                      <a:pPr algn="ctr"/>
+                      <a:endParaRPr lang="en-GB" sz="1800" b="0" dirty="0">
+                        <a:solidFill>
+                          <a:schemeClr val="tx1"/>
+                        </a:solidFill>
+                      </a:endParaRPr>
+                    </a:p>
+                  </a:txBody>
+                  <a:tcPr anchor="ctr">
+                    <a:lnL w="12700" cap="flat" cmpd="sng" algn="ctr">
+                      <a:noFill/>
+                      <a:prstDash val="solid"/>
+                      <a:round/>
+                      <a:headEnd type="none" w="med" len="med"/>
+                      <a:tailEnd type="none" w="med" len="med"/>
+                    </a:lnL>
+                    <a:lnR w="12700" cap="flat" cmpd="sng" algn="ctr">
+                      <a:noFill/>
+                      <a:prstDash val="solid"/>
+                      <a:round/>
+                      <a:headEnd type="none" w="med" len="med"/>
+                      <a:tailEnd type="none" w="med" len="med"/>
+                    </a:lnR>
+                    <a:lnT w="12700" cap="flat" cmpd="sng" algn="ctr">
+                      <a:noFill/>
+                      <a:prstDash val="solid"/>
+                      <a:round/>
+                      <a:headEnd type="none" w="med" len="med"/>
+                      <a:tailEnd type="none" w="med" len="med"/>
+                    </a:lnT>
+                    <a:lnB w="12700" cap="flat" cmpd="sng" algn="ctr">
+                      <a:noFill/>
+                      <a:prstDash val="solid"/>
+                      <a:round/>
+                      <a:headEnd type="none" w="med" len="med"/>
+                      <a:tailEnd type="none" w="med" len="med"/>
+                    </a:lnB>
+                    <a:lnTlToBr w="12700" cmpd="sng">
+                      <a:noFill/>
+                      <a:prstDash val="solid"/>
+                    </a:lnTlToBr>
+                    <a:lnBlToTr w="12700" cmpd="sng">
+                      <a:noFill/>
+                      <a:prstDash val="solid"/>
+                    </a:lnBlToTr>
+                    <a:solidFill>
+                      <a:schemeClr val="accent6">
+                        <a:lumMod val="40000"/>
+                        <a:lumOff val="60000"/>
+                      </a:schemeClr>
+                    </a:solidFill>
+                  </a:tcPr>
+                </a:tc>
+                <a:extLst>
+                  <a:ext uri="{0D108BD9-81ED-4DB2-BD59-A6C34878D82A}">
+                    <a16:rowId xmlns:a16="http://schemas.microsoft.com/office/drawing/2014/main" val="1073739229"/>
+                  </a:ext>
+                </a:extLst>
+              </a:tr>
+              <a:tr h="452345">
+                <a:tc>
+                  <a:txBody>
+                    <a:bodyPr/>
+                    <a:lstStyle/>
+                    <a:p>
+                      <a:pPr algn="ctr"/>
+                      <a:r>
+                        <a:rPr lang="en-GB" sz="1800" b="1" dirty="0">
+                          <a:solidFill>
+                            <a:schemeClr val="tx1"/>
+                          </a:solidFill>
+                        </a:rPr>
+                        <a:t>Y3</a:t>
+                      </a:r>
+                    </a:p>
+                  </a:txBody>
+                  <a:tcPr anchor="ctr">
+                    <a:lnL w="12700" cap="flat" cmpd="sng" algn="ctr">
+                      <a:solidFill>
+                        <a:schemeClr val="tx1"/>
+                      </a:solidFill>
+                      <a:prstDash val="solid"/>
+                      <a:round/>
+                      <a:headEnd type="none" w="med" len="med"/>
+                      <a:tailEnd type="none" w="med" len="med"/>
+                    </a:lnL>
+                    <a:lnR w="12700" cap="flat" cmpd="sng" algn="ctr">
+                      <a:solidFill>
+                        <a:schemeClr val="tx1"/>
+                      </a:solidFill>
+                      <a:prstDash val="solid"/>
+                      <a:round/>
+                      <a:headEnd type="none" w="med" len="med"/>
+                      <a:tailEnd type="none" w="med" len="med"/>
+                    </a:lnR>
+                    <a:lnT w="12700" cap="flat" cmpd="sng" algn="ctr">
+                      <a:solidFill>
+                        <a:schemeClr val="tx1"/>
+                      </a:solidFill>
+                      <a:prstDash val="solid"/>
+                      <a:round/>
+                      <a:headEnd type="none" w="med" len="med"/>
+                      <a:tailEnd type="none" w="med" len="med"/>
+                    </a:lnT>
+                    <a:lnB w="12700" cap="flat" cmpd="sng" algn="ctr">
+                      <a:solidFill>
+                        <a:schemeClr val="tx1"/>
+                      </a:solidFill>
+                      <a:prstDash val="solid"/>
+                      <a:round/>
+                      <a:headEnd type="none" w="med" len="med"/>
+                      <a:tailEnd type="none" w="med" len="med"/>
+                    </a:lnB>
+                    <a:lnTlToBr w="12700" cmpd="sng">
+                      <a:noFill/>
+                      <a:prstDash val="solid"/>
+                    </a:lnTlToBr>
+                    <a:lnBlToTr w="12700" cmpd="sng">
+                      <a:noFill/>
+                      <a:prstDash val="solid"/>
+                    </a:lnBlToTr>
+                    <a:solidFill>
+                      <a:schemeClr val="accent6">
+                        <a:lumMod val="40000"/>
+                        <a:lumOff val="60000"/>
+                      </a:schemeClr>
+                    </a:solidFill>
+                  </a:tcPr>
+                </a:tc>
+                <a:tc>
+                  <a:txBody>
+                    <a:bodyPr/>
+                    <a:lstStyle/>
+                    <a:p>
+                      <a:pPr algn="ctr"/>
+                      <a:r>
+                        <a:rPr lang="en-GB" sz="1800" b="0" dirty="0">
+                          <a:solidFill>
+                            <a:schemeClr val="tx1"/>
+                          </a:solidFill>
+                        </a:rPr>
+                        <a:t>0</a:t>
+                      </a:r>
+                    </a:p>
+                  </a:txBody>
+                  <a:tcPr anchor="ctr">
+                    <a:lnL w="12700" cap="flat" cmpd="sng" algn="ctr">
+                      <a:solidFill>
+                        <a:schemeClr val="tx1"/>
+                      </a:solidFill>
+                      <a:prstDash val="solid"/>
+                      <a:round/>
+                      <a:headEnd type="none" w="med" len="med"/>
+                      <a:tailEnd type="none" w="med" len="med"/>
+                    </a:lnL>
+                    <a:lnR w="12700" cap="flat" cmpd="sng" algn="ctr">
+                      <a:noFill/>
+                      <a:prstDash val="solid"/>
+                      <a:round/>
+                      <a:headEnd type="none" w="med" len="med"/>
+                      <a:tailEnd type="none" w="med" len="med"/>
+                    </a:lnR>
+                    <a:lnT w="12700" cap="flat" cmpd="sng" algn="ctr">
+                      <a:noFill/>
+                      <a:prstDash val="solid"/>
+                      <a:round/>
+                      <a:headEnd type="none" w="med" len="med"/>
+                      <a:tailEnd type="none" w="med" len="med"/>
+                    </a:lnT>
+                    <a:lnB w="12700" cap="flat" cmpd="sng" algn="ctr">
+                      <a:noFill/>
+                      <a:prstDash val="solid"/>
+                      <a:round/>
+                      <a:headEnd type="none" w="med" len="med"/>
+                      <a:tailEnd type="none" w="med" len="med"/>
+                    </a:lnB>
+                    <a:lnTlToBr w="12700" cmpd="sng">
+                      <a:noFill/>
+                      <a:prstDash val="solid"/>
+                    </a:lnTlToBr>
+                    <a:lnBlToTr w="12700" cmpd="sng">
+                      <a:noFill/>
+                      <a:prstDash val="solid"/>
+                    </a:lnBlToTr>
+                    <a:solidFill>
+                      <a:schemeClr val="accent6">
+                        <a:lumMod val="40000"/>
+                        <a:lumOff val="60000"/>
+                      </a:schemeClr>
+                    </a:solidFill>
+                  </a:tcPr>
+                </a:tc>
+                <a:tc>
+                  <a:txBody>
+                    <a:bodyPr/>
+                    <a:lstStyle/>
+                    <a:p>
+                      <a:pPr algn="ctr"/>
+                      <a:r>
+                        <a:rPr lang="en-GB" sz="1800" b="0" dirty="0">
+                          <a:solidFill>
+                            <a:schemeClr val="tx1"/>
+                          </a:solidFill>
+                        </a:rPr>
+                        <a:t>0</a:t>
+                      </a:r>
+                    </a:p>
+                  </a:txBody>
+                  <a:tcPr anchor="ctr">
+                    <a:lnL w="12700" cap="flat" cmpd="sng" algn="ctr">
+                      <a:noFill/>
+                      <a:prstDash val="solid"/>
+                      <a:round/>
+                      <a:headEnd type="none" w="med" len="med"/>
+                      <a:tailEnd type="none" w="med" len="med"/>
+                    </a:lnL>
+                    <a:lnR w="12700" cap="flat" cmpd="sng" algn="ctr">
+                      <a:noFill/>
+                      <a:prstDash val="solid"/>
+                      <a:round/>
+                      <a:headEnd type="none" w="med" len="med"/>
+                      <a:tailEnd type="none" w="med" len="med"/>
+                    </a:lnR>
+                    <a:lnT w="12700" cap="flat" cmpd="sng" algn="ctr">
+                      <a:noFill/>
+                      <a:prstDash val="solid"/>
+                      <a:round/>
+                      <a:headEnd type="none" w="med" len="med"/>
+                      <a:tailEnd type="none" w="med" len="med"/>
+                    </a:lnT>
+                    <a:lnB w="12700" cap="flat" cmpd="sng" algn="ctr">
+                      <a:noFill/>
+                      <a:prstDash val="solid"/>
+                      <a:round/>
+                      <a:headEnd type="none" w="med" len="med"/>
+                      <a:tailEnd type="none" w="med" len="med"/>
+                    </a:lnB>
+                    <a:lnTlToBr w="12700" cmpd="sng">
+                      <a:noFill/>
+                      <a:prstDash val="solid"/>
+                    </a:lnTlToBr>
+                    <a:lnBlToTr w="12700" cmpd="sng">
+                      <a:noFill/>
+                      <a:prstDash val="solid"/>
+                    </a:lnBlToTr>
+                    <a:solidFill>
+                      <a:schemeClr val="accent6">
+                        <a:lumMod val="40000"/>
+                        <a:lumOff val="60000"/>
+                      </a:schemeClr>
+                    </a:solidFill>
+                  </a:tcPr>
+                </a:tc>
+                <a:tc>
+                  <a:txBody>
+                    <a:bodyPr/>
+                    <a:lstStyle/>
+                    <a:p>
+                      <a:pPr algn="ctr"/>
+                      <a:r>
+                        <a:rPr lang="en-GB" sz="1800" b="0" dirty="0">
+                          <a:solidFill>
+                            <a:schemeClr val="tx1"/>
+                          </a:solidFill>
+                        </a:rPr>
+                        <a:t>u</a:t>
+                      </a:r>
+                      <a:r>
+                        <a:rPr lang="en-GB" sz="1800" b="0" baseline="-25000" dirty="0">
+                          <a:solidFill>
+                            <a:schemeClr val="tx1"/>
+                          </a:solidFill>
+                        </a:rPr>
+                        <a:t>y3</a:t>
+                      </a:r>
+                      <a:endParaRPr lang="en-GB" sz="1800" b="0" dirty="0">
+                        <a:solidFill>
+                          <a:schemeClr val="tx1"/>
+                        </a:solidFill>
+                      </a:endParaRPr>
+                    </a:p>
+                  </a:txBody>
+                  <a:tcPr anchor="ctr">
+                    <a:lnL w="12700" cap="flat" cmpd="sng" algn="ctr">
+                      <a:noFill/>
+                      <a:prstDash val="solid"/>
+                      <a:round/>
+                      <a:headEnd type="none" w="med" len="med"/>
+                      <a:tailEnd type="none" w="med" len="med"/>
+                    </a:lnL>
+                    <a:lnR w="12700" cap="flat" cmpd="sng" algn="ctr">
+                      <a:noFill/>
+                      <a:prstDash val="solid"/>
+                      <a:round/>
+                      <a:headEnd type="none" w="med" len="med"/>
+                      <a:tailEnd type="none" w="med" len="med"/>
+                    </a:lnR>
+                    <a:lnT w="12700" cap="flat" cmpd="sng" algn="ctr">
+                      <a:noFill/>
+                      <a:prstDash val="solid"/>
+                      <a:round/>
+                      <a:headEnd type="none" w="med" len="med"/>
+                      <a:tailEnd type="none" w="med" len="med"/>
+                    </a:lnT>
+                    <a:lnB w="12700" cap="flat" cmpd="sng" algn="ctr">
+                      <a:noFill/>
+                      <a:prstDash val="solid"/>
+                      <a:round/>
+                      <a:headEnd type="none" w="med" len="med"/>
+                      <a:tailEnd type="none" w="med" len="med"/>
+                    </a:lnB>
+                    <a:lnTlToBr w="12700" cmpd="sng">
+                      <a:noFill/>
+                      <a:prstDash val="solid"/>
+                    </a:lnTlToBr>
+                    <a:lnBlToTr w="12700" cmpd="sng">
+                      <a:noFill/>
+                      <a:prstDash val="solid"/>
+                    </a:lnBlToTr>
+                    <a:solidFill>
+                      <a:schemeClr val="accent6">
+                        <a:lumMod val="40000"/>
+                        <a:lumOff val="60000"/>
+                      </a:schemeClr>
+                    </a:solidFill>
+                  </a:tcPr>
+                </a:tc>
+                <a:tc>
+                  <a:txBody>
+                    <a:bodyPr/>
+                    <a:lstStyle/>
+                    <a:p>
+                      <a:pPr algn="ctr"/>
+                      <a:endParaRPr lang="en-GB" sz="1800" b="0" dirty="0">
+                        <a:solidFill>
+                          <a:schemeClr val="tx1"/>
+                        </a:solidFill>
+                      </a:endParaRPr>
+                    </a:p>
+                  </a:txBody>
+                  <a:tcPr anchor="ctr">
+                    <a:lnL w="12700" cap="flat" cmpd="sng" algn="ctr">
+                      <a:noFill/>
+                      <a:prstDash val="solid"/>
+                      <a:round/>
+                      <a:headEnd type="none" w="med" len="med"/>
+                      <a:tailEnd type="none" w="med" len="med"/>
+                    </a:lnL>
+                    <a:lnR w="12700" cap="flat" cmpd="sng" algn="ctr">
+                      <a:noFill/>
+                      <a:prstDash val="solid"/>
+                      <a:round/>
+                      <a:headEnd type="none" w="med" len="med"/>
+                      <a:tailEnd type="none" w="med" len="med"/>
+                    </a:lnR>
+                    <a:lnT w="12700" cap="flat" cmpd="sng" algn="ctr">
+                      <a:noFill/>
+                      <a:prstDash val="solid"/>
+                      <a:round/>
+                      <a:headEnd type="none" w="med" len="med"/>
+                      <a:tailEnd type="none" w="med" len="med"/>
+                    </a:lnT>
+                    <a:lnB w="12700" cap="flat" cmpd="sng" algn="ctr">
+                      <a:noFill/>
+                      <a:prstDash val="solid"/>
+                      <a:round/>
+                      <a:headEnd type="none" w="med" len="med"/>
+                      <a:tailEnd type="none" w="med" len="med"/>
+                    </a:lnB>
+                    <a:lnTlToBr w="12700" cmpd="sng">
+                      <a:noFill/>
+                      <a:prstDash val="solid"/>
+                    </a:lnTlToBr>
+                    <a:lnBlToTr w="12700" cmpd="sng">
+                      <a:noFill/>
+                      <a:prstDash val="solid"/>
+                    </a:lnBlToTr>
+                    <a:solidFill>
+                      <a:schemeClr val="accent6">
+                        <a:lumMod val="40000"/>
+                        <a:lumOff val="60000"/>
+                      </a:schemeClr>
+                    </a:solidFill>
+                  </a:tcPr>
+                </a:tc>
+                <a:extLst>
+                  <a:ext uri="{0D108BD9-81ED-4DB2-BD59-A6C34878D82A}">
+                    <a16:rowId xmlns:a16="http://schemas.microsoft.com/office/drawing/2014/main" val="1915547210"/>
+                  </a:ext>
+                </a:extLst>
+              </a:tr>
+              <a:tr h="452345">
+                <a:tc>
+                  <a:txBody>
+                    <a:bodyPr/>
+                    <a:lstStyle/>
+                    <a:p>
+                      <a:pPr algn="ctr"/>
+                      <a:r>
+                        <a:rPr lang="en-GB" sz="1800" b="1" dirty="0">
+                          <a:solidFill>
+                            <a:schemeClr val="tx1"/>
+                          </a:solidFill>
+                        </a:rPr>
+                        <a:t>Y4</a:t>
+                      </a:r>
+                    </a:p>
+                  </a:txBody>
+                  <a:tcPr anchor="ctr">
+                    <a:lnL w="12700" cap="flat" cmpd="sng" algn="ctr">
+                      <a:solidFill>
+                        <a:schemeClr val="tx1"/>
+                      </a:solidFill>
+                      <a:prstDash val="solid"/>
+                      <a:round/>
+                      <a:headEnd type="none" w="med" len="med"/>
+                      <a:tailEnd type="none" w="med" len="med"/>
+                    </a:lnL>
+                    <a:lnR w="12700" cap="flat" cmpd="sng" algn="ctr">
+                      <a:solidFill>
+                        <a:schemeClr val="tx1"/>
+                      </a:solidFill>
+                      <a:prstDash val="solid"/>
+                      <a:round/>
+                      <a:headEnd type="none" w="med" len="med"/>
+                      <a:tailEnd type="none" w="med" len="med"/>
+                    </a:lnR>
+                    <a:lnT w="12700" cap="flat" cmpd="sng" algn="ctr">
+                      <a:solidFill>
+                        <a:schemeClr val="tx1"/>
+                      </a:solidFill>
+                      <a:prstDash val="solid"/>
+                      <a:round/>
+                      <a:headEnd type="none" w="med" len="med"/>
+                      <a:tailEnd type="none" w="med" len="med"/>
+                    </a:lnT>
+                    <a:lnB w="12700" cap="flat" cmpd="sng" algn="ctr">
+                      <a:solidFill>
+                        <a:schemeClr val="tx1"/>
+                      </a:solidFill>
+                      <a:prstDash val="solid"/>
+                      <a:round/>
+                      <a:headEnd type="none" w="med" len="med"/>
+                      <a:tailEnd type="none" w="med" len="med"/>
+                    </a:lnB>
+                    <a:lnTlToBr w="12700" cmpd="sng">
+                      <a:noFill/>
+                      <a:prstDash val="solid"/>
+                    </a:lnTlToBr>
+                    <a:lnBlToTr w="12700" cmpd="sng">
+                      <a:noFill/>
+                      <a:prstDash val="solid"/>
+                    </a:lnBlToTr>
+                    <a:solidFill>
+                      <a:schemeClr val="accent6">
+                        <a:lumMod val="40000"/>
+                        <a:lumOff val="60000"/>
+                      </a:schemeClr>
+                    </a:solidFill>
+                  </a:tcPr>
+                </a:tc>
+                <a:tc>
+                  <a:txBody>
+                    <a:bodyPr/>
+                    <a:lstStyle/>
+                    <a:p>
+                      <a:pPr algn="ctr"/>
+                      <a:r>
+                        <a:rPr lang="en-GB" sz="1800" b="0" dirty="0">
+                          <a:solidFill>
+                            <a:schemeClr val="tx1"/>
+                          </a:solidFill>
+                        </a:rPr>
+                        <a:t>0</a:t>
+                      </a:r>
+                    </a:p>
+                  </a:txBody>
+                  <a:tcPr anchor="ctr">
+                    <a:lnL w="12700" cap="flat" cmpd="sng" algn="ctr">
+                      <a:solidFill>
+                        <a:schemeClr val="tx1"/>
+                      </a:solidFill>
+                      <a:prstDash val="solid"/>
+                      <a:round/>
+                      <a:headEnd type="none" w="med" len="med"/>
+                      <a:tailEnd type="none" w="med" len="med"/>
+                    </a:lnL>
+                    <a:lnR w="12700" cap="flat" cmpd="sng" algn="ctr">
+                      <a:noFill/>
+                      <a:prstDash val="solid"/>
+                      <a:round/>
+                      <a:headEnd type="none" w="med" len="med"/>
+                      <a:tailEnd type="none" w="med" len="med"/>
+                    </a:lnR>
+                    <a:lnT w="12700" cap="flat" cmpd="sng" algn="ctr">
+                      <a:noFill/>
+                      <a:prstDash val="solid"/>
+                      <a:round/>
+                      <a:headEnd type="none" w="med" len="med"/>
+                      <a:tailEnd type="none" w="med" len="med"/>
+                    </a:lnT>
+                    <a:lnB w="12700" cap="flat" cmpd="sng" algn="ctr">
+                      <a:noFill/>
+                      <a:prstDash val="solid"/>
+                      <a:round/>
+                      <a:headEnd type="none" w="med" len="med"/>
+                      <a:tailEnd type="none" w="med" len="med"/>
+                    </a:lnB>
+                    <a:lnTlToBr w="12700" cmpd="sng">
+                      <a:noFill/>
+                      <a:prstDash val="solid"/>
+                    </a:lnTlToBr>
+                    <a:lnBlToTr w="12700" cmpd="sng">
+                      <a:noFill/>
+                      <a:prstDash val="solid"/>
+                    </a:lnBlToTr>
+                    <a:solidFill>
+                      <a:schemeClr val="accent6">
+                        <a:lumMod val="40000"/>
+                        <a:lumOff val="60000"/>
+                      </a:schemeClr>
+                    </a:solidFill>
+                  </a:tcPr>
+                </a:tc>
+                <a:tc>
+                  <a:txBody>
+                    <a:bodyPr/>
+                    <a:lstStyle/>
+                    <a:p>
+                      <a:pPr algn="ctr"/>
+                      <a:r>
+                        <a:rPr lang="en-GB" sz="1800" b="0" dirty="0">
+                          <a:solidFill>
+                            <a:schemeClr val="tx1"/>
+                          </a:solidFill>
+                        </a:rPr>
+                        <a:t>0</a:t>
+                      </a:r>
+                    </a:p>
+                  </a:txBody>
+                  <a:tcPr anchor="ctr">
+                    <a:lnL w="12700" cap="flat" cmpd="sng" algn="ctr">
+                      <a:noFill/>
+                      <a:prstDash val="solid"/>
+                      <a:round/>
+                      <a:headEnd type="none" w="med" len="med"/>
+                      <a:tailEnd type="none" w="med" len="med"/>
+                    </a:lnL>
+                    <a:lnR w="12700" cap="flat" cmpd="sng" algn="ctr">
+                      <a:noFill/>
+                      <a:prstDash val="solid"/>
+                      <a:round/>
+                      <a:headEnd type="none" w="med" len="med"/>
+                      <a:tailEnd type="none" w="med" len="med"/>
+                    </a:lnR>
+                    <a:lnT w="12700" cap="flat" cmpd="sng" algn="ctr">
+                      <a:noFill/>
+                      <a:prstDash val="solid"/>
+                      <a:round/>
+                      <a:headEnd type="none" w="med" len="med"/>
+                      <a:tailEnd type="none" w="med" len="med"/>
+                    </a:lnT>
+                    <a:lnB w="12700" cap="flat" cmpd="sng" algn="ctr">
+                      <a:noFill/>
+                      <a:prstDash val="solid"/>
+                      <a:round/>
+                      <a:headEnd type="none" w="med" len="med"/>
+                      <a:tailEnd type="none" w="med" len="med"/>
+                    </a:lnB>
+                    <a:lnTlToBr w="12700" cmpd="sng">
+                      <a:noFill/>
+                      <a:prstDash val="solid"/>
+                    </a:lnTlToBr>
+                    <a:lnBlToTr w="12700" cmpd="sng">
+                      <a:noFill/>
+                      <a:prstDash val="solid"/>
+                    </a:lnBlToTr>
+                    <a:solidFill>
+                      <a:schemeClr val="accent6">
+                        <a:lumMod val="40000"/>
+                        <a:lumOff val="60000"/>
+                      </a:schemeClr>
+                    </a:solidFill>
+                  </a:tcPr>
+                </a:tc>
+                <a:tc>
+                  <a:txBody>
+                    <a:bodyPr/>
+                    <a:lstStyle/>
+                    <a:p>
+                      <a:pPr algn="ctr"/>
+                      <a:r>
+                        <a:rPr lang="en-GB" sz="1800" b="0" dirty="0">
+                          <a:solidFill>
+                            <a:schemeClr val="tx1"/>
+                          </a:solidFill>
+                        </a:rPr>
+                        <a:t>0</a:t>
+                      </a:r>
+                    </a:p>
+                  </a:txBody>
+                  <a:tcPr anchor="ctr">
+                    <a:lnL w="12700" cap="flat" cmpd="sng" algn="ctr">
+                      <a:noFill/>
+                      <a:prstDash val="solid"/>
+                      <a:round/>
+                      <a:headEnd type="none" w="med" len="med"/>
+                      <a:tailEnd type="none" w="med" len="med"/>
+                    </a:lnL>
+                    <a:lnR w="12700" cap="flat" cmpd="sng" algn="ctr">
+                      <a:noFill/>
+                      <a:prstDash val="solid"/>
+                      <a:round/>
+                      <a:headEnd type="none" w="med" len="med"/>
+                      <a:tailEnd type="none" w="med" len="med"/>
+                    </a:lnR>
+                    <a:lnT w="12700" cap="flat" cmpd="sng" algn="ctr">
+                      <a:noFill/>
+                      <a:prstDash val="solid"/>
+                      <a:round/>
+                      <a:headEnd type="none" w="med" len="med"/>
+                      <a:tailEnd type="none" w="med" len="med"/>
+                    </a:lnT>
+                    <a:lnB w="12700" cap="flat" cmpd="sng" algn="ctr">
+                      <a:noFill/>
+                      <a:prstDash val="solid"/>
+                      <a:round/>
+                      <a:headEnd type="none" w="med" len="med"/>
+                      <a:tailEnd type="none" w="med" len="med"/>
+                    </a:lnB>
+                    <a:lnTlToBr w="12700" cmpd="sng">
+                      <a:noFill/>
+                      <a:prstDash val="solid"/>
+                    </a:lnTlToBr>
+                    <a:lnBlToTr w="12700" cmpd="sng">
+                      <a:noFill/>
+                      <a:prstDash val="solid"/>
+                    </a:lnBlToTr>
+                    <a:solidFill>
+                      <a:schemeClr val="accent6">
+                        <a:lumMod val="40000"/>
+                        <a:lumOff val="60000"/>
+                      </a:schemeClr>
+                    </a:solidFill>
+                  </a:tcPr>
+                </a:tc>
+                <a:tc>
+                  <a:txBody>
+                    <a:bodyPr/>
+                    <a:lstStyle/>
+                    <a:p>
+                      <a:pPr algn="ctr"/>
+                      <a:r>
+                        <a:rPr lang="en-GB" sz="1800" b="0" dirty="0">
+                          <a:solidFill>
+                            <a:schemeClr val="tx1"/>
+                          </a:solidFill>
+                        </a:rPr>
+                        <a:t>u</a:t>
+                      </a:r>
+                      <a:r>
+                        <a:rPr lang="en-GB" sz="1800" b="0" baseline="-25000" dirty="0">
+                          <a:solidFill>
+                            <a:schemeClr val="tx1"/>
+                          </a:solidFill>
+                        </a:rPr>
+                        <a:t>y4</a:t>
+                      </a:r>
+                      <a:endParaRPr lang="en-GB" sz="1800" b="0" dirty="0">
+                        <a:solidFill>
+                          <a:schemeClr val="tx1"/>
+                        </a:solidFill>
+                      </a:endParaRPr>
+                    </a:p>
+                  </a:txBody>
+                  <a:tcPr anchor="ctr">
+                    <a:lnL w="12700" cap="flat" cmpd="sng" algn="ctr">
+                      <a:noFill/>
+                      <a:prstDash val="solid"/>
+                      <a:round/>
+                      <a:headEnd type="none" w="med" len="med"/>
+                      <a:tailEnd type="none" w="med" len="med"/>
+                    </a:lnL>
+                    <a:lnR w="12700" cap="flat" cmpd="sng" algn="ctr">
+                      <a:noFill/>
+                      <a:prstDash val="solid"/>
+                      <a:round/>
+                      <a:headEnd type="none" w="med" len="med"/>
+                      <a:tailEnd type="none" w="med" len="med"/>
+                    </a:lnR>
+                    <a:lnT w="12700" cap="flat" cmpd="sng" algn="ctr">
+                      <a:noFill/>
+                      <a:prstDash val="solid"/>
+                      <a:round/>
+                      <a:headEnd type="none" w="med" len="med"/>
+                      <a:tailEnd type="none" w="med" len="med"/>
+                    </a:lnT>
+                    <a:lnB w="12700" cap="flat" cmpd="sng" algn="ctr">
+                      <a:noFill/>
+                      <a:prstDash val="solid"/>
+                      <a:round/>
+                      <a:headEnd type="none" w="med" len="med"/>
+                      <a:tailEnd type="none" w="med" len="med"/>
+                    </a:lnB>
+                    <a:lnTlToBr w="12700" cmpd="sng">
+                      <a:noFill/>
+                      <a:prstDash val="solid"/>
+                    </a:lnTlToBr>
+                    <a:lnBlToTr w="12700" cmpd="sng">
+                      <a:noFill/>
+                      <a:prstDash val="solid"/>
+                    </a:lnBlToTr>
+                    <a:solidFill>
+                      <a:schemeClr val="accent6">
+                        <a:lumMod val="40000"/>
+                        <a:lumOff val="60000"/>
+                      </a:schemeClr>
+                    </a:solidFill>
+                  </a:tcPr>
+                </a:tc>
+                <a:extLst>
+                  <a:ext uri="{0D108BD9-81ED-4DB2-BD59-A6C34878D82A}">
+                    <a16:rowId xmlns:a16="http://schemas.microsoft.com/office/drawing/2014/main" val="1045833436"/>
+                  </a:ext>
+                </a:extLst>
+              </a:tr>
+            </a:tbl>
+          </a:graphicData>
+        </a:graphic>
+      </p:graphicFrame>
+      <p:graphicFrame>
+        <p:nvGraphicFramePr>
+          <p:cNvPr id="39" name="Table 106">
+            <a:extLst>
+              <a:ext uri="{FF2B5EF4-FFF2-40B4-BE49-F238E27FC236}">
+                <a16:creationId xmlns:a16="http://schemas.microsoft.com/office/drawing/2014/main" id="{524264C1-3FE6-4C68-B702-DCDBA8A602C6}"/>
+              </a:ext>
+            </a:extLst>
+          </p:cNvPr>
+          <p:cNvGraphicFramePr>
+            <a:graphicFrameLocks noGrp="1"/>
+          </p:cNvGraphicFramePr>
+          <p:nvPr>
+            <p:extLst>
+              <p:ext uri="{D42A27DB-BD31-4B8C-83A1-F6EECF244321}">
+                <p14:modId xmlns:p14="http://schemas.microsoft.com/office/powerpoint/2010/main" val="58502421"/>
+              </p:ext>
+            </p:extLst>
+          </p:nvPr>
+        </p:nvGraphicFramePr>
+        <p:xfrm>
+          <a:off x="7317511" y="3937054"/>
+          <a:ext cx="3232425" cy="2261725"/>
+        </p:xfrm>
+        <a:graphic>
+          <a:graphicData uri="http://schemas.openxmlformats.org/drawingml/2006/table">
+            <a:tbl>
+              <a:tblPr firstRow="1" bandRow="1">
+                <a:tableStyleId>{5C22544A-7EE6-4342-B048-85BDC9FD1C3A}</a:tableStyleId>
+              </a:tblPr>
+              <a:tblGrid>
+                <a:gridCol w="646485">
+                  <a:extLst>
+                    <a:ext uri="{9D8B030D-6E8A-4147-A177-3AD203B41FA5}">
+                      <a16:colId xmlns:a16="http://schemas.microsoft.com/office/drawing/2014/main" val="1010010654"/>
+                    </a:ext>
+                  </a:extLst>
+                </a:gridCol>
+                <a:gridCol w="646485">
+                  <a:extLst>
+                    <a:ext uri="{9D8B030D-6E8A-4147-A177-3AD203B41FA5}">
+                      <a16:colId xmlns:a16="http://schemas.microsoft.com/office/drawing/2014/main" val="2729503702"/>
+                    </a:ext>
+                  </a:extLst>
+                </a:gridCol>
+                <a:gridCol w="646485">
+                  <a:extLst>
+                    <a:ext uri="{9D8B030D-6E8A-4147-A177-3AD203B41FA5}">
+                      <a16:colId xmlns:a16="http://schemas.microsoft.com/office/drawing/2014/main" val="2302851017"/>
+                    </a:ext>
+                  </a:extLst>
+                </a:gridCol>
+                <a:gridCol w="646485">
+                  <a:extLst>
+                    <a:ext uri="{9D8B030D-6E8A-4147-A177-3AD203B41FA5}">
+                      <a16:colId xmlns:a16="http://schemas.microsoft.com/office/drawing/2014/main" val="3433354927"/>
+                    </a:ext>
+                  </a:extLst>
+                </a:gridCol>
+                <a:gridCol w="646485">
+                  <a:extLst>
+                    <a:ext uri="{9D8B030D-6E8A-4147-A177-3AD203B41FA5}">
+                      <a16:colId xmlns:a16="http://schemas.microsoft.com/office/drawing/2014/main" val="2334715431"/>
+                    </a:ext>
+                  </a:extLst>
+                </a:gridCol>
+              </a:tblGrid>
+              <a:tr h="452345">
+                <a:tc>
+                  <a:txBody>
+                    <a:bodyPr/>
+                    <a:lstStyle/>
+                    <a:p>
+                      <a:pPr algn="ctr"/>
+                      <a:endParaRPr lang="en-GB" sz="1800" b="1" dirty="0">
+                        <a:solidFill>
+                          <a:schemeClr val="tx1"/>
+                        </a:solidFill>
+                      </a:endParaRPr>
+                    </a:p>
+                  </a:txBody>
+                  <a:tcPr anchor="ctr">
+                    <a:lnL w="12700" cap="flat" cmpd="sng" algn="ctr">
+                      <a:solidFill>
+                        <a:schemeClr val="tx1"/>
+                      </a:solidFill>
+                      <a:prstDash val="solid"/>
+                      <a:round/>
+                      <a:headEnd type="none" w="med" len="med"/>
+                      <a:tailEnd type="none" w="med" len="med"/>
+                    </a:lnL>
+                    <a:lnR w="12700" cap="flat" cmpd="sng" algn="ctr">
+                      <a:solidFill>
+                        <a:schemeClr val="tx1"/>
+                      </a:solidFill>
+                      <a:prstDash val="solid"/>
+                      <a:round/>
+                      <a:headEnd type="none" w="med" len="med"/>
+                      <a:tailEnd type="none" w="med" len="med"/>
+                    </a:lnR>
+                    <a:lnT w="12700" cap="flat" cmpd="sng" algn="ctr">
+                      <a:solidFill>
+                        <a:schemeClr val="tx1"/>
+                      </a:solidFill>
+                      <a:prstDash val="solid"/>
+                      <a:round/>
+                      <a:headEnd type="none" w="med" len="med"/>
+                      <a:tailEnd type="none" w="med" len="med"/>
+                    </a:lnT>
+                    <a:lnB w="12700" cap="flat" cmpd="sng" algn="ctr">
+                      <a:solidFill>
+                        <a:schemeClr val="tx1"/>
+                      </a:solidFill>
+                      <a:prstDash val="solid"/>
+                      <a:round/>
+                      <a:headEnd type="none" w="med" len="med"/>
+                      <a:tailEnd type="none" w="med" len="med"/>
+                    </a:lnB>
+                    <a:lnTlToBr w="12700" cmpd="sng">
+                      <a:noFill/>
+                      <a:prstDash val="solid"/>
+                    </a:lnTlToBr>
+                    <a:lnBlToTr w="12700" cmpd="sng">
+                      <a:noFill/>
+                      <a:prstDash val="solid"/>
+                    </a:lnBlToTr>
+                    <a:solidFill>
+                      <a:schemeClr val="accent6">
+                        <a:lumMod val="40000"/>
+                        <a:lumOff val="60000"/>
+                      </a:schemeClr>
+                    </a:solidFill>
+                  </a:tcPr>
+                </a:tc>
+                <a:tc>
+                  <a:txBody>
+                    <a:bodyPr/>
+                    <a:lstStyle/>
+                    <a:p>
+                      <a:pPr algn="ctr"/>
+                      <a:r>
+                        <a:rPr lang="en-GB" sz="1800" b="1" dirty="0">
+                          <a:solidFill>
+                            <a:schemeClr val="tx1"/>
+                          </a:solidFill>
+                        </a:rPr>
+                        <a:t>Y1</a:t>
+                      </a:r>
+                    </a:p>
+                  </a:txBody>
+                  <a:tcPr anchor="ctr">
+                    <a:lnL w="12700" cap="flat" cmpd="sng" algn="ctr">
+                      <a:solidFill>
+                        <a:schemeClr val="tx1"/>
+                      </a:solidFill>
+                      <a:prstDash val="solid"/>
+                      <a:round/>
+                      <a:headEnd type="none" w="med" len="med"/>
+                      <a:tailEnd type="none" w="med" len="med"/>
+                    </a:lnL>
+                    <a:lnR w="12700" cap="flat" cmpd="sng" algn="ctr">
+                      <a:solidFill>
+                        <a:schemeClr val="tx1"/>
+                      </a:solidFill>
+                      <a:prstDash val="solid"/>
+                      <a:round/>
+                      <a:headEnd type="none" w="med" len="med"/>
+                      <a:tailEnd type="none" w="med" len="med"/>
+                    </a:lnR>
+                    <a:lnT w="12700" cap="flat" cmpd="sng" algn="ctr">
+                      <a:solidFill>
+                        <a:schemeClr val="tx1"/>
+                      </a:solidFill>
+                      <a:prstDash val="solid"/>
+                      <a:round/>
+                      <a:headEnd type="none" w="med" len="med"/>
+                      <a:tailEnd type="none" w="med" len="med"/>
+                    </a:lnT>
+                    <a:lnB w="12700" cap="flat" cmpd="sng" algn="ctr">
+                      <a:solidFill>
+                        <a:schemeClr val="tx1"/>
+                      </a:solidFill>
+                      <a:prstDash val="solid"/>
+                      <a:round/>
+                      <a:headEnd type="none" w="med" len="med"/>
+                      <a:tailEnd type="none" w="med" len="med"/>
+                    </a:lnB>
+                    <a:lnTlToBr w="12700" cmpd="sng">
+                      <a:noFill/>
+                      <a:prstDash val="solid"/>
+                    </a:lnTlToBr>
+                    <a:lnBlToTr w="12700" cmpd="sng">
+                      <a:noFill/>
+                      <a:prstDash val="solid"/>
+                    </a:lnBlToTr>
+                    <a:solidFill>
+                      <a:schemeClr val="accent6">
+                        <a:lumMod val="40000"/>
+                        <a:lumOff val="60000"/>
+                      </a:schemeClr>
+                    </a:solidFill>
+                  </a:tcPr>
+                </a:tc>
+                <a:tc>
+                  <a:txBody>
+                    <a:bodyPr/>
+                    <a:lstStyle/>
+                    <a:p>
+                      <a:pPr algn="ctr"/>
+                      <a:r>
+                        <a:rPr lang="en-GB" sz="1800" b="1" dirty="0">
+                          <a:solidFill>
+                            <a:schemeClr val="tx1"/>
+                          </a:solidFill>
+                        </a:rPr>
+                        <a:t>Y2</a:t>
+                      </a:r>
+                    </a:p>
+                  </a:txBody>
+                  <a:tcPr anchor="ctr">
+                    <a:lnL w="12700" cap="flat" cmpd="sng" algn="ctr">
+                      <a:solidFill>
+                        <a:schemeClr val="tx1"/>
+                      </a:solidFill>
+                      <a:prstDash val="solid"/>
+                      <a:round/>
+                      <a:headEnd type="none" w="med" len="med"/>
+                      <a:tailEnd type="none" w="med" len="med"/>
+                    </a:lnL>
+                    <a:lnR w="12700" cap="flat" cmpd="sng" algn="ctr">
+                      <a:solidFill>
+                        <a:schemeClr val="tx1"/>
+                      </a:solidFill>
+                      <a:prstDash val="solid"/>
+                      <a:round/>
+                      <a:headEnd type="none" w="med" len="med"/>
+                      <a:tailEnd type="none" w="med" len="med"/>
+                    </a:lnR>
+                    <a:lnT w="12700" cap="flat" cmpd="sng" algn="ctr">
+                      <a:solidFill>
+                        <a:schemeClr val="tx1"/>
+                      </a:solidFill>
+                      <a:prstDash val="solid"/>
+                      <a:round/>
+                      <a:headEnd type="none" w="med" len="med"/>
+                      <a:tailEnd type="none" w="med" len="med"/>
+                    </a:lnT>
+                    <a:lnB w="12700" cap="flat" cmpd="sng" algn="ctr">
+                      <a:solidFill>
+                        <a:schemeClr val="tx1"/>
+                      </a:solidFill>
+                      <a:prstDash val="solid"/>
+                      <a:round/>
+                      <a:headEnd type="none" w="med" len="med"/>
+                      <a:tailEnd type="none" w="med" len="med"/>
+                    </a:lnB>
+                    <a:lnTlToBr w="12700" cmpd="sng">
+                      <a:noFill/>
+                      <a:prstDash val="solid"/>
+                    </a:lnTlToBr>
+                    <a:lnBlToTr w="12700" cmpd="sng">
+                      <a:noFill/>
+                      <a:prstDash val="solid"/>
+                    </a:lnBlToTr>
+                    <a:solidFill>
+                      <a:schemeClr val="accent6">
+                        <a:lumMod val="40000"/>
+                        <a:lumOff val="60000"/>
+                      </a:schemeClr>
+                    </a:solidFill>
+                  </a:tcPr>
+                </a:tc>
+                <a:tc>
+                  <a:txBody>
+                    <a:bodyPr/>
+                    <a:lstStyle/>
+                    <a:p>
+                      <a:pPr algn="ctr"/>
+                      <a:r>
+                        <a:rPr lang="en-GB" sz="1800" b="1" dirty="0">
+                          <a:solidFill>
+                            <a:schemeClr val="tx1"/>
+                          </a:solidFill>
+                        </a:rPr>
+                        <a:t>Y3</a:t>
+                      </a:r>
+                    </a:p>
+                  </a:txBody>
+                  <a:tcPr anchor="ctr">
+                    <a:lnL w="12700" cap="flat" cmpd="sng" algn="ctr">
+                      <a:solidFill>
+                        <a:schemeClr val="tx1"/>
+                      </a:solidFill>
+                      <a:prstDash val="solid"/>
+                      <a:round/>
+                      <a:headEnd type="none" w="med" len="med"/>
+                      <a:tailEnd type="none" w="med" len="med"/>
+                    </a:lnL>
+                    <a:lnR w="12700" cap="flat" cmpd="sng" algn="ctr">
+                      <a:solidFill>
+                        <a:schemeClr val="tx1"/>
+                      </a:solidFill>
+                      <a:prstDash val="solid"/>
+                      <a:round/>
+                      <a:headEnd type="none" w="med" len="med"/>
+                      <a:tailEnd type="none" w="med" len="med"/>
+                    </a:lnR>
+                    <a:lnT w="12700" cap="flat" cmpd="sng" algn="ctr">
+                      <a:solidFill>
+                        <a:schemeClr val="tx1"/>
+                      </a:solidFill>
+                      <a:prstDash val="solid"/>
+                      <a:round/>
+                      <a:headEnd type="none" w="med" len="med"/>
+                      <a:tailEnd type="none" w="med" len="med"/>
+                    </a:lnT>
+                    <a:lnB w="12700" cap="flat" cmpd="sng" algn="ctr">
+                      <a:solidFill>
+                        <a:schemeClr val="tx1"/>
+                      </a:solidFill>
+                      <a:prstDash val="solid"/>
+                      <a:round/>
+                      <a:headEnd type="none" w="med" len="med"/>
+                      <a:tailEnd type="none" w="med" len="med"/>
+                    </a:lnB>
+                    <a:lnTlToBr w="12700" cmpd="sng">
+                      <a:noFill/>
+                      <a:prstDash val="solid"/>
+                    </a:lnTlToBr>
+                    <a:lnBlToTr w="12700" cmpd="sng">
+                      <a:noFill/>
+                      <a:prstDash val="solid"/>
+                    </a:lnBlToTr>
+                    <a:solidFill>
+                      <a:schemeClr val="accent6">
+                        <a:lumMod val="40000"/>
+                        <a:lumOff val="60000"/>
+                      </a:schemeClr>
+                    </a:solidFill>
+                  </a:tcPr>
+                </a:tc>
+                <a:tc>
+                  <a:txBody>
+                    <a:bodyPr/>
+                    <a:lstStyle/>
+                    <a:p>
+                      <a:pPr algn="ctr"/>
+                      <a:r>
+                        <a:rPr lang="en-GB" sz="1800" b="1" dirty="0">
+                          <a:solidFill>
+                            <a:schemeClr val="tx1"/>
+                          </a:solidFill>
+                        </a:rPr>
+                        <a:t>Y4</a:t>
+                      </a:r>
+                    </a:p>
+                  </a:txBody>
+                  <a:tcPr anchor="ctr">
+                    <a:lnL w="12700" cap="flat" cmpd="sng" algn="ctr">
+                      <a:solidFill>
+                        <a:schemeClr val="tx1"/>
+                      </a:solidFill>
+                      <a:prstDash val="solid"/>
+                      <a:round/>
+                      <a:headEnd type="none" w="med" len="med"/>
+                      <a:tailEnd type="none" w="med" len="med"/>
+                    </a:lnL>
+                    <a:lnR w="12700" cap="flat" cmpd="sng" algn="ctr">
+                      <a:solidFill>
+                        <a:schemeClr val="tx1"/>
+                      </a:solidFill>
+                      <a:prstDash val="solid"/>
+                      <a:round/>
+                      <a:headEnd type="none" w="med" len="med"/>
+                      <a:tailEnd type="none" w="med" len="med"/>
+                    </a:lnR>
+                    <a:lnT w="12700" cap="flat" cmpd="sng" algn="ctr">
+                      <a:solidFill>
+                        <a:schemeClr val="tx1"/>
+                      </a:solidFill>
+                      <a:prstDash val="solid"/>
+                      <a:round/>
+                      <a:headEnd type="none" w="med" len="med"/>
+                      <a:tailEnd type="none" w="med" len="med"/>
+                    </a:lnT>
+                    <a:lnB w="12700" cap="flat" cmpd="sng" algn="ctr">
+                      <a:solidFill>
+                        <a:schemeClr val="tx1"/>
+                      </a:solidFill>
+                      <a:prstDash val="solid"/>
+                      <a:round/>
+                      <a:headEnd type="none" w="med" len="med"/>
+                      <a:tailEnd type="none" w="med" len="med"/>
+                    </a:lnB>
+                    <a:lnTlToBr w="12700" cmpd="sng">
+                      <a:noFill/>
+                      <a:prstDash val="solid"/>
+                    </a:lnTlToBr>
+                    <a:lnBlToTr w="12700" cmpd="sng">
+                      <a:noFill/>
+                      <a:prstDash val="solid"/>
+                    </a:lnBlToTr>
+                    <a:solidFill>
+                      <a:schemeClr val="accent6">
+                        <a:lumMod val="40000"/>
+                        <a:lumOff val="60000"/>
+                      </a:schemeClr>
+                    </a:solidFill>
+                  </a:tcPr>
+                </a:tc>
+                <a:extLst>
+                  <a:ext uri="{0D108BD9-81ED-4DB2-BD59-A6C34878D82A}">
+                    <a16:rowId xmlns:a16="http://schemas.microsoft.com/office/drawing/2014/main" val="2937080134"/>
+                  </a:ext>
+                </a:extLst>
+              </a:tr>
+              <a:tr h="452345">
+                <a:tc>
+                  <a:txBody>
+                    <a:bodyPr/>
+                    <a:lstStyle/>
+                    <a:p>
+                      <a:pPr algn="ctr"/>
+                      <a:r>
+                        <a:rPr lang="en-GB" sz="1800" b="1" dirty="0">
+                          <a:solidFill>
+                            <a:schemeClr val="tx1"/>
+                          </a:solidFill>
+                        </a:rPr>
+                        <a:t>Y1</a:t>
+                      </a:r>
+                    </a:p>
+                  </a:txBody>
+                  <a:tcPr anchor="ctr">
+                    <a:lnL w="12700" cap="flat" cmpd="sng" algn="ctr">
+                      <a:solidFill>
+                        <a:schemeClr val="tx1"/>
+                      </a:solidFill>
+                      <a:prstDash val="solid"/>
+                      <a:round/>
+                      <a:headEnd type="none" w="med" len="med"/>
+                      <a:tailEnd type="none" w="med" len="med"/>
+                    </a:lnL>
+                    <a:lnR w="12700" cap="flat" cmpd="sng" algn="ctr">
+                      <a:solidFill>
+                        <a:schemeClr val="tx1"/>
+                      </a:solidFill>
+                      <a:prstDash val="solid"/>
+                      <a:round/>
+                      <a:headEnd type="none" w="med" len="med"/>
+                      <a:tailEnd type="none" w="med" len="med"/>
+                    </a:lnR>
+                    <a:lnT w="12700" cap="flat" cmpd="sng" algn="ctr">
+                      <a:solidFill>
+                        <a:schemeClr val="tx1"/>
+                      </a:solidFill>
+                      <a:prstDash val="solid"/>
+                      <a:round/>
+                      <a:headEnd type="none" w="med" len="med"/>
+                      <a:tailEnd type="none" w="med" len="med"/>
+                    </a:lnT>
+                    <a:lnB w="12700" cap="flat" cmpd="sng" algn="ctr">
+                      <a:solidFill>
+                        <a:schemeClr val="tx1"/>
+                      </a:solidFill>
+                      <a:prstDash val="solid"/>
+                      <a:round/>
+                      <a:headEnd type="none" w="med" len="med"/>
+                      <a:tailEnd type="none" w="med" len="med"/>
+                    </a:lnB>
+                    <a:lnTlToBr w="12700" cmpd="sng">
+                      <a:noFill/>
+                      <a:prstDash val="solid"/>
+                    </a:lnTlToBr>
+                    <a:lnBlToTr w="12700" cmpd="sng">
+                      <a:noFill/>
+                      <a:prstDash val="solid"/>
+                    </a:lnBlToTr>
+                    <a:solidFill>
+                      <a:schemeClr val="accent6">
+                        <a:lumMod val="40000"/>
+                        <a:lumOff val="60000"/>
+                      </a:schemeClr>
+                    </a:solidFill>
+                  </a:tcPr>
+                </a:tc>
+                <a:tc>
+                  <a:txBody>
+                    <a:bodyPr/>
+                    <a:lstStyle/>
+                    <a:p>
+                      <a:pPr algn="ctr"/>
+                      <a:r>
+                        <a:rPr lang="en-GB" sz="1800" b="0" dirty="0">
+                          <a:solidFill>
+                            <a:schemeClr val="tx1"/>
+                          </a:solidFill>
+                        </a:rPr>
+                        <a:t>u</a:t>
+                      </a:r>
+                      <a:r>
+                        <a:rPr lang="en-GB" sz="1800" b="0" baseline="-25000" dirty="0">
+                          <a:solidFill>
+                            <a:schemeClr val="tx1"/>
+                          </a:solidFill>
+                        </a:rPr>
+                        <a:t>y1</a:t>
+                      </a:r>
+                      <a:endParaRPr lang="en-GB" sz="1800" b="0" dirty="0">
+                        <a:solidFill>
+                          <a:schemeClr val="tx1"/>
+                        </a:solidFill>
+                      </a:endParaRPr>
+                    </a:p>
+                  </a:txBody>
+                  <a:tcPr anchor="ctr">
+                    <a:lnL w="12700" cap="flat" cmpd="sng" algn="ctr">
+                      <a:solidFill>
+                        <a:schemeClr val="tx1"/>
+                      </a:solidFill>
+                      <a:prstDash val="solid"/>
+                      <a:round/>
+                      <a:headEnd type="none" w="med" len="med"/>
+                      <a:tailEnd type="none" w="med" len="med"/>
+                    </a:lnL>
+                    <a:lnR w="12700" cap="flat" cmpd="sng" algn="ctr">
+                      <a:noFill/>
+                      <a:prstDash val="solid"/>
+                      <a:round/>
+                      <a:headEnd type="none" w="med" len="med"/>
+                      <a:tailEnd type="none" w="med" len="med"/>
+                    </a:lnR>
+                    <a:lnT w="12700" cap="flat" cmpd="sng" algn="ctr">
+                      <a:solidFill>
+                        <a:schemeClr val="tx1"/>
+                      </a:solidFill>
+                      <a:prstDash val="solid"/>
+                      <a:round/>
+                      <a:headEnd type="none" w="med" len="med"/>
+                      <a:tailEnd type="none" w="med" len="med"/>
+                    </a:lnT>
+                    <a:lnB w="12700" cap="flat" cmpd="sng" algn="ctr">
+                      <a:noFill/>
+                      <a:prstDash val="solid"/>
+                      <a:round/>
+                      <a:headEnd type="none" w="med" len="med"/>
+                      <a:tailEnd type="none" w="med" len="med"/>
+                    </a:lnB>
+                    <a:lnTlToBr w="12700" cmpd="sng">
+                      <a:noFill/>
+                      <a:prstDash val="solid"/>
+                    </a:lnTlToBr>
+                    <a:lnBlToTr w="12700" cmpd="sng">
+                      <a:noFill/>
+                      <a:prstDash val="solid"/>
+                    </a:lnBlToTr>
+                    <a:solidFill>
+                      <a:schemeClr val="accent6">
+                        <a:lumMod val="40000"/>
+                        <a:lumOff val="60000"/>
+                      </a:schemeClr>
+                    </a:solidFill>
+                  </a:tcPr>
+                </a:tc>
+                <a:tc>
+                  <a:txBody>
+                    <a:bodyPr/>
+                    <a:lstStyle/>
+                    <a:p>
+                      <a:pPr algn="ctr"/>
+                      <a:endParaRPr lang="en-GB" sz="1800" b="0" dirty="0">
+                        <a:solidFill>
+                          <a:schemeClr val="tx1"/>
+                        </a:solidFill>
+                      </a:endParaRPr>
+                    </a:p>
+                  </a:txBody>
+                  <a:tcPr anchor="ctr">
+                    <a:lnL w="12700" cap="flat" cmpd="sng" algn="ctr">
+                      <a:noFill/>
+                      <a:prstDash val="solid"/>
+                      <a:round/>
+                      <a:headEnd type="none" w="med" len="med"/>
+                      <a:tailEnd type="none" w="med" len="med"/>
+                    </a:lnL>
+                    <a:lnR w="12700" cap="flat" cmpd="sng" algn="ctr">
+                      <a:noFill/>
+                      <a:prstDash val="solid"/>
+                      <a:round/>
+                      <a:headEnd type="none" w="med" len="med"/>
+                      <a:tailEnd type="none" w="med" len="med"/>
+                    </a:lnR>
+                    <a:lnT w="12700" cap="flat" cmpd="sng" algn="ctr">
+                      <a:solidFill>
+                        <a:schemeClr val="tx1"/>
+                      </a:solidFill>
+                      <a:prstDash val="solid"/>
+                      <a:round/>
+                      <a:headEnd type="none" w="med" len="med"/>
+                      <a:tailEnd type="none" w="med" len="med"/>
+                    </a:lnT>
+                    <a:lnB w="12700" cap="flat" cmpd="sng" algn="ctr">
+                      <a:noFill/>
+                      <a:prstDash val="solid"/>
+                      <a:round/>
+                      <a:headEnd type="none" w="med" len="med"/>
+                      <a:tailEnd type="none" w="med" len="med"/>
+                    </a:lnB>
+                    <a:lnTlToBr w="12700" cmpd="sng">
+                      <a:noFill/>
+                      <a:prstDash val="solid"/>
+                    </a:lnTlToBr>
+                    <a:lnBlToTr w="12700" cmpd="sng">
+                      <a:noFill/>
+                      <a:prstDash val="solid"/>
+                    </a:lnBlToTr>
+                    <a:solidFill>
+                      <a:schemeClr val="accent6">
+                        <a:lumMod val="40000"/>
+                        <a:lumOff val="60000"/>
+                      </a:schemeClr>
+                    </a:solidFill>
+                  </a:tcPr>
+                </a:tc>
+                <a:tc>
+                  <a:txBody>
+                    <a:bodyPr/>
+                    <a:lstStyle/>
+                    <a:p>
+                      <a:pPr algn="ctr"/>
+                      <a:endParaRPr lang="en-GB" sz="1800" b="0" dirty="0">
+                        <a:solidFill>
+                          <a:schemeClr val="tx1"/>
+                        </a:solidFill>
+                      </a:endParaRPr>
+                    </a:p>
+                  </a:txBody>
+                  <a:tcPr anchor="ctr">
+                    <a:lnL w="12700" cap="flat" cmpd="sng" algn="ctr">
+                      <a:noFill/>
+                      <a:prstDash val="solid"/>
+                      <a:round/>
+                      <a:headEnd type="none" w="med" len="med"/>
+                      <a:tailEnd type="none" w="med" len="med"/>
+                    </a:lnL>
+                    <a:lnR w="12700" cap="flat" cmpd="sng" algn="ctr">
+                      <a:noFill/>
+                      <a:prstDash val="solid"/>
+                      <a:round/>
+                      <a:headEnd type="none" w="med" len="med"/>
+                      <a:tailEnd type="none" w="med" len="med"/>
+                    </a:lnR>
+                    <a:lnT w="12700" cap="flat" cmpd="sng" algn="ctr">
+                      <a:solidFill>
+                        <a:schemeClr val="tx1"/>
+                      </a:solidFill>
+                      <a:prstDash val="solid"/>
+                      <a:round/>
+                      <a:headEnd type="none" w="med" len="med"/>
+                      <a:tailEnd type="none" w="med" len="med"/>
+                    </a:lnT>
+                    <a:lnB w="12700" cap="flat" cmpd="sng" algn="ctr">
+                      <a:noFill/>
+                      <a:prstDash val="solid"/>
+                      <a:round/>
+                      <a:headEnd type="none" w="med" len="med"/>
+                      <a:tailEnd type="none" w="med" len="med"/>
+                    </a:lnB>
+                    <a:lnTlToBr w="12700" cmpd="sng">
+                      <a:noFill/>
+                      <a:prstDash val="solid"/>
+                    </a:lnTlToBr>
+                    <a:lnBlToTr w="12700" cmpd="sng">
+                      <a:noFill/>
+                      <a:prstDash val="solid"/>
+                    </a:lnBlToTr>
+                    <a:solidFill>
+                      <a:schemeClr val="accent6">
+                        <a:lumMod val="40000"/>
+                        <a:lumOff val="60000"/>
+                      </a:schemeClr>
+                    </a:solidFill>
+                  </a:tcPr>
+                </a:tc>
+                <a:tc>
+                  <a:txBody>
+                    <a:bodyPr/>
+                    <a:lstStyle/>
+                    <a:p>
+                      <a:pPr algn="ctr"/>
+                      <a:endParaRPr lang="en-GB" sz="1800" b="0" dirty="0">
+                        <a:solidFill>
+                          <a:schemeClr val="tx1"/>
+                        </a:solidFill>
+                      </a:endParaRPr>
+                    </a:p>
+                  </a:txBody>
+                  <a:tcPr anchor="ctr">
+                    <a:lnL w="12700" cap="flat" cmpd="sng" algn="ctr">
+                      <a:noFill/>
+                      <a:prstDash val="solid"/>
+                      <a:round/>
+                      <a:headEnd type="none" w="med" len="med"/>
+                      <a:tailEnd type="none" w="med" len="med"/>
+                    </a:lnL>
+                    <a:lnR w="12700" cap="flat" cmpd="sng" algn="ctr">
+                      <a:noFill/>
+                      <a:prstDash val="solid"/>
+                      <a:round/>
+                      <a:headEnd type="none" w="med" len="med"/>
+                      <a:tailEnd type="none" w="med" len="med"/>
+                    </a:lnR>
+                    <a:lnT w="12700" cap="flat" cmpd="sng" algn="ctr">
+                      <a:solidFill>
+                        <a:schemeClr val="tx1"/>
+                      </a:solidFill>
+                      <a:prstDash val="solid"/>
+                      <a:round/>
+                      <a:headEnd type="none" w="med" len="med"/>
+                      <a:tailEnd type="none" w="med" len="med"/>
+                    </a:lnT>
+                    <a:lnB w="12700" cap="flat" cmpd="sng" algn="ctr">
+                      <a:noFill/>
+                      <a:prstDash val="solid"/>
+                      <a:round/>
+                      <a:headEnd type="none" w="med" len="med"/>
+                      <a:tailEnd type="none" w="med" len="med"/>
+                    </a:lnB>
+                    <a:lnTlToBr w="12700" cmpd="sng">
+                      <a:noFill/>
+                      <a:prstDash val="solid"/>
+                    </a:lnTlToBr>
+                    <a:lnBlToTr w="12700" cmpd="sng">
+                      <a:noFill/>
+                      <a:prstDash val="solid"/>
+                    </a:lnBlToTr>
+                    <a:solidFill>
+                      <a:schemeClr val="accent6">
+                        <a:lumMod val="40000"/>
+                        <a:lumOff val="60000"/>
+                      </a:schemeClr>
+                    </a:solidFill>
+                  </a:tcPr>
+                </a:tc>
+                <a:extLst>
+                  <a:ext uri="{0D108BD9-81ED-4DB2-BD59-A6C34878D82A}">
+                    <a16:rowId xmlns:a16="http://schemas.microsoft.com/office/drawing/2014/main" val="2230996407"/>
+                  </a:ext>
+                </a:extLst>
+              </a:tr>
+              <a:tr h="452345">
+                <a:tc>
+                  <a:txBody>
+                    <a:bodyPr/>
+                    <a:lstStyle/>
+                    <a:p>
+                      <a:pPr algn="ctr"/>
+                      <a:r>
+                        <a:rPr lang="en-GB" sz="1800" b="1" dirty="0">
+                          <a:solidFill>
+                            <a:schemeClr val="tx1"/>
+                          </a:solidFill>
+                        </a:rPr>
+                        <a:t>Y2</a:t>
+                      </a:r>
+                    </a:p>
+                  </a:txBody>
+                  <a:tcPr anchor="ctr">
+                    <a:lnL w="12700" cap="flat" cmpd="sng" algn="ctr">
+                      <a:solidFill>
+                        <a:schemeClr val="tx1"/>
+                      </a:solidFill>
+                      <a:prstDash val="solid"/>
+                      <a:round/>
+                      <a:headEnd type="none" w="med" len="med"/>
+                      <a:tailEnd type="none" w="med" len="med"/>
+                    </a:lnL>
+                    <a:lnR w="12700" cap="flat" cmpd="sng" algn="ctr">
+                      <a:solidFill>
+                        <a:schemeClr val="tx1"/>
+                      </a:solidFill>
+                      <a:prstDash val="solid"/>
+                      <a:round/>
+                      <a:headEnd type="none" w="med" len="med"/>
+                      <a:tailEnd type="none" w="med" len="med"/>
+                    </a:lnR>
+                    <a:lnT w="12700" cap="flat" cmpd="sng" algn="ctr">
+                      <a:solidFill>
+                        <a:schemeClr val="tx1"/>
+                      </a:solidFill>
+                      <a:prstDash val="solid"/>
+                      <a:round/>
+                      <a:headEnd type="none" w="med" len="med"/>
+                      <a:tailEnd type="none" w="med" len="med"/>
+                    </a:lnT>
+                    <a:lnB w="12700" cap="flat" cmpd="sng" algn="ctr">
+                      <a:solidFill>
+                        <a:schemeClr val="tx1"/>
+                      </a:solidFill>
+                      <a:prstDash val="solid"/>
+                      <a:round/>
+                      <a:headEnd type="none" w="med" len="med"/>
+                      <a:tailEnd type="none" w="med" len="med"/>
+                    </a:lnB>
+                    <a:lnTlToBr w="12700" cmpd="sng">
+                      <a:noFill/>
+                      <a:prstDash val="solid"/>
+                    </a:lnTlToBr>
+                    <a:lnBlToTr w="12700" cmpd="sng">
+                      <a:noFill/>
+                      <a:prstDash val="solid"/>
+                    </a:lnBlToTr>
+                    <a:solidFill>
+                      <a:schemeClr val="accent6">
+                        <a:lumMod val="40000"/>
+                        <a:lumOff val="60000"/>
+                      </a:schemeClr>
+                    </a:solidFill>
+                  </a:tcPr>
+                </a:tc>
+                <a:tc>
+                  <a:txBody>
+                    <a:bodyPr/>
+                    <a:lstStyle/>
+                    <a:p>
+                      <a:pPr algn="ctr"/>
+                      <a:r>
+                        <a:rPr lang="en-GB" sz="1800" b="0" dirty="0">
+                          <a:solidFill>
+                            <a:schemeClr val="tx1"/>
+                          </a:solidFill>
+                        </a:rPr>
+                        <a:t>d</a:t>
+                      </a:r>
+                    </a:p>
+                  </a:txBody>
+                  <a:tcPr anchor="ctr">
+                    <a:lnL w="12700" cap="flat" cmpd="sng" algn="ctr">
+                      <a:solidFill>
+                        <a:schemeClr val="tx1"/>
+                      </a:solidFill>
+                      <a:prstDash val="solid"/>
+                      <a:round/>
+                      <a:headEnd type="none" w="med" len="med"/>
+                      <a:tailEnd type="none" w="med" len="med"/>
+                    </a:lnL>
+                    <a:lnR w="12700" cap="flat" cmpd="sng" algn="ctr">
+                      <a:noFill/>
+                      <a:prstDash val="solid"/>
+                      <a:round/>
+                      <a:headEnd type="none" w="med" len="med"/>
+                      <a:tailEnd type="none" w="med" len="med"/>
+                    </a:lnR>
+                    <a:lnT w="12700" cap="flat" cmpd="sng" algn="ctr">
+                      <a:noFill/>
+                      <a:prstDash val="solid"/>
+                      <a:round/>
+                      <a:headEnd type="none" w="med" len="med"/>
+                      <a:tailEnd type="none" w="med" len="med"/>
+                    </a:lnT>
+                    <a:lnB w="12700" cap="flat" cmpd="sng" algn="ctr">
+                      <a:noFill/>
+                      <a:prstDash val="solid"/>
+                      <a:round/>
+                      <a:headEnd type="none" w="med" len="med"/>
+                      <a:tailEnd type="none" w="med" len="med"/>
+                    </a:lnB>
+                    <a:lnTlToBr w="12700" cmpd="sng">
+                      <a:noFill/>
+                      <a:prstDash val="solid"/>
+                    </a:lnTlToBr>
+                    <a:lnBlToTr w="12700" cmpd="sng">
+                      <a:noFill/>
+                      <a:prstDash val="solid"/>
+                    </a:lnBlToTr>
+                    <a:solidFill>
+                      <a:schemeClr val="accent6">
+                        <a:lumMod val="40000"/>
+                        <a:lumOff val="60000"/>
+                      </a:schemeClr>
+                    </a:solidFill>
+                  </a:tcPr>
+                </a:tc>
+                <a:tc>
+                  <a:txBody>
+                    <a:bodyPr/>
+                    <a:lstStyle/>
+                    <a:p>
+                      <a:pPr algn="ctr"/>
+                      <a:r>
+                        <a:rPr lang="en-GB" sz="1800" b="0" dirty="0">
+                          <a:solidFill>
+                            <a:schemeClr val="tx1"/>
+                          </a:solidFill>
+                        </a:rPr>
+                        <a:t>u</a:t>
+                      </a:r>
+                      <a:r>
+                        <a:rPr lang="en-GB" sz="1800" b="0" baseline="-25000" dirty="0">
+                          <a:solidFill>
+                            <a:schemeClr val="tx1"/>
+                          </a:solidFill>
+                        </a:rPr>
+                        <a:t>y2</a:t>
+                      </a:r>
+                      <a:endParaRPr lang="en-GB" sz="1800" b="0" dirty="0">
+                        <a:solidFill>
+                          <a:schemeClr val="tx1"/>
+                        </a:solidFill>
+                      </a:endParaRPr>
+                    </a:p>
+                  </a:txBody>
+                  <a:tcPr anchor="ctr">
+                    <a:lnL w="12700" cap="flat" cmpd="sng" algn="ctr">
+                      <a:noFill/>
+                      <a:prstDash val="solid"/>
+                      <a:round/>
+                      <a:headEnd type="none" w="med" len="med"/>
+                      <a:tailEnd type="none" w="med" len="med"/>
+                    </a:lnL>
+                    <a:lnR w="12700" cap="flat" cmpd="sng" algn="ctr">
+                      <a:noFill/>
+                      <a:prstDash val="solid"/>
+                      <a:round/>
+                      <a:headEnd type="none" w="med" len="med"/>
+                      <a:tailEnd type="none" w="med" len="med"/>
+                    </a:lnR>
+                    <a:lnT w="12700" cap="flat" cmpd="sng" algn="ctr">
+                      <a:noFill/>
+                      <a:prstDash val="solid"/>
+                      <a:round/>
+                      <a:headEnd type="none" w="med" len="med"/>
+                      <a:tailEnd type="none" w="med" len="med"/>
+                    </a:lnT>
+                    <a:lnB w="12700" cap="flat" cmpd="sng" algn="ctr">
+                      <a:noFill/>
+                      <a:prstDash val="solid"/>
+                      <a:round/>
+                      <a:headEnd type="none" w="med" len="med"/>
+                      <a:tailEnd type="none" w="med" len="med"/>
+                    </a:lnB>
+                    <a:lnTlToBr w="12700" cmpd="sng">
+                      <a:noFill/>
+                      <a:prstDash val="solid"/>
+                    </a:lnTlToBr>
+                    <a:lnBlToTr w="12700" cmpd="sng">
+                      <a:noFill/>
+                      <a:prstDash val="solid"/>
+                    </a:lnBlToTr>
+                    <a:solidFill>
+                      <a:schemeClr val="accent6">
+                        <a:lumMod val="40000"/>
+                        <a:lumOff val="60000"/>
+                      </a:schemeClr>
+                    </a:solidFill>
+                  </a:tcPr>
+                </a:tc>
+                <a:tc>
+                  <a:txBody>
+                    <a:bodyPr/>
+                    <a:lstStyle/>
+                    <a:p>
+                      <a:pPr algn="ctr"/>
+                      <a:endParaRPr lang="en-GB" sz="1800" b="0" dirty="0">
+                        <a:solidFill>
+                          <a:schemeClr val="tx1"/>
+                        </a:solidFill>
+                      </a:endParaRPr>
+                    </a:p>
+                  </a:txBody>
+                  <a:tcPr anchor="ctr">
+                    <a:lnL w="12700" cap="flat" cmpd="sng" algn="ctr">
+                      <a:noFill/>
+                      <a:prstDash val="solid"/>
+                      <a:round/>
+                      <a:headEnd type="none" w="med" len="med"/>
+                      <a:tailEnd type="none" w="med" len="med"/>
+                    </a:lnL>
+                    <a:lnR w="12700" cap="flat" cmpd="sng" algn="ctr">
+                      <a:noFill/>
+                      <a:prstDash val="solid"/>
+                      <a:round/>
+                      <a:headEnd type="none" w="med" len="med"/>
+                      <a:tailEnd type="none" w="med" len="med"/>
+                    </a:lnR>
+                    <a:lnT w="12700" cap="flat" cmpd="sng" algn="ctr">
+                      <a:noFill/>
+                      <a:prstDash val="solid"/>
+                      <a:round/>
+                      <a:headEnd type="none" w="med" len="med"/>
+                      <a:tailEnd type="none" w="med" len="med"/>
+                    </a:lnT>
+                    <a:lnB w="12700" cap="flat" cmpd="sng" algn="ctr">
+                      <a:noFill/>
+                      <a:prstDash val="solid"/>
+                      <a:round/>
+                      <a:headEnd type="none" w="med" len="med"/>
+                      <a:tailEnd type="none" w="med" len="med"/>
+                    </a:lnB>
+                    <a:lnTlToBr w="12700" cmpd="sng">
+                      <a:noFill/>
+                      <a:prstDash val="solid"/>
+                    </a:lnTlToBr>
+                    <a:lnBlToTr w="12700" cmpd="sng">
+                      <a:noFill/>
+                      <a:prstDash val="solid"/>
+                    </a:lnBlToTr>
+                    <a:solidFill>
+                      <a:schemeClr val="accent6">
+                        <a:lumMod val="40000"/>
+                        <a:lumOff val="60000"/>
+                      </a:schemeClr>
+                    </a:solidFill>
+                  </a:tcPr>
+                </a:tc>
+                <a:tc>
+                  <a:txBody>
+                    <a:bodyPr/>
+                    <a:lstStyle/>
+                    <a:p>
+                      <a:pPr algn="ctr"/>
+                      <a:endParaRPr lang="en-GB" sz="1800" b="0" dirty="0">
+                        <a:solidFill>
+                          <a:schemeClr val="tx1"/>
+                        </a:solidFill>
+                      </a:endParaRPr>
+                    </a:p>
+                  </a:txBody>
+                  <a:tcPr anchor="ctr">
+                    <a:lnL w="12700" cap="flat" cmpd="sng" algn="ctr">
+                      <a:noFill/>
+                      <a:prstDash val="solid"/>
+                      <a:round/>
+                      <a:headEnd type="none" w="med" len="med"/>
+                      <a:tailEnd type="none" w="med" len="med"/>
+                    </a:lnL>
+                    <a:lnR w="12700" cap="flat" cmpd="sng" algn="ctr">
+                      <a:noFill/>
+                      <a:prstDash val="solid"/>
+                      <a:round/>
+                      <a:headEnd type="none" w="med" len="med"/>
+                      <a:tailEnd type="none" w="med" len="med"/>
+                    </a:lnR>
+                    <a:lnT w="12700" cap="flat" cmpd="sng" algn="ctr">
+                      <a:noFill/>
+                      <a:prstDash val="solid"/>
+                      <a:round/>
+                      <a:headEnd type="none" w="med" len="med"/>
+                      <a:tailEnd type="none" w="med" len="med"/>
+                    </a:lnT>
+                    <a:lnB w="12700" cap="flat" cmpd="sng" algn="ctr">
+                      <a:noFill/>
+                      <a:prstDash val="solid"/>
+                      <a:round/>
+                      <a:headEnd type="none" w="med" len="med"/>
+                      <a:tailEnd type="none" w="med" len="med"/>
+                    </a:lnB>
+                    <a:lnTlToBr w="12700" cmpd="sng">
+                      <a:noFill/>
+                      <a:prstDash val="solid"/>
+                    </a:lnTlToBr>
+                    <a:lnBlToTr w="12700" cmpd="sng">
+                      <a:noFill/>
+                      <a:prstDash val="solid"/>
+                    </a:lnBlToTr>
+                    <a:solidFill>
+                      <a:schemeClr val="accent6">
+                        <a:lumMod val="40000"/>
+                        <a:lumOff val="60000"/>
+                      </a:schemeClr>
+                    </a:solidFill>
+                  </a:tcPr>
+                </a:tc>
+                <a:extLst>
+                  <a:ext uri="{0D108BD9-81ED-4DB2-BD59-A6C34878D82A}">
+                    <a16:rowId xmlns:a16="http://schemas.microsoft.com/office/drawing/2014/main" val="1073739229"/>
+                  </a:ext>
+                </a:extLst>
+              </a:tr>
+              <a:tr h="452345">
+                <a:tc>
+                  <a:txBody>
+                    <a:bodyPr/>
+                    <a:lstStyle/>
+                    <a:p>
+                      <a:pPr algn="ctr"/>
+                      <a:r>
+                        <a:rPr lang="en-GB" sz="1800" b="1" dirty="0">
+                          <a:solidFill>
+                            <a:schemeClr val="tx1"/>
+                          </a:solidFill>
+                        </a:rPr>
+                        <a:t>Y3</a:t>
+                      </a:r>
+                    </a:p>
+                  </a:txBody>
+                  <a:tcPr anchor="ctr">
+                    <a:lnL w="12700" cap="flat" cmpd="sng" algn="ctr">
+                      <a:solidFill>
+                        <a:schemeClr val="tx1"/>
+                      </a:solidFill>
+                      <a:prstDash val="solid"/>
+                      <a:round/>
+                      <a:headEnd type="none" w="med" len="med"/>
+                      <a:tailEnd type="none" w="med" len="med"/>
+                    </a:lnL>
+                    <a:lnR w="12700" cap="flat" cmpd="sng" algn="ctr">
+                      <a:solidFill>
+                        <a:schemeClr val="tx1"/>
+                      </a:solidFill>
+                      <a:prstDash val="solid"/>
+                      <a:round/>
+                      <a:headEnd type="none" w="med" len="med"/>
+                      <a:tailEnd type="none" w="med" len="med"/>
+                    </a:lnR>
+                    <a:lnT w="12700" cap="flat" cmpd="sng" algn="ctr">
+                      <a:solidFill>
+                        <a:schemeClr val="tx1"/>
+                      </a:solidFill>
+                      <a:prstDash val="solid"/>
+                      <a:round/>
+                      <a:headEnd type="none" w="med" len="med"/>
+                      <a:tailEnd type="none" w="med" len="med"/>
+                    </a:lnT>
+                    <a:lnB w="12700" cap="flat" cmpd="sng" algn="ctr">
+                      <a:solidFill>
+                        <a:schemeClr val="tx1"/>
+                      </a:solidFill>
+                      <a:prstDash val="solid"/>
+                      <a:round/>
+                      <a:headEnd type="none" w="med" len="med"/>
+                      <a:tailEnd type="none" w="med" len="med"/>
+                    </a:lnB>
+                    <a:lnTlToBr w="12700" cmpd="sng">
+                      <a:noFill/>
+                      <a:prstDash val="solid"/>
+                    </a:lnTlToBr>
+                    <a:lnBlToTr w="12700" cmpd="sng">
+                      <a:noFill/>
+                      <a:prstDash val="solid"/>
+                    </a:lnBlToTr>
+                    <a:solidFill>
+                      <a:schemeClr val="accent6">
+                        <a:lumMod val="40000"/>
+                        <a:lumOff val="60000"/>
+                      </a:schemeClr>
+                    </a:solidFill>
+                  </a:tcPr>
+                </a:tc>
+                <a:tc>
+                  <a:txBody>
+                    <a:bodyPr/>
+                    <a:lstStyle/>
+                    <a:p>
+                      <a:pPr algn="ctr"/>
+                      <a:r>
+                        <a:rPr lang="en-GB" sz="1800" b="0" dirty="0">
+                          <a:solidFill>
+                            <a:schemeClr val="tx1"/>
+                          </a:solidFill>
+                        </a:rPr>
+                        <a:t>b</a:t>
+                      </a:r>
+                    </a:p>
+                  </a:txBody>
+                  <a:tcPr anchor="ctr">
+                    <a:lnL w="12700" cap="flat" cmpd="sng" algn="ctr">
+                      <a:solidFill>
+                        <a:schemeClr val="tx1"/>
+                      </a:solidFill>
+                      <a:prstDash val="solid"/>
+                      <a:round/>
+                      <a:headEnd type="none" w="med" len="med"/>
+                      <a:tailEnd type="none" w="med" len="med"/>
+                    </a:lnL>
+                    <a:lnR w="12700" cap="flat" cmpd="sng" algn="ctr">
+                      <a:noFill/>
+                      <a:prstDash val="solid"/>
+                      <a:round/>
+                      <a:headEnd type="none" w="med" len="med"/>
+                      <a:tailEnd type="none" w="med" len="med"/>
+                    </a:lnR>
+                    <a:lnT w="12700" cap="flat" cmpd="sng" algn="ctr">
+                      <a:noFill/>
+                      <a:prstDash val="solid"/>
+                      <a:round/>
+                      <a:headEnd type="none" w="med" len="med"/>
+                      <a:tailEnd type="none" w="med" len="med"/>
+                    </a:lnT>
+                    <a:lnB w="12700" cap="flat" cmpd="sng" algn="ctr">
+                      <a:noFill/>
+                      <a:prstDash val="solid"/>
+                      <a:round/>
+                      <a:headEnd type="none" w="med" len="med"/>
+                      <a:tailEnd type="none" w="med" len="med"/>
+                    </a:lnB>
+                    <a:lnTlToBr w="12700" cmpd="sng">
+                      <a:noFill/>
+                      <a:prstDash val="solid"/>
+                    </a:lnTlToBr>
+                    <a:lnBlToTr w="12700" cmpd="sng">
+                      <a:noFill/>
+                      <a:prstDash val="solid"/>
+                    </a:lnBlToTr>
+                    <a:solidFill>
+                      <a:schemeClr val="accent6">
+                        <a:lumMod val="40000"/>
+                        <a:lumOff val="60000"/>
+                      </a:schemeClr>
+                    </a:solidFill>
+                  </a:tcPr>
+                </a:tc>
+                <a:tc>
+                  <a:txBody>
+                    <a:bodyPr/>
+                    <a:lstStyle/>
+                    <a:p>
+                      <a:pPr algn="ctr"/>
+                      <a:r>
+                        <a:rPr lang="en-GB" sz="1800" b="0" dirty="0">
+                          <a:solidFill>
+                            <a:schemeClr val="tx1"/>
+                          </a:solidFill>
+                        </a:rPr>
+                        <a:t>e</a:t>
+                      </a:r>
+                    </a:p>
+                  </a:txBody>
+                  <a:tcPr anchor="ctr">
+                    <a:lnL w="12700" cap="flat" cmpd="sng" algn="ctr">
+                      <a:noFill/>
+                      <a:prstDash val="solid"/>
+                      <a:round/>
+                      <a:headEnd type="none" w="med" len="med"/>
+                      <a:tailEnd type="none" w="med" len="med"/>
+                    </a:lnL>
+                    <a:lnR w="12700" cap="flat" cmpd="sng" algn="ctr">
+                      <a:noFill/>
+                      <a:prstDash val="solid"/>
+                      <a:round/>
+                      <a:headEnd type="none" w="med" len="med"/>
+                      <a:tailEnd type="none" w="med" len="med"/>
+                    </a:lnR>
+                    <a:lnT w="12700" cap="flat" cmpd="sng" algn="ctr">
+                      <a:noFill/>
+                      <a:prstDash val="solid"/>
+                      <a:round/>
+                      <a:headEnd type="none" w="med" len="med"/>
+                      <a:tailEnd type="none" w="med" len="med"/>
+                    </a:lnT>
+                    <a:lnB w="12700" cap="flat" cmpd="sng" algn="ctr">
+                      <a:noFill/>
+                      <a:prstDash val="solid"/>
+                      <a:round/>
+                      <a:headEnd type="none" w="med" len="med"/>
+                      <a:tailEnd type="none" w="med" len="med"/>
+                    </a:lnB>
+                    <a:lnTlToBr w="12700" cmpd="sng">
+                      <a:noFill/>
+                      <a:prstDash val="solid"/>
+                    </a:lnTlToBr>
+                    <a:lnBlToTr w="12700" cmpd="sng">
+                      <a:noFill/>
+                      <a:prstDash val="solid"/>
+                    </a:lnBlToTr>
+                    <a:solidFill>
+                      <a:schemeClr val="accent6">
+                        <a:lumMod val="40000"/>
+                        <a:lumOff val="60000"/>
+                      </a:schemeClr>
+                    </a:solidFill>
+                  </a:tcPr>
+                </a:tc>
+                <a:tc>
+                  <a:txBody>
+                    <a:bodyPr/>
+                    <a:lstStyle/>
+                    <a:p>
+                      <a:pPr algn="ctr"/>
+                      <a:r>
+                        <a:rPr lang="en-GB" sz="1800" b="0" dirty="0">
+                          <a:solidFill>
+                            <a:schemeClr val="tx1"/>
+                          </a:solidFill>
+                        </a:rPr>
+                        <a:t>u</a:t>
+                      </a:r>
+                      <a:r>
+                        <a:rPr lang="en-GB" sz="1800" b="0" baseline="-25000" dirty="0">
+                          <a:solidFill>
+                            <a:schemeClr val="tx1"/>
+                          </a:solidFill>
+                        </a:rPr>
+                        <a:t>y3</a:t>
+                      </a:r>
+                      <a:endParaRPr lang="en-GB" sz="1800" b="0" dirty="0">
+                        <a:solidFill>
+                          <a:schemeClr val="tx1"/>
+                        </a:solidFill>
+                      </a:endParaRPr>
+                    </a:p>
+                  </a:txBody>
+                  <a:tcPr anchor="ctr">
+                    <a:lnL w="12700" cap="flat" cmpd="sng" algn="ctr">
+                      <a:noFill/>
+                      <a:prstDash val="solid"/>
+                      <a:round/>
+                      <a:headEnd type="none" w="med" len="med"/>
+                      <a:tailEnd type="none" w="med" len="med"/>
+                    </a:lnL>
+                    <a:lnR w="12700" cap="flat" cmpd="sng" algn="ctr">
+                      <a:noFill/>
+                      <a:prstDash val="solid"/>
+                      <a:round/>
+                      <a:headEnd type="none" w="med" len="med"/>
+                      <a:tailEnd type="none" w="med" len="med"/>
+                    </a:lnR>
+                    <a:lnT w="12700" cap="flat" cmpd="sng" algn="ctr">
+                      <a:noFill/>
+                      <a:prstDash val="solid"/>
+                      <a:round/>
+                      <a:headEnd type="none" w="med" len="med"/>
+                      <a:tailEnd type="none" w="med" len="med"/>
+                    </a:lnT>
+                    <a:lnB w="12700" cap="flat" cmpd="sng" algn="ctr">
+                      <a:noFill/>
+                      <a:prstDash val="solid"/>
+                      <a:round/>
+                      <a:headEnd type="none" w="med" len="med"/>
+                      <a:tailEnd type="none" w="med" len="med"/>
+                    </a:lnB>
+                    <a:lnTlToBr w="12700" cmpd="sng">
+                      <a:noFill/>
+                      <a:prstDash val="solid"/>
+                    </a:lnTlToBr>
+                    <a:lnBlToTr w="12700" cmpd="sng">
+                      <a:noFill/>
+                      <a:prstDash val="solid"/>
+                    </a:lnBlToTr>
+                    <a:solidFill>
+                      <a:schemeClr val="accent6">
+                        <a:lumMod val="40000"/>
+                        <a:lumOff val="60000"/>
+                      </a:schemeClr>
+                    </a:solidFill>
+                  </a:tcPr>
+                </a:tc>
+                <a:tc>
+                  <a:txBody>
+                    <a:bodyPr/>
+                    <a:lstStyle/>
+                    <a:p>
+                      <a:pPr algn="ctr"/>
+                      <a:endParaRPr lang="en-GB" sz="1800" b="0" dirty="0">
+                        <a:solidFill>
+                          <a:schemeClr val="tx1"/>
+                        </a:solidFill>
+                      </a:endParaRPr>
+                    </a:p>
+                  </a:txBody>
+                  <a:tcPr anchor="ctr">
+                    <a:lnL w="12700" cap="flat" cmpd="sng" algn="ctr">
+                      <a:noFill/>
+                      <a:prstDash val="solid"/>
+                      <a:round/>
+                      <a:headEnd type="none" w="med" len="med"/>
+                      <a:tailEnd type="none" w="med" len="med"/>
+                    </a:lnL>
+                    <a:lnR w="12700" cap="flat" cmpd="sng" algn="ctr">
+                      <a:noFill/>
+                      <a:prstDash val="solid"/>
+                      <a:round/>
+                      <a:headEnd type="none" w="med" len="med"/>
+                      <a:tailEnd type="none" w="med" len="med"/>
+                    </a:lnR>
+                    <a:lnT w="12700" cap="flat" cmpd="sng" algn="ctr">
+                      <a:noFill/>
+                      <a:prstDash val="solid"/>
+                      <a:round/>
+                      <a:headEnd type="none" w="med" len="med"/>
+                      <a:tailEnd type="none" w="med" len="med"/>
+                    </a:lnT>
+                    <a:lnB w="12700" cap="flat" cmpd="sng" algn="ctr">
+                      <a:noFill/>
+                      <a:prstDash val="solid"/>
+                      <a:round/>
+                      <a:headEnd type="none" w="med" len="med"/>
+                      <a:tailEnd type="none" w="med" len="med"/>
+                    </a:lnB>
+                    <a:lnTlToBr w="12700" cmpd="sng">
+                      <a:noFill/>
+                      <a:prstDash val="solid"/>
+                    </a:lnTlToBr>
+                    <a:lnBlToTr w="12700" cmpd="sng">
+                      <a:noFill/>
+                      <a:prstDash val="solid"/>
+                    </a:lnBlToTr>
+                    <a:solidFill>
+                      <a:schemeClr val="accent6">
+                        <a:lumMod val="40000"/>
+                        <a:lumOff val="60000"/>
+                      </a:schemeClr>
+                    </a:solidFill>
+                  </a:tcPr>
+                </a:tc>
+                <a:extLst>
+                  <a:ext uri="{0D108BD9-81ED-4DB2-BD59-A6C34878D82A}">
+                    <a16:rowId xmlns:a16="http://schemas.microsoft.com/office/drawing/2014/main" val="1915547210"/>
+                  </a:ext>
+                </a:extLst>
+              </a:tr>
+              <a:tr h="452345">
+                <a:tc>
+                  <a:txBody>
+                    <a:bodyPr/>
+                    <a:lstStyle/>
+                    <a:p>
+                      <a:pPr algn="ctr"/>
+                      <a:r>
+                        <a:rPr lang="en-GB" sz="1800" b="1" dirty="0">
+                          <a:solidFill>
+                            <a:schemeClr val="tx1"/>
+                          </a:solidFill>
+                        </a:rPr>
+                        <a:t>Y4</a:t>
+                      </a:r>
+                    </a:p>
+                  </a:txBody>
+                  <a:tcPr anchor="ctr">
+                    <a:lnL w="12700" cap="flat" cmpd="sng" algn="ctr">
+                      <a:solidFill>
+                        <a:schemeClr val="tx1"/>
+                      </a:solidFill>
+                      <a:prstDash val="solid"/>
+                      <a:round/>
+                      <a:headEnd type="none" w="med" len="med"/>
+                      <a:tailEnd type="none" w="med" len="med"/>
+                    </a:lnL>
+                    <a:lnR w="12700" cap="flat" cmpd="sng" algn="ctr">
+                      <a:solidFill>
+                        <a:schemeClr val="tx1"/>
+                      </a:solidFill>
+                      <a:prstDash val="solid"/>
+                      <a:round/>
+                      <a:headEnd type="none" w="med" len="med"/>
+                      <a:tailEnd type="none" w="med" len="med"/>
+                    </a:lnR>
+                    <a:lnT w="12700" cap="flat" cmpd="sng" algn="ctr">
+                      <a:solidFill>
+                        <a:schemeClr val="tx1"/>
+                      </a:solidFill>
+                      <a:prstDash val="solid"/>
+                      <a:round/>
+                      <a:headEnd type="none" w="med" len="med"/>
+                      <a:tailEnd type="none" w="med" len="med"/>
+                    </a:lnT>
+                    <a:lnB w="12700" cap="flat" cmpd="sng" algn="ctr">
+                      <a:solidFill>
+                        <a:schemeClr val="tx1"/>
+                      </a:solidFill>
+                      <a:prstDash val="solid"/>
+                      <a:round/>
+                      <a:headEnd type="none" w="med" len="med"/>
+                      <a:tailEnd type="none" w="med" len="med"/>
+                    </a:lnB>
+                    <a:lnTlToBr w="12700" cmpd="sng">
+                      <a:noFill/>
+                      <a:prstDash val="solid"/>
+                    </a:lnTlToBr>
+                    <a:lnBlToTr w="12700" cmpd="sng">
+                      <a:noFill/>
+                      <a:prstDash val="solid"/>
+                    </a:lnBlToTr>
+                    <a:solidFill>
+                      <a:schemeClr val="accent6">
+                        <a:lumMod val="40000"/>
+                        <a:lumOff val="60000"/>
+                      </a:schemeClr>
+                    </a:solidFill>
+                  </a:tcPr>
+                </a:tc>
+                <a:tc>
+                  <a:txBody>
+                    <a:bodyPr/>
+                    <a:lstStyle/>
+                    <a:p>
+                      <a:pPr algn="ctr"/>
+                      <a:r>
+                        <a:rPr lang="en-GB" sz="1800" b="0" dirty="0">
+                          <a:solidFill>
+                            <a:schemeClr val="tx1"/>
+                          </a:solidFill>
+                        </a:rPr>
+                        <a:t>a</a:t>
+                      </a:r>
+                    </a:p>
+                  </a:txBody>
+                  <a:tcPr anchor="ctr">
+                    <a:lnL w="12700" cap="flat" cmpd="sng" algn="ctr">
+                      <a:solidFill>
+                        <a:schemeClr val="tx1"/>
+                      </a:solidFill>
+                      <a:prstDash val="solid"/>
+                      <a:round/>
+                      <a:headEnd type="none" w="med" len="med"/>
+                      <a:tailEnd type="none" w="med" len="med"/>
+                    </a:lnL>
+                    <a:lnR w="12700" cap="flat" cmpd="sng" algn="ctr">
+                      <a:noFill/>
+                      <a:prstDash val="solid"/>
+                      <a:round/>
+                      <a:headEnd type="none" w="med" len="med"/>
+                      <a:tailEnd type="none" w="med" len="med"/>
+                    </a:lnR>
+                    <a:lnT w="12700" cap="flat" cmpd="sng" algn="ctr">
+                      <a:noFill/>
+                      <a:prstDash val="solid"/>
+                      <a:round/>
+                      <a:headEnd type="none" w="med" len="med"/>
+                      <a:tailEnd type="none" w="med" len="med"/>
+                    </a:lnT>
+                    <a:lnB w="12700" cap="flat" cmpd="sng" algn="ctr">
+                      <a:noFill/>
+                      <a:prstDash val="solid"/>
+                      <a:round/>
+                      <a:headEnd type="none" w="med" len="med"/>
+                      <a:tailEnd type="none" w="med" len="med"/>
+                    </a:lnB>
+                    <a:lnTlToBr w="12700" cmpd="sng">
+                      <a:noFill/>
+                      <a:prstDash val="solid"/>
+                    </a:lnTlToBr>
+                    <a:lnBlToTr w="12700" cmpd="sng">
+                      <a:noFill/>
+                      <a:prstDash val="solid"/>
+                    </a:lnBlToTr>
+                    <a:solidFill>
+                      <a:schemeClr val="accent6">
+                        <a:lumMod val="40000"/>
+                        <a:lumOff val="60000"/>
+                      </a:schemeClr>
+                    </a:solidFill>
+                  </a:tcPr>
+                </a:tc>
+                <a:tc>
+                  <a:txBody>
+                    <a:bodyPr/>
+                    <a:lstStyle/>
+                    <a:p>
+                      <a:pPr algn="ctr"/>
+                      <a:r>
+                        <a:rPr lang="en-GB" sz="1800" b="0" dirty="0">
+                          <a:solidFill>
+                            <a:schemeClr val="tx1"/>
+                          </a:solidFill>
+                        </a:rPr>
+                        <a:t>c</a:t>
+                      </a:r>
+                    </a:p>
+                  </a:txBody>
+                  <a:tcPr anchor="ctr">
+                    <a:lnL w="12700" cap="flat" cmpd="sng" algn="ctr">
+                      <a:noFill/>
+                      <a:prstDash val="solid"/>
+                      <a:round/>
+                      <a:headEnd type="none" w="med" len="med"/>
+                      <a:tailEnd type="none" w="med" len="med"/>
+                    </a:lnL>
+                    <a:lnR w="12700" cap="flat" cmpd="sng" algn="ctr">
+                      <a:noFill/>
+                      <a:prstDash val="solid"/>
+                      <a:round/>
+                      <a:headEnd type="none" w="med" len="med"/>
+                      <a:tailEnd type="none" w="med" len="med"/>
+                    </a:lnR>
+                    <a:lnT w="12700" cap="flat" cmpd="sng" algn="ctr">
+                      <a:noFill/>
+                      <a:prstDash val="solid"/>
+                      <a:round/>
+                      <a:headEnd type="none" w="med" len="med"/>
+                      <a:tailEnd type="none" w="med" len="med"/>
+                    </a:lnT>
+                    <a:lnB w="12700" cap="flat" cmpd="sng" algn="ctr">
+                      <a:noFill/>
+                      <a:prstDash val="solid"/>
+                      <a:round/>
+                      <a:headEnd type="none" w="med" len="med"/>
+                      <a:tailEnd type="none" w="med" len="med"/>
+                    </a:lnB>
+                    <a:lnTlToBr w="12700" cmpd="sng">
+                      <a:noFill/>
+                      <a:prstDash val="solid"/>
+                    </a:lnTlToBr>
+                    <a:lnBlToTr w="12700" cmpd="sng">
+                      <a:noFill/>
+                      <a:prstDash val="solid"/>
+                    </a:lnBlToTr>
+                    <a:solidFill>
+                      <a:schemeClr val="accent6">
+                        <a:lumMod val="40000"/>
+                        <a:lumOff val="60000"/>
+                      </a:schemeClr>
+                    </a:solidFill>
+                  </a:tcPr>
+                </a:tc>
+                <a:tc>
+                  <a:txBody>
+                    <a:bodyPr/>
+                    <a:lstStyle/>
+                    <a:p>
+                      <a:pPr algn="ctr"/>
+                      <a:r>
+                        <a:rPr lang="en-GB" sz="1800" b="0" dirty="0">
+                          <a:solidFill>
+                            <a:schemeClr val="tx1"/>
+                          </a:solidFill>
+                        </a:rPr>
+                        <a:t>f</a:t>
+                      </a:r>
+                    </a:p>
+                  </a:txBody>
+                  <a:tcPr anchor="ctr">
+                    <a:lnL w="12700" cap="flat" cmpd="sng" algn="ctr">
+                      <a:noFill/>
+                      <a:prstDash val="solid"/>
+                      <a:round/>
+                      <a:headEnd type="none" w="med" len="med"/>
+                      <a:tailEnd type="none" w="med" len="med"/>
+                    </a:lnL>
+                    <a:lnR w="12700" cap="flat" cmpd="sng" algn="ctr">
+                      <a:noFill/>
+                      <a:prstDash val="solid"/>
+                      <a:round/>
+                      <a:headEnd type="none" w="med" len="med"/>
+                      <a:tailEnd type="none" w="med" len="med"/>
+                    </a:lnR>
+                    <a:lnT w="12700" cap="flat" cmpd="sng" algn="ctr">
+                      <a:noFill/>
+                      <a:prstDash val="solid"/>
+                      <a:round/>
+                      <a:headEnd type="none" w="med" len="med"/>
+                      <a:tailEnd type="none" w="med" len="med"/>
+                    </a:lnT>
+                    <a:lnB w="12700" cap="flat" cmpd="sng" algn="ctr">
+                      <a:noFill/>
+                      <a:prstDash val="solid"/>
+                      <a:round/>
+                      <a:headEnd type="none" w="med" len="med"/>
+                      <a:tailEnd type="none" w="med" len="med"/>
+                    </a:lnB>
+                    <a:lnTlToBr w="12700" cmpd="sng">
+                      <a:noFill/>
+                      <a:prstDash val="solid"/>
+                    </a:lnTlToBr>
+                    <a:lnBlToTr w="12700" cmpd="sng">
+                      <a:noFill/>
+                      <a:prstDash val="solid"/>
+                    </a:lnBlToTr>
+                    <a:solidFill>
+                      <a:schemeClr val="accent6">
+                        <a:lumMod val="40000"/>
+                        <a:lumOff val="60000"/>
+                      </a:schemeClr>
+                    </a:solidFill>
+                  </a:tcPr>
+                </a:tc>
+                <a:tc>
+                  <a:txBody>
+                    <a:bodyPr/>
+                    <a:lstStyle/>
+                    <a:p>
+                      <a:pPr algn="ctr"/>
+                      <a:r>
+                        <a:rPr lang="en-GB" sz="1800" b="0" dirty="0">
+                          <a:solidFill>
+                            <a:schemeClr val="tx1"/>
+                          </a:solidFill>
+                        </a:rPr>
+                        <a:t>u</a:t>
+                      </a:r>
+                      <a:r>
+                        <a:rPr lang="en-GB" sz="1800" b="0" baseline="-25000" dirty="0">
+                          <a:solidFill>
+                            <a:schemeClr val="tx1"/>
+                          </a:solidFill>
+                        </a:rPr>
+                        <a:t>y4</a:t>
+                      </a:r>
+                      <a:endParaRPr lang="en-GB" sz="1800" b="0" dirty="0">
+                        <a:solidFill>
+                          <a:schemeClr val="tx1"/>
+                        </a:solidFill>
+                      </a:endParaRPr>
+                    </a:p>
+                  </a:txBody>
+                  <a:tcPr anchor="ctr">
+                    <a:lnL w="12700" cap="flat" cmpd="sng" algn="ctr">
+                      <a:noFill/>
+                      <a:prstDash val="solid"/>
+                      <a:round/>
+                      <a:headEnd type="none" w="med" len="med"/>
+                      <a:tailEnd type="none" w="med" len="med"/>
+                    </a:lnL>
+                    <a:lnR w="12700" cap="flat" cmpd="sng" algn="ctr">
+                      <a:noFill/>
+                      <a:prstDash val="solid"/>
+                      <a:round/>
+                      <a:headEnd type="none" w="med" len="med"/>
+                      <a:tailEnd type="none" w="med" len="med"/>
+                    </a:lnR>
+                    <a:lnT w="12700" cap="flat" cmpd="sng" algn="ctr">
+                      <a:noFill/>
+                      <a:prstDash val="solid"/>
+                      <a:round/>
+                      <a:headEnd type="none" w="med" len="med"/>
+                      <a:tailEnd type="none" w="med" len="med"/>
+                    </a:lnT>
+                    <a:lnB w="12700" cap="flat" cmpd="sng" algn="ctr">
+                      <a:noFill/>
+                      <a:prstDash val="solid"/>
+                      <a:round/>
+                      <a:headEnd type="none" w="med" len="med"/>
+                      <a:tailEnd type="none" w="med" len="med"/>
+                    </a:lnB>
+                    <a:lnTlToBr w="12700" cmpd="sng">
+                      <a:noFill/>
+                      <a:prstDash val="solid"/>
+                    </a:lnTlToBr>
+                    <a:lnBlToTr w="12700" cmpd="sng">
+                      <a:noFill/>
+                      <a:prstDash val="solid"/>
+                    </a:lnBlToTr>
+                    <a:solidFill>
+                      <a:schemeClr val="accent6">
+                        <a:lumMod val="40000"/>
+                        <a:lumOff val="60000"/>
+                      </a:schemeClr>
+                    </a:solidFill>
+                  </a:tcPr>
+                </a:tc>
+                <a:extLst>
+                  <a:ext uri="{0D108BD9-81ED-4DB2-BD59-A6C34878D82A}">
+                    <a16:rowId xmlns:a16="http://schemas.microsoft.com/office/drawing/2014/main" val="1045833436"/>
+                  </a:ext>
+                </a:extLst>
+              </a:tr>
+            </a:tbl>
+          </a:graphicData>
+        </a:graphic>
+      </p:graphicFrame>
+      <p:sp>
+        <p:nvSpPr>
+          <p:cNvPr id="40" name="TextBox 39">
+            <a:extLst>
+              <a:ext uri="{FF2B5EF4-FFF2-40B4-BE49-F238E27FC236}">
+                <a16:creationId xmlns:a16="http://schemas.microsoft.com/office/drawing/2014/main" id="{23C373EE-A710-464D-AF43-B3E85A410A4D}"/>
+              </a:ext>
+            </a:extLst>
+          </p:cNvPr>
+          <p:cNvSpPr txBox="1"/>
+          <p:nvPr/>
+        </p:nvSpPr>
+        <p:spPr>
+          <a:xfrm>
+            <a:off x="270105" y="3306423"/>
+            <a:ext cx="5173962" cy="954107"/>
+          </a:xfrm>
+          <a:prstGeom prst="rect">
+            <a:avLst/>
+          </a:prstGeom>
+          <a:noFill/>
+        </p:spPr>
+        <p:txBody>
+          <a:bodyPr wrap="square" rtlCol="0">
+            <a:spAutoFit/>
+          </a:bodyPr>
+          <a:lstStyle/>
+          <a:p>
+            <a:r>
+              <a:rPr lang="en-GB" sz="2800" dirty="0"/>
+              <a:t>Model 1 Implied Covariances	 				</a:t>
+            </a:r>
+          </a:p>
+        </p:txBody>
+      </p:sp>
+      <p:sp>
+        <p:nvSpPr>
+          <p:cNvPr id="41" name="TextBox 40">
+            <a:extLst>
+              <a:ext uri="{FF2B5EF4-FFF2-40B4-BE49-F238E27FC236}">
+                <a16:creationId xmlns:a16="http://schemas.microsoft.com/office/drawing/2014/main" id="{F88A00C4-A091-4229-ACE4-2CB5EBE6BD5F}"/>
+              </a:ext>
+            </a:extLst>
+          </p:cNvPr>
+          <p:cNvSpPr txBox="1"/>
+          <p:nvPr/>
+        </p:nvSpPr>
+        <p:spPr>
+          <a:xfrm>
+            <a:off x="6257876" y="3306423"/>
+            <a:ext cx="5173962" cy="954107"/>
+          </a:xfrm>
+          <a:prstGeom prst="rect">
+            <a:avLst/>
+          </a:prstGeom>
+          <a:noFill/>
+        </p:spPr>
+        <p:txBody>
+          <a:bodyPr wrap="square" rtlCol="0">
+            <a:spAutoFit/>
+          </a:bodyPr>
+          <a:lstStyle/>
+          <a:p>
+            <a:r>
+              <a:rPr lang="en-GB" sz="2800" dirty="0"/>
+              <a:t>Model 2 Implied Covariances	 				</a:t>
+            </a:r>
+          </a:p>
+        </p:txBody>
+      </p:sp>
+    </p:spTree>
+    <p:extLst>
+      <p:ext uri="{BB962C8B-B14F-4D97-AF65-F5344CB8AC3E}">
+        <p14:creationId xmlns:p14="http://schemas.microsoft.com/office/powerpoint/2010/main" val="3776752328"/>
+      </p:ext>
+    </p:extLst>
+  </p:cSld>
+  <p:clrMapOvr>
+    <a:masterClrMapping/>
+  </p:clrMapOvr>
+</p:sld>
+</file>
+
 <file path=ppt/theme/theme1.xml><?xml version="1.0" encoding="utf-8"?>
 <a:theme xmlns:a="http://schemas.openxmlformats.org/drawingml/2006/main" name="Office Theme">
   <a:themeElements>
